--- a/AI Workshop Day2.pptx
+++ b/AI Workshop Day2.pptx
@@ -1125,6 +1125,13 @@
             <a:schemeClr val="lt1"/>
           </a:fontRef>
         </p:style>
+        <p:txBody>
+          <a:bodyPr/>
+          <a:lstStyle/>
+          <a:p>
+            <a:endParaRPr lang="en-US"/>
+          </a:p>
+        </p:txBody>
       </p:sp>
       <p:sp>
         <p:nvSpPr>
@@ -1163,6 +1170,13 @@
             <a:schemeClr val="lt1"/>
           </a:fontRef>
         </p:style>
+        <p:txBody>
+          <a:bodyPr/>
+          <a:lstStyle/>
+          <a:p>
+            <a:endParaRPr lang="en-US"/>
+          </a:p>
+        </p:txBody>
       </p:sp>
       <p:sp>
         <p:nvSpPr>
@@ -2411,6 +2425,13 @@
             <a:schemeClr val="lt1"/>
           </a:fontRef>
         </p:style>
+        <p:txBody>
+          <a:bodyPr/>
+          <a:lstStyle/>
+          <a:p>
+            <a:endParaRPr lang="en-US"/>
+          </a:p>
+        </p:txBody>
       </p:sp>
       <p:sp>
         <p:nvSpPr>
@@ -2449,6 +2470,13 @@
             <a:schemeClr val="lt1"/>
           </a:fontRef>
         </p:style>
+        <p:txBody>
+          <a:bodyPr/>
+          <a:lstStyle/>
+          <a:p>
+            <a:endParaRPr lang="en-US"/>
+          </a:p>
+        </p:txBody>
       </p:sp>
       <p:sp>
         <p:nvSpPr>
@@ -4460,13 +4488,7 @@
   <p:cSld>
     <p:spTree>
       <p:nvGrpSpPr>
-        <p:cNvPr id="1" name="">
-          <a:extLst>
-            <a:ext uri="{FF2B5EF4-FFF2-40B4-BE49-F238E27FC236}">
-              <a16:creationId xmlns:a16="http://schemas.microsoft.com/office/drawing/2014/main" id="{A7967F6F-F587-5897-7D9F-5E3BF40D58B7}"/>
-            </a:ext>
-          </a:extLst>
-        </p:cNvPr>
+        <p:cNvPr id="1" name=""/>
         <p:cNvGrpSpPr/>
         <p:nvPr/>
       </p:nvGrpSpPr>
@@ -4480,25 +4502,231 @@
       </p:grpSpPr>
       <p:sp>
         <p:nvSpPr>
-          <p:cNvPr id="2" name="Title 1">
-            <a:extLst>
-              <a:ext uri="{FF2B5EF4-FFF2-40B4-BE49-F238E27FC236}">
-                <a16:creationId xmlns:a16="http://schemas.microsoft.com/office/drawing/2014/main" id="{83BE437C-05AC-8A31-7D52-2EA7D7240376}"/>
-              </a:ext>
-            </a:extLst>
-          </p:cNvPr>
+          <p:cNvPr id="91" name="HeaderBar"/>
           <p:cNvSpPr>
             <a:spLocks noGrp="1"/>
           </p:cNvSpPr>
-          <p:nvPr>
-            <p:ph type="title"/>
-          </p:nvPr>
-        </p:nvSpPr>
-        <p:spPr>
-          <a:xfrm>
-            <a:off x="993763" y="243472"/>
-            <a:ext cx="10058400" cy="817578"/>
-          </a:xfrm>
+          <p:nvPr/>
+        </p:nvSpPr>
+        <p:spPr>
+          <a:xfrm>
+            <a:off x="0" y="0"/>
+            <a:ext cx="12192000" cy="800000"/>
+          </a:xfrm>
+          <a:prstGeom prst="rect">
+            <a:avLst/>
+          </a:prstGeom>
+          <a:solidFill>
+            <a:srgbClr val="15616D"/>
+          </a:solidFill>
+          <a:ln>
+            <a:noFill/>
+          </a:ln>
+        </p:spPr>
+        <p:txBody>
+          <a:bodyPr anchor="ctr">
+            <a:normAutofit/>
+          </a:bodyPr>
+          <a:lstStyle/>
+          <a:p>
+            <a:pPr algn="l"/>
+            <a:r>
+              <a:rPr lang="en-US" sz="2400" b="1" dirty="0">
+                <a:solidFill>
+                  <a:srgbClr val="FFFFFF"/>
+                </a:solidFill>
+                <a:latin typeface="Trebuchet MS"/>
+              </a:rPr>
+              <a:t>  Key Takeaways — Session 2</a:t>
+            </a:r>
+          </a:p>
+        </p:txBody>
+      </p:sp>
+      <p:sp>
+        <p:nvSpPr>
+          <p:cNvPr id="10" name="RC10"/>
+          <p:cNvSpPr txBox="1">
+            <a:spLocks noGrp="1"/>
+          </p:cNvSpPr>
+          <p:nvPr/>
+        </p:nvSpPr>
+        <p:spPr>
+          <a:xfrm>
+            <a:off x="457200" y="950000"/>
+            <a:ext cx="3600000" cy="1500000"/>
+          </a:xfrm>
+          <a:prstGeom prst="roundRect">
+            <a:avLst>
+              <a:gd name="adj" fmla="val 16667"/>
+            </a:avLst>
+          </a:prstGeom>
+          <a:solidFill>
+            <a:srgbClr val="15616D"/>
+          </a:solidFill>
+          <a:ln>
+            <a:noFill/>
+          </a:ln>
+        </p:spPr>
+        <p:txBody>
+          <a:bodyPr anchor="ctr">
+            <a:normAutofit/>
+          </a:bodyPr>
+          <a:lstStyle/>
+          <a:p>
+            <a:pPr algn="ctr"/>
+            <a:r>
+              <a:rPr lang="en-US" sz="4000" b="1" dirty="0">
+                <a:solidFill>
+                  <a:srgbClr val="FFFFFF"/>
+                </a:solidFill>
+                <a:latin typeface="Trebuchet MS"/>
+              </a:rPr>
+              <a:t>Text = Numbers</a:t>
+            </a:r>
+          </a:p>
+          <a:p>
+            <a:pPr algn="ctr"/>
+            <a:r>
+              <a:rPr lang="en-US" sz="1100" b="0" dirty="0">
+                <a:solidFill>
+                  <a:srgbClr val="C5CAB8"/>
+                </a:solidFill>
+                <a:latin typeface="Calibri"/>
+              </a:rPr>
+              <a:t>NLP converts language to vectors machines understand</a:t>
+            </a:r>
+          </a:p>
+        </p:txBody>
+      </p:sp>
+      <p:sp>
+        <p:nvSpPr>
+          <p:cNvPr id="11" name="RC11"/>
+          <p:cNvSpPr txBox="1">
+            <a:spLocks noGrp="1"/>
+          </p:cNvSpPr>
+          <p:nvPr/>
+        </p:nvSpPr>
+        <p:spPr>
+          <a:xfrm>
+            <a:off x="4296600" y="950000"/>
+            <a:ext cx="3600000" cy="1500000"/>
+          </a:xfrm>
+          <a:prstGeom prst="roundRect">
+            <a:avLst>
+              <a:gd name="adj" fmla="val 16667"/>
+            </a:avLst>
+          </a:prstGeom>
+          <a:solidFill>
+            <a:srgbClr val="BC5308"/>
+          </a:solidFill>
+          <a:ln>
+            <a:noFill/>
+          </a:ln>
+        </p:spPr>
+        <p:txBody>
+          <a:bodyPr anchor="ctr">
+            <a:normAutofit/>
+          </a:bodyPr>
+          <a:lstStyle/>
+          <a:p>
+            <a:pPr algn="ctr"/>
+            <a:r>
+              <a:rPr lang="en-US" sz="4000" b="1" dirty="0">
+                <a:solidFill>
+                  <a:srgbClr val="FFFFFF"/>
+                </a:solidFill>
+                <a:latin typeface="Trebuchet MS"/>
+              </a:rPr>
+              <a:t>Context Matters</a:t>
+            </a:r>
+          </a:p>
+          <a:p>
+            <a:pPr algn="ctr"/>
+            <a:r>
+              <a:rPr lang="en-US" sz="1100" b="0" dirty="0">
+                <a:solidFill>
+                  <a:srgbClr val="C5CAB8"/>
+                </a:solidFill>
+                <a:latin typeface="Calibri"/>
+              </a:rPr>
+              <a:t>Embeddings capture meaning, BoW only counts words</a:t>
+            </a:r>
+          </a:p>
+        </p:txBody>
+      </p:sp>
+      <p:sp>
+        <p:nvSpPr>
+          <p:cNvPr id="12" name="RC12"/>
+          <p:cNvSpPr txBox="1">
+            <a:spLocks noGrp="1"/>
+          </p:cNvSpPr>
+          <p:nvPr/>
+        </p:nvSpPr>
+        <p:spPr>
+          <a:xfrm>
+            <a:off x="8136000" y="950000"/>
+            <a:ext cx="3600000" cy="1500000"/>
+          </a:xfrm>
+          <a:prstGeom prst="roundRect">
+            <a:avLst>
+              <a:gd name="adj" fmla="val 16667"/>
+            </a:avLst>
+          </a:prstGeom>
+          <a:solidFill>
+            <a:srgbClr val="FF7D00"/>
+          </a:solidFill>
+          <a:ln>
+            <a:noFill/>
+          </a:ln>
+        </p:spPr>
+        <p:txBody>
+          <a:bodyPr anchor="ctr">
+            <a:normAutofit/>
+          </a:bodyPr>
+          <a:lstStyle/>
+          <a:p>
+            <a:pPr algn="ctr"/>
+            <a:r>
+              <a:rPr lang="en-US" sz="4000" b="1" dirty="0">
+                <a:solidFill>
+                  <a:srgbClr val="001524"/>
+                </a:solidFill>
+                <a:latin typeface="Trebuchet MS"/>
+              </a:rPr>
+              <a:t>AutoML Helps</a:t>
+            </a:r>
+          </a:p>
+          <a:p>
+            <a:pPr algn="ctr"/>
+            <a:r>
+              <a:rPr lang="en-US" sz="1100" b="0" dirty="0">
+                <a:solidFill>
+                  <a:srgbClr val="001524"/>
+                </a:solidFill>
+                <a:latin typeface="Calibri"/>
+              </a:rPr>
+              <a:t>Automates search but needs human guidance</a:t>
+            </a:r>
+          </a:p>
+        </p:txBody>
+      </p:sp>
+      <p:sp>
+        <p:nvSpPr>
+          <p:cNvPr id="20" name="TB20"/>
+          <p:cNvSpPr txBox="1">
+            <a:spLocks noGrp="1"/>
+          </p:cNvSpPr>
+          <p:nvPr/>
+        </p:nvSpPr>
+        <p:spPr>
+          <a:xfrm>
+            <a:off x="457200" y="2700000"/>
+            <a:ext cx="11200000" cy="400000"/>
+          </a:xfrm>
+          <a:prstGeom prst="rect">
+            <a:avLst/>
+          </a:prstGeom>
+          <a:noFill/>
         </p:spPr>
         <p:txBody>
           <a:bodyPr>
@@ -4506,48 +4734,455 @@
           </a:bodyPr>
           <a:lstStyle/>
           <a:p>
-            <a:r>
-              <a:rPr lang="en-US" dirty="0"/>
-              <a:t>Key Takeaways</a:t>
-            </a:r>
-          </a:p>
-        </p:txBody>
-      </p:sp>
-      <p:sp>
-        <p:nvSpPr>
-          <p:cNvPr id="3" name="Content Placeholder 2">
-            <a:extLst>
-              <a:ext uri="{FF2B5EF4-FFF2-40B4-BE49-F238E27FC236}">
-                <a16:creationId xmlns:a16="http://schemas.microsoft.com/office/drawing/2014/main" id="{08794D40-1F81-DCF1-E075-67642038EB3C}"/>
-              </a:ext>
-            </a:extLst>
-          </p:cNvPr>
+            <a:pPr algn="l"/>
+            <a:r>
+              <a:rPr lang="en-US" sz="1800" b="1" dirty="0">
+                <a:solidFill>
+                  <a:srgbClr val="15616D"/>
+                </a:solidFill>
+                <a:latin typeface="Trebuchet MS"/>
+              </a:rPr>
+              <a:t>What You Should Take Away From Today</a:t>
+            </a:r>
+          </a:p>
+        </p:txBody>
+      </p:sp>
+      <p:sp>
+        <p:nvSpPr>
+          <p:cNvPr id="21" name="BL21"/>
+          <p:cNvSpPr txBox="1">
+            <a:spLocks noGrp="1"/>
+          </p:cNvSpPr>
+          <p:nvPr/>
+        </p:nvSpPr>
+        <p:spPr>
+          <a:xfrm>
+            <a:off x="457200" y="3200000"/>
+            <a:ext cx="5400000" cy="3000000"/>
+          </a:xfrm>
+          <a:prstGeom prst="rect">
+            <a:avLst/>
+          </a:prstGeom>
+          <a:noFill/>
+        </p:spPr>
+        <p:txBody>
+          <a:bodyPr>
+            <a:normAutofit/>
+          </a:bodyPr>
+          <a:lstStyle/>
+          <a:p>
+            <a:pPr marL="342900" indent="-342900">
+              <a:lnSpc>
+                <a:spcPts val="3600"/>
+              </a:lnSpc>
+              <a:spcBef>
+                <a:spcPts val="200"/>
+              </a:spcBef>
+              <a:buNone/>
+            </a:pPr>
+            <a:r>
+              <a:rPr lang="en-US" sz="1500" b="1" dirty="0">
+                <a:solidFill>
+                  <a:srgbClr val="15616D"/>
+                </a:solidFill>
+                <a:latin typeface="Trebuchet MS"/>
+              </a:rPr>
+              <a:t>NLP Fundamentals</a:t>
+            </a:r>
+          </a:p>
+          <a:p>
+            <a:pPr marL="342900" indent="-342900">
+              <a:lnSpc>
+                <a:spcPts val="3600"/>
+              </a:lnSpc>
+              <a:spcBef>
+                <a:spcPts val="200"/>
+              </a:spcBef>
+              <a:buChar char="■"/>
+            </a:pPr>
+            <a:r>
+              <a:rPr lang="en-US" sz="1300" b="0" dirty="0">
+                <a:solidFill>
+                  <a:srgbClr val="444444"/>
+                </a:solidFill>
+                <a:latin typeface="Calibri"/>
+              </a:rPr>
+              <a:t>Text must be converted to numbers before ML can work on it</a:t>
+            </a:r>
+          </a:p>
+          <a:p>
+            <a:pPr marL="342900" indent="-342900">
+              <a:lnSpc>
+                <a:spcPts val="3600"/>
+              </a:lnSpc>
+              <a:spcBef>
+                <a:spcPts val="200"/>
+              </a:spcBef>
+              <a:buChar char="■"/>
+            </a:pPr>
+            <a:r>
+              <a:rPr lang="en-US" sz="1300" b="0" dirty="0">
+                <a:solidFill>
+                  <a:srgbClr val="444444"/>
+                </a:solidFill>
+                <a:latin typeface="Calibri"/>
+              </a:rPr>
+              <a:t>BoW/TF-IDF are simple and effective baselines — start here</a:t>
+            </a:r>
+          </a:p>
+          <a:p>
+            <a:pPr marL="342900" indent="-342900">
+              <a:lnSpc>
+                <a:spcPts val="3600"/>
+              </a:lnSpc>
+              <a:spcBef>
+                <a:spcPts val="200"/>
+              </a:spcBef>
+              <a:buChar char="■"/>
+            </a:pPr>
+            <a:r>
+              <a:rPr lang="en-US" sz="1300" b="0" dirty="0">
+                <a:solidFill>
+                  <a:srgbClr val="444444"/>
+                </a:solidFill>
+                <a:latin typeface="Calibri"/>
+              </a:rPr>
+              <a:t>Embeddings (Word2Vec, BERT) capture semantic meaning — more powerful</a:t>
+            </a:r>
+          </a:p>
+          <a:p>
+            <a:pPr marL="342900" indent="-342900">
+              <a:lnSpc>
+                <a:spcPts val="3600"/>
+              </a:lnSpc>
+              <a:spcBef>
+                <a:spcPts val="200"/>
+              </a:spcBef>
+              <a:buChar char="■"/>
+            </a:pPr>
+            <a:r>
+              <a:rPr lang="en-US" sz="1300" b="0" dirty="0">
+                <a:solidFill>
+                  <a:srgbClr val="444444"/>
+                </a:solidFill>
+                <a:latin typeface="Calibri"/>
+              </a:rPr>
+              <a:t>spaCy gives you NER, POS tagging, dependency parsing for free</a:t>
+            </a:r>
+          </a:p>
+          <a:p>
+            <a:pPr marL="342900" indent="-342900">
+              <a:lnSpc>
+                <a:spcPts val="3600"/>
+              </a:lnSpc>
+              <a:spcBef>
+                <a:spcPts val="200"/>
+              </a:spcBef>
+              <a:buNone/>
+            </a:pPr>
+            <a:endParaRPr lang="en-US" sz="1300" b="0" dirty="0">
+              <a:solidFill>
+                <a:srgbClr val="444444"/>
+              </a:solidFill>
+              <a:latin typeface="Calibri"/>
+            </a:endParaRPr>
+          </a:p>
+          <a:p>
+            <a:pPr marL="342900" indent="-342900">
+              <a:lnSpc>
+                <a:spcPts val="3600"/>
+              </a:lnSpc>
+              <a:spcBef>
+                <a:spcPts val="200"/>
+              </a:spcBef>
+              <a:buNone/>
+            </a:pPr>
+            <a:r>
+              <a:rPr lang="en-US" sz="1500" b="1" dirty="0">
+                <a:solidFill>
+                  <a:srgbClr val="BC5308"/>
+                </a:solidFill>
+                <a:latin typeface="Trebuchet MS"/>
+              </a:rPr>
+              <a:t>AutoML</a:t>
+            </a:r>
+          </a:p>
+          <a:p>
+            <a:pPr marL="342900" indent="-342900">
+              <a:lnSpc>
+                <a:spcPts val="3600"/>
+              </a:lnSpc>
+              <a:spcBef>
+                <a:spcPts val="200"/>
+              </a:spcBef>
+              <a:buChar char="■"/>
+            </a:pPr>
+            <a:r>
+              <a:rPr lang="en-US" sz="1300" b="0" dirty="0">
+                <a:solidFill>
+                  <a:srgbClr val="444444"/>
+                </a:solidFill>
+                <a:latin typeface="Calibri"/>
+              </a:rPr>
+              <a:t>H2O AutoML can find the best model without manual tuning</a:t>
+            </a:r>
+          </a:p>
+          <a:p>
+            <a:pPr marL="342900" indent="-342900">
+              <a:lnSpc>
+                <a:spcPts val="3600"/>
+              </a:lnSpc>
+              <a:spcBef>
+                <a:spcPts val="200"/>
+              </a:spcBef>
+              <a:buChar char="■"/>
+            </a:pPr>
+            <a:r>
+              <a:rPr lang="en-US" sz="1300" b="0" dirty="0">
+                <a:solidFill>
+                  <a:srgbClr val="444444"/>
+                </a:solidFill>
+                <a:latin typeface="Calibri"/>
+              </a:rPr>
+              <a:t>Stacked Ensembles often beat any single algorithm</a:t>
+            </a:r>
+          </a:p>
+        </p:txBody>
+      </p:sp>
+      <p:sp>
+        <p:nvSpPr>
+          <p:cNvPr id="22" name="BL22"/>
+          <p:cNvSpPr txBox="1">
+            <a:spLocks noGrp="1"/>
+          </p:cNvSpPr>
+          <p:nvPr/>
+        </p:nvSpPr>
+        <p:spPr>
+          <a:xfrm>
+            <a:off x="6100000" y="3200000"/>
+            <a:ext cx="5700000" cy="3000000"/>
+          </a:xfrm>
+          <a:prstGeom prst="rect">
+            <a:avLst/>
+          </a:prstGeom>
+          <a:noFill/>
+        </p:spPr>
+        <p:txBody>
+          <a:bodyPr>
+            <a:normAutofit/>
+          </a:bodyPr>
+          <a:lstStyle/>
+          <a:p>
+            <a:pPr marL="342900" indent="-342900">
+              <a:lnSpc>
+                <a:spcPts val="3600"/>
+              </a:lnSpc>
+              <a:spcBef>
+                <a:spcPts val="200"/>
+              </a:spcBef>
+              <a:buNone/>
+            </a:pPr>
+            <a:r>
+              <a:rPr lang="en-US" sz="1500" b="1" dirty="0">
+                <a:solidFill>
+                  <a:srgbClr val="8AA79F"/>
+                </a:solidFill>
+                <a:latin typeface="Trebuchet MS"/>
+              </a:rPr>
+              <a:t>Kenya NLP Opportunities</a:t>
+            </a:r>
+          </a:p>
+          <a:p>
+            <a:pPr marL="342900" indent="-342900">
+              <a:lnSpc>
+                <a:spcPts val="3600"/>
+              </a:lnSpc>
+              <a:spcBef>
+                <a:spcPts val="200"/>
+              </a:spcBef>
+              <a:buChar char="■"/>
+            </a:pPr>
+            <a:r>
+              <a:rPr lang="en-US" sz="1300" b="0" dirty="0">
+                <a:solidFill>
+                  <a:srgbClr val="444444"/>
+                </a:solidFill>
+                <a:latin typeface="Calibri"/>
+              </a:rPr>
+              <a:t>Swahili NLP is underdeveloped — a major research opportunity</a:t>
+            </a:r>
+          </a:p>
+          <a:p>
+            <a:pPr marL="342900" indent="-342900">
+              <a:lnSpc>
+                <a:spcPts val="3600"/>
+              </a:lnSpc>
+              <a:spcBef>
+                <a:spcPts val="200"/>
+              </a:spcBef>
+              <a:buChar char="■"/>
+            </a:pPr>
+            <a:r>
+              <a:rPr lang="en-US" sz="1300" b="0" dirty="0">
+                <a:solidFill>
+                  <a:srgbClr val="444444"/>
+                </a:solidFill>
+                <a:latin typeface="Calibri"/>
+              </a:rPr>
+              <a:t>Local news classification, social media monitoring — high demand</a:t>
+            </a:r>
+          </a:p>
+          <a:p>
+            <a:pPr marL="342900" indent="-342900">
+              <a:lnSpc>
+                <a:spcPts val="3600"/>
+              </a:lnSpc>
+              <a:spcBef>
+                <a:spcPts val="200"/>
+              </a:spcBef>
+              <a:buChar char="■"/>
+            </a:pPr>
+            <a:r>
+              <a:rPr lang="en-US" sz="1300" b="0" dirty="0">
+                <a:solidFill>
+                  <a:srgbClr val="444444"/>
+                </a:solidFill>
+                <a:latin typeface="Calibri"/>
+              </a:rPr>
+              <a:t>M-Pesa customer service automation using text classification</a:t>
+            </a:r>
+          </a:p>
+          <a:p>
+            <a:pPr marL="342900" indent="-342900">
+              <a:lnSpc>
+                <a:spcPts val="3600"/>
+              </a:lnSpc>
+              <a:spcBef>
+                <a:spcPts val="200"/>
+              </a:spcBef>
+              <a:buNone/>
+            </a:pPr>
+            <a:endParaRPr lang="en-US" sz="1300" b="0" dirty="0">
+              <a:solidFill>
+                <a:srgbClr val="444444"/>
+              </a:solidFill>
+              <a:latin typeface="Calibri"/>
+            </a:endParaRPr>
+          </a:p>
+          <a:p>
+            <a:pPr marL="342900" indent="-342900">
+              <a:lnSpc>
+                <a:spcPts val="3600"/>
+              </a:lnSpc>
+              <a:spcBef>
+                <a:spcPts val="200"/>
+              </a:spcBef>
+              <a:buNone/>
+            </a:pPr>
+            <a:r>
+              <a:rPr lang="en-US" sz="1500" b="1" dirty="0">
+                <a:solidFill>
+                  <a:srgbClr val="FF7D00"/>
+                </a:solidFill>
+                <a:latin typeface="Trebuchet MS"/>
+              </a:rPr>
+              <a:t>Coming Up: Session 3</a:t>
+            </a:r>
+          </a:p>
+          <a:p>
+            <a:pPr marL="342900" indent="-342900">
+              <a:lnSpc>
+                <a:spcPts val="3600"/>
+              </a:lnSpc>
+              <a:spcBef>
+                <a:spcPts val="200"/>
+              </a:spcBef>
+              <a:buChar char="■"/>
+            </a:pPr>
+            <a:r>
+              <a:rPr lang="en-US" sz="1300" b="0" dirty="0">
+                <a:solidFill>
+                  <a:srgbClr val="444444"/>
+                </a:solidFill>
+                <a:latin typeface="Calibri"/>
+              </a:rPr>
+              <a:t>Large Language Models — what they are and how they work</a:t>
+            </a:r>
+          </a:p>
+          <a:p>
+            <a:pPr marL="342900" indent="-342900">
+              <a:lnSpc>
+                <a:spcPts val="3600"/>
+              </a:lnSpc>
+              <a:spcBef>
+                <a:spcPts val="200"/>
+              </a:spcBef>
+              <a:buChar char="■"/>
+            </a:pPr>
+            <a:r>
+              <a:rPr lang="en-US" sz="1300" b="0" dirty="0">
+                <a:solidFill>
+                  <a:srgbClr val="444444"/>
+                </a:solidFill>
+                <a:latin typeface="Calibri"/>
+              </a:rPr>
+              <a:t>Running LLMs locally with Ollama (privacy + cost benefits)</a:t>
+            </a:r>
+          </a:p>
+          <a:p>
+            <a:pPr marL="342900" indent="-342900">
+              <a:lnSpc>
+                <a:spcPts val="3600"/>
+              </a:lnSpc>
+              <a:spcBef>
+                <a:spcPts val="200"/>
+              </a:spcBef>
+              <a:buChar char="■"/>
+            </a:pPr>
+            <a:r>
+              <a:rPr lang="en-US" sz="1300" b="0" dirty="0">
+                <a:solidFill>
+                  <a:srgbClr val="444444"/>
+                </a:solidFill>
+                <a:latin typeface="Calibri"/>
+              </a:rPr>
+              <a:t>Hugging Face ecosystem — thousands of free pre-trained models</a:t>
+            </a:r>
+          </a:p>
+        </p:txBody>
+      </p:sp>
+      <p:sp>
+        <p:nvSpPr>
+          <p:cNvPr id="90" name="FooterBar"/>
           <p:cNvSpPr>
             <a:spLocks noGrp="1"/>
           </p:cNvSpPr>
-          <p:nvPr>
-            <p:ph idx="1"/>
-          </p:nvPr>
-        </p:nvSpPr>
-        <p:spPr/>
+          <p:nvPr/>
+        </p:nvSpPr>
+        <p:spPr>
+          <a:xfrm>
+            <a:off x="0" y="6400800"/>
+            <a:ext cx="12192000" cy="457200"/>
+          </a:xfrm>
+          <a:prstGeom prst="rect">
+            <a:avLst/>
+          </a:prstGeom>
+          <a:solidFill>
+            <a:srgbClr val="15616D"/>
+          </a:solidFill>
+          <a:ln>
+            <a:noFill/>
+          </a:ln>
+        </p:spPr>
         <p:txBody>
           <a:bodyPr/>
           <a:lstStyle/>
           <a:p>
-            <a:pPr marL="457200" indent="-457200">
-              <a:buFont typeface="+mj-lt"/>
-              <a:buAutoNum type="arabicPeriod"/>
-            </a:pPr>
-            <a:endParaRPr lang="en-US" dirty="0"/>
+            <a:endParaRPr lang="en-US"/>
           </a:p>
         </p:txBody>
       </p:sp>
     </p:spTree>
-    <p:extLst>
-      <p:ext uri="{BB962C8B-B14F-4D97-AF65-F5344CB8AC3E}">
-        <p14:creationId xmlns:p14="http://schemas.microsoft.com/office/powerpoint/2010/main" val="745930955"/>
-      </p:ext>
-    </p:extLst>
   </p:cSld>
   <p:clrMapOvr>
     <a:masterClrMapping/>
@@ -5126,13 +5761,7 @@
   <p:cSld>
     <p:spTree>
       <p:nvGrpSpPr>
-        <p:cNvPr id="1" name="">
-          <a:extLst>
-            <a:ext uri="{FF2B5EF4-FFF2-40B4-BE49-F238E27FC236}">
-              <a16:creationId xmlns:a16="http://schemas.microsoft.com/office/drawing/2014/main" id="{FFE265BD-AEBD-D462-30B5-1B939F31745B}"/>
-            </a:ext>
-          </a:extLst>
-        </p:cNvPr>
+        <p:cNvPr id="1" name=""/>
         <p:cNvGrpSpPr/>
         <p:nvPr/>
       </p:nvGrpSpPr>
@@ -5146,68 +5775,691 @@
       </p:grpSpPr>
       <p:sp>
         <p:nvSpPr>
-          <p:cNvPr id="2" name="Title 1">
-            <a:extLst>
-              <a:ext uri="{FF2B5EF4-FFF2-40B4-BE49-F238E27FC236}">
-                <a16:creationId xmlns:a16="http://schemas.microsoft.com/office/drawing/2014/main" id="{C553ABB8-5D3D-6D22-762D-8F390F500456}"/>
-              </a:ext>
-            </a:extLst>
-          </p:cNvPr>
+          <p:cNvPr id="91" name="HeaderBar"/>
           <p:cNvSpPr>
             <a:spLocks noGrp="1"/>
           </p:cNvSpPr>
-          <p:nvPr>
-            <p:ph type="title"/>
-          </p:nvPr>
-        </p:nvSpPr>
-        <p:spPr>
-          <a:xfrm>
-            <a:off x="993763" y="243472"/>
-            <a:ext cx="10058400" cy="817578"/>
-          </a:xfrm>
+          <p:nvPr/>
+        </p:nvSpPr>
+        <p:spPr>
+          <a:xfrm>
+            <a:off x="0" y="0"/>
+            <a:ext cx="12192000" cy="800000"/>
+          </a:xfrm>
+          <a:prstGeom prst="rect">
+            <a:avLst/>
+          </a:prstGeom>
+          <a:solidFill>
+            <a:srgbClr val="15616D"/>
+          </a:solidFill>
+          <a:ln>
+            <a:noFill/>
+          </a:ln>
+        </p:spPr>
+        <p:txBody>
+          <a:bodyPr anchor="ctr">
+            <a:normAutofit/>
+          </a:bodyPr>
+          <a:lstStyle/>
+          <a:p>
+            <a:pPr algn="l"/>
+            <a:r>
+              <a:rPr lang="en-US" sz="2400" b="1" dirty="0">
+                <a:solidFill>
+                  <a:srgbClr val="FFFFFF"/>
+                </a:solidFill>
+                <a:latin typeface="Trebuchet MS"/>
+              </a:rPr>
+              <a:t>  Natural Language Processing — Overview</a:t>
+            </a:r>
+          </a:p>
+        </p:txBody>
+      </p:sp>
+      <p:sp>
+        <p:nvSpPr>
+          <p:cNvPr id="10" name="TB10"/>
+          <p:cNvSpPr txBox="1">
+            <a:spLocks noGrp="1"/>
+          </p:cNvSpPr>
+          <p:nvPr/>
+        </p:nvSpPr>
+        <p:spPr>
+          <a:xfrm>
+            <a:off x="457200" y="950000"/>
+            <a:ext cx="11200000" cy="400000"/>
+          </a:xfrm>
+          <a:prstGeom prst="rect">
+            <a:avLst/>
+          </a:prstGeom>
+          <a:noFill/>
+        </p:spPr>
+        <p:txBody>
+          <a:bodyPr>
+            <a:normAutofit/>
+          </a:bodyPr>
+          <a:lstStyle/>
+          <a:p>
+            <a:pPr algn="l"/>
+            <a:r>
+              <a:rPr lang="en-US" sz="1600" b="1" dirty="0">
+                <a:solidFill>
+                  <a:srgbClr val="15616D"/>
+                </a:solidFill>
+                <a:latin typeface="Trebuchet MS"/>
+              </a:rPr>
+              <a:t>Teaching machines to read, understand, and generate human language</a:t>
+            </a:r>
+          </a:p>
+        </p:txBody>
+      </p:sp>
+      <p:sp>
+        <p:nvSpPr>
+          <p:cNvPr id="11" name="RC11"/>
+          <p:cNvSpPr txBox="1">
+            <a:spLocks noGrp="1"/>
+          </p:cNvSpPr>
+          <p:nvPr/>
+        </p:nvSpPr>
+        <p:spPr>
+          <a:xfrm>
+            <a:off x="457200" y="1500000"/>
+            <a:ext cx="2600000" cy="1600000"/>
+          </a:xfrm>
+          <a:prstGeom prst="roundRect">
+            <a:avLst>
+              <a:gd name="adj" fmla="val 16667"/>
+            </a:avLst>
+          </a:prstGeom>
+          <a:solidFill>
+            <a:srgbClr val="15616D"/>
+          </a:solidFill>
+          <a:ln>
+            <a:noFill/>
+          </a:ln>
+        </p:spPr>
+        <p:txBody>
+          <a:bodyPr anchor="ctr">
+            <a:normAutofit/>
+          </a:bodyPr>
+          <a:lstStyle/>
+          <a:p>
+            <a:pPr algn="ctr"/>
+            <a:r>
+              <a:rPr lang="en-US" sz="4000" b="1" dirty="0">
+                <a:solidFill>
+                  <a:srgbClr val="FFFFFF"/>
+                </a:solidFill>
+                <a:latin typeface="Trebuchet MS"/>
+              </a:rPr>
+              <a:t>NLP</a:t>
+            </a:r>
+          </a:p>
+          <a:p>
+            <a:pPr algn="ctr"/>
+            <a:r>
+              <a:rPr lang="en-US" sz="1100" b="0" dirty="0">
+                <a:solidFill>
+                  <a:srgbClr val="C5CAB8"/>
+                </a:solidFill>
+                <a:latin typeface="Calibri"/>
+              </a:rPr>
+              <a:t>Natural Language Processing</a:t>
+            </a:r>
+          </a:p>
+        </p:txBody>
+      </p:sp>
+      <p:sp>
+        <p:nvSpPr>
+          <p:cNvPr id="12" name="RC12"/>
+          <p:cNvSpPr txBox="1">
+            <a:spLocks noGrp="1"/>
+          </p:cNvSpPr>
+          <p:nvPr/>
+        </p:nvSpPr>
+        <p:spPr>
+          <a:xfrm>
+            <a:off x="3250000" y="1500000"/>
+            <a:ext cx="2600000" cy="1600000"/>
+          </a:xfrm>
+          <a:prstGeom prst="roundRect">
+            <a:avLst>
+              <a:gd name="adj" fmla="val 16667"/>
+            </a:avLst>
+          </a:prstGeom>
+          <a:solidFill>
+            <a:srgbClr val="BC5308"/>
+          </a:solidFill>
+          <a:ln>
+            <a:noFill/>
+          </a:ln>
+        </p:spPr>
+        <p:txBody>
+          <a:bodyPr anchor="ctr">
+            <a:normAutofit/>
+          </a:bodyPr>
+          <a:lstStyle/>
+          <a:p>
+            <a:pPr algn="ctr"/>
+            <a:r>
+              <a:rPr lang="en-US" sz="4000" b="1" dirty="0">
+                <a:solidFill>
+                  <a:srgbClr val="FFFFFF"/>
+                </a:solidFill>
+                <a:latin typeface="Trebuchet MS"/>
+              </a:rPr>
+              <a:t>500B+</a:t>
+            </a:r>
+          </a:p>
+          <a:p>
+            <a:pPr algn="ctr"/>
+            <a:r>
+              <a:rPr lang="en-US" sz="1100" b="0" dirty="0">
+                <a:solidFill>
+                  <a:srgbClr val="C5CAB8"/>
+                </a:solidFill>
+                <a:latin typeface="Calibri"/>
+              </a:rPr>
+              <a:t>Words in GPT-3 training data</a:t>
+            </a:r>
+          </a:p>
+        </p:txBody>
+      </p:sp>
+      <p:sp>
+        <p:nvSpPr>
+          <p:cNvPr id="13" name="RC13"/>
+          <p:cNvSpPr txBox="1">
+            <a:spLocks noGrp="1"/>
+          </p:cNvSpPr>
+          <p:nvPr/>
+        </p:nvSpPr>
+        <p:spPr>
+          <a:xfrm>
+            <a:off x="6050000" y="1500000"/>
+            <a:ext cx="2600000" cy="1600000"/>
+          </a:xfrm>
+          <a:prstGeom prst="roundRect">
+            <a:avLst>
+              <a:gd name="adj" fmla="val 16667"/>
+            </a:avLst>
+          </a:prstGeom>
+          <a:solidFill>
+            <a:srgbClr val="FF7D00"/>
+          </a:solidFill>
+          <a:ln>
+            <a:noFill/>
+          </a:ln>
+        </p:spPr>
+        <p:txBody>
+          <a:bodyPr anchor="ctr">
+            <a:normAutofit/>
+          </a:bodyPr>
+          <a:lstStyle/>
+          <a:p>
+            <a:pPr algn="ctr"/>
+            <a:r>
+              <a:rPr lang="en-US" sz="4000" b="1" dirty="0">
+                <a:solidFill>
+                  <a:srgbClr val="001524"/>
+                </a:solidFill>
+                <a:latin typeface="Trebuchet MS"/>
+              </a:rPr>
+              <a:t>7,000+</a:t>
+            </a:r>
+          </a:p>
+          <a:p>
+            <a:pPr algn="ctr"/>
+            <a:r>
+              <a:rPr lang="en-US" sz="1100" b="0" dirty="0">
+                <a:solidFill>
+                  <a:srgbClr val="001524"/>
+                </a:solidFill>
+                <a:latin typeface="Calibri"/>
+              </a:rPr>
+              <a:t>Languages in the world — AI handles 100+</a:t>
+            </a:r>
+          </a:p>
+        </p:txBody>
+      </p:sp>
+      <p:sp>
+        <p:nvSpPr>
+          <p:cNvPr id="14" name="RC14"/>
+          <p:cNvSpPr txBox="1">
+            <a:spLocks noGrp="1"/>
+          </p:cNvSpPr>
+          <p:nvPr/>
+        </p:nvSpPr>
+        <p:spPr>
+          <a:xfrm>
+            <a:off x="8850000" y="1500000"/>
+            <a:ext cx="2900000" cy="1600000"/>
+          </a:xfrm>
+          <a:prstGeom prst="roundRect">
+            <a:avLst>
+              <a:gd name="adj" fmla="val 16667"/>
+            </a:avLst>
+          </a:prstGeom>
+          <a:solidFill>
+            <a:srgbClr val="8AA79F"/>
+          </a:solidFill>
+          <a:ln>
+            <a:noFill/>
+          </a:ln>
+        </p:spPr>
+        <p:txBody>
+          <a:bodyPr anchor="ctr">
+            <a:normAutofit/>
+          </a:bodyPr>
+          <a:lstStyle/>
+          <a:p>
+            <a:pPr algn="ctr"/>
+            <a:r>
+              <a:rPr lang="en-US" sz="4000" b="1" dirty="0">
+                <a:solidFill>
+                  <a:srgbClr val="001524"/>
+                </a:solidFill>
+                <a:latin typeface="Trebuchet MS"/>
+              </a:rPr>
+              <a:t>50%+</a:t>
+            </a:r>
+          </a:p>
+          <a:p>
+            <a:pPr algn="ctr"/>
+            <a:r>
+              <a:rPr lang="en-US" sz="1100" b="0" dirty="0">
+                <a:solidFill>
+                  <a:srgbClr val="001524"/>
+                </a:solidFill>
+                <a:latin typeface="Calibri"/>
+              </a:rPr>
+              <a:t>Fortune 500 using NLP in products</a:t>
+            </a:r>
+          </a:p>
+        </p:txBody>
+      </p:sp>
+      <p:sp>
+        <p:nvSpPr>
+          <p:cNvPr id="20" name="TB20"/>
+          <p:cNvSpPr txBox="1">
+            <a:spLocks noGrp="1"/>
+          </p:cNvSpPr>
+          <p:nvPr/>
+        </p:nvSpPr>
+        <p:spPr>
+          <a:xfrm>
+            <a:off x="457200" y="3300000"/>
+            <a:ext cx="11200000" cy="400000"/>
+          </a:xfrm>
+          <a:prstGeom prst="rect">
+            <a:avLst/>
+          </a:prstGeom>
+          <a:noFill/>
+        </p:spPr>
+        <p:txBody>
+          <a:bodyPr>
+            <a:normAutofit/>
+          </a:bodyPr>
+          <a:lstStyle/>
+          <a:p>
+            <a:pPr algn="l"/>
+            <a:r>
+              <a:rPr lang="en-US" sz="1800" b="1" dirty="0">
+                <a:solidFill>
+                  <a:srgbClr val="15616D"/>
+                </a:solidFill>
+                <a:latin typeface="Trebuchet MS"/>
+              </a:rPr>
+              <a:t>Core NLP Tasks</a:t>
+            </a:r>
+          </a:p>
+        </p:txBody>
+      </p:sp>
+      <p:sp>
+        <p:nvSpPr>
+          <p:cNvPr id="21" name="BL21"/>
+          <p:cNvSpPr txBox="1">
+            <a:spLocks noGrp="1"/>
+          </p:cNvSpPr>
+          <p:nvPr/>
+        </p:nvSpPr>
+        <p:spPr>
+          <a:xfrm>
+            <a:off x="457200" y="3800000"/>
+            <a:ext cx="3500000" cy="2500000"/>
+          </a:xfrm>
+          <a:prstGeom prst="rect">
+            <a:avLst/>
+          </a:prstGeom>
+          <a:noFill/>
+        </p:spPr>
+        <p:txBody>
+          <a:bodyPr>
+            <a:normAutofit/>
+          </a:bodyPr>
+          <a:lstStyle/>
+          <a:p>
+            <a:pPr marL="342900" indent="-342900">
+              <a:lnSpc>
+                <a:spcPts val="3600"/>
+              </a:lnSpc>
+              <a:spcBef>
+                <a:spcPts val="200"/>
+              </a:spcBef>
+              <a:buNone/>
+            </a:pPr>
+            <a:r>
+              <a:rPr lang="en-US" sz="1400" b="1" dirty="0">
+                <a:solidFill>
+                  <a:srgbClr val="BC5308"/>
+                </a:solidFill>
+                <a:latin typeface="Trebuchet MS"/>
+              </a:rPr>
+              <a:t>Text Classification</a:t>
+            </a:r>
+          </a:p>
+          <a:p>
+            <a:pPr marL="342900" indent="-342900">
+              <a:lnSpc>
+                <a:spcPts val="3600"/>
+              </a:lnSpc>
+              <a:spcBef>
+                <a:spcPts val="200"/>
+              </a:spcBef>
+              <a:buChar char="■"/>
+            </a:pPr>
+            <a:r>
+              <a:rPr lang="en-US" sz="1200" b="0" dirty="0">
+                <a:solidFill>
+                  <a:srgbClr val="444444"/>
+                </a:solidFill>
+                <a:latin typeface="Calibri"/>
+              </a:rPr>
+              <a:t>Spam detection, news categorization, sentiment</a:t>
+            </a:r>
+          </a:p>
+          <a:p>
+            <a:pPr marL="342900" indent="-342900">
+              <a:lnSpc>
+                <a:spcPts val="3600"/>
+              </a:lnSpc>
+              <a:spcBef>
+                <a:spcPts val="200"/>
+              </a:spcBef>
+              <a:buNone/>
+            </a:pPr>
+            <a:r>
+              <a:rPr lang="en-US" sz="1400" b="1" dirty="0">
+                <a:solidFill>
+                  <a:srgbClr val="BC5308"/>
+                </a:solidFill>
+                <a:latin typeface="Trebuchet MS"/>
+              </a:rPr>
+              <a:t>Named Entity Recognition (NER)</a:t>
+            </a:r>
+          </a:p>
+          <a:p>
+            <a:pPr marL="342900" indent="-342900">
+              <a:lnSpc>
+                <a:spcPts val="3600"/>
+              </a:lnSpc>
+              <a:spcBef>
+                <a:spcPts val="200"/>
+              </a:spcBef>
+              <a:buChar char="■"/>
+            </a:pPr>
+            <a:r>
+              <a:rPr lang="en-US" sz="1200" b="0" dirty="0">
+                <a:solidFill>
+                  <a:srgbClr val="444444"/>
+                </a:solidFill>
+                <a:latin typeface="Calibri"/>
+              </a:rPr>
+              <a:t>Identify people, places, orgs in text</a:t>
+            </a:r>
+          </a:p>
+        </p:txBody>
+      </p:sp>
+      <p:sp>
+        <p:nvSpPr>
+          <p:cNvPr id="22" name="BL22"/>
+          <p:cNvSpPr txBox="1">
+            <a:spLocks noGrp="1"/>
+          </p:cNvSpPr>
+          <p:nvPr/>
+        </p:nvSpPr>
+        <p:spPr>
+          <a:xfrm>
+            <a:off x="4150000" y="3800000"/>
+            <a:ext cx="3500000" cy="2500000"/>
+          </a:xfrm>
+          <a:prstGeom prst="rect">
+            <a:avLst/>
+          </a:prstGeom>
+          <a:noFill/>
+        </p:spPr>
+        <p:txBody>
+          <a:bodyPr>
+            <a:normAutofit/>
+          </a:bodyPr>
+          <a:lstStyle/>
+          <a:p>
+            <a:pPr marL="342900" indent="-342900">
+              <a:lnSpc>
+                <a:spcPts val="3600"/>
+              </a:lnSpc>
+              <a:spcBef>
+                <a:spcPts val="200"/>
+              </a:spcBef>
+              <a:buNone/>
+            </a:pPr>
+            <a:r>
+              <a:rPr lang="en-US" sz="1400" b="1" dirty="0">
+                <a:solidFill>
+                  <a:srgbClr val="15616D"/>
+                </a:solidFill>
+                <a:latin typeface="Trebuchet MS"/>
+              </a:rPr>
+              <a:t>Machine Translation</a:t>
+            </a:r>
+          </a:p>
+          <a:p>
+            <a:pPr marL="342900" indent="-342900">
+              <a:lnSpc>
+                <a:spcPts val="3600"/>
+              </a:lnSpc>
+              <a:spcBef>
+                <a:spcPts val="200"/>
+              </a:spcBef>
+              <a:buChar char="■"/>
+            </a:pPr>
+            <a:r>
+              <a:rPr lang="en-US" sz="1200" b="0" dirty="0">
+                <a:solidFill>
+                  <a:srgbClr val="444444"/>
+                </a:solidFill>
+                <a:latin typeface="Calibri"/>
+              </a:rPr>
+              <a:t>Google Translate, DeepL — cross-language understanding</a:t>
+            </a:r>
+          </a:p>
+          <a:p>
+            <a:pPr marL="342900" indent="-342900">
+              <a:lnSpc>
+                <a:spcPts val="3600"/>
+              </a:lnSpc>
+              <a:spcBef>
+                <a:spcPts val="200"/>
+              </a:spcBef>
+              <a:buNone/>
+            </a:pPr>
+            <a:r>
+              <a:rPr lang="en-US" sz="1400" b="1" dirty="0">
+                <a:solidFill>
+                  <a:srgbClr val="15616D"/>
+                </a:solidFill>
+                <a:latin typeface="Trebuchet MS"/>
+              </a:rPr>
+              <a:t>Sentiment Analysis</a:t>
+            </a:r>
+          </a:p>
+          <a:p>
+            <a:pPr marL="342900" indent="-342900">
+              <a:lnSpc>
+                <a:spcPts val="3600"/>
+              </a:lnSpc>
+              <a:spcBef>
+                <a:spcPts val="200"/>
+              </a:spcBef>
+              <a:buChar char="■"/>
+            </a:pPr>
+            <a:r>
+              <a:rPr lang="en-US" sz="1200" b="0" dirty="0">
+                <a:solidFill>
+                  <a:srgbClr val="444444"/>
+                </a:solidFill>
+                <a:latin typeface="Calibri"/>
+              </a:rPr>
+              <a:t>Positive/negative/neutral — used in brand monitoring</a:t>
+            </a:r>
+          </a:p>
+        </p:txBody>
+      </p:sp>
+      <p:sp>
+        <p:nvSpPr>
+          <p:cNvPr id="23" name="BL23"/>
+          <p:cNvSpPr txBox="1">
+            <a:spLocks noGrp="1"/>
+          </p:cNvSpPr>
+          <p:nvPr/>
+        </p:nvSpPr>
+        <p:spPr>
+          <a:xfrm>
+            <a:off x="7900000" y="3800000"/>
+            <a:ext cx="3800000" cy="2500000"/>
+          </a:xfrm>
+          <a:prstGeom prst="rect">
+            <a:avLst/>
+          </a:prstGeom>
+          <a:noFill/>
+        </p:spPr>
+        <p:txBody>
+          <a:bodyPr>
+            <a:normAutofit/>
+          </a:bodyPr>
+          <a:lstStyle/>
+          <a:p>
+            <a:pPr marL="342900" indent="-342900">
+              <a:lnSpc>
+                <a:spcPts val="3600"/>
+              </a:lnSpc>
+              <a:spcBef>
+                <a:spcPts val="200"/>
+              </a:spcBef>
+              <a:buNone/>
+            </a:pPr>
+            <a:r>
+              <a:rPr lang="en-US" sz="1400" b="1" dirty="0">
+                <a:solidFill>
+                  <a:srgbClr val="8AA79F"/>
+                </a:solidFill>
+                <a:latin typeface="Trebuchet MS"/>
+              </a:rPr>
+              <a:t>Summarization</a:t>
+            </a:r>
+          </a:p>
+          <a:p>
+            <a:pPr marL="342900" indent="-342900">
+              <a:lnSpc>
+                <a:spcPts val="3600"/>
+              </a:lnSpc>
+              <a:spcBef>
+                <a:spcPts val="200"/>
+              </a:spcBef>
+              <a:buChar char="■"/>
+            </a:pPr>
+            <a:r>
+              <a:rPr lang="en-US" sz="1200" b="0" dirty="0">
+                <a:solidFill>
+                  <a:srgbClr val="444444"/>
+                </a:solidFill>
+                <a:latin typeface="Calibri"/>
+              </a:rPr>
+              <a:t>Extract key points from long documents automatically</a:t>
+            </a:r>
+          </a:p>
+          <a:p>
+            <a:pPr marL="342900" indent="-342900">
+              <a:lnSpc>
+                <a:spcPts val="3600"/>
+              </a:lnSpc>
+              <a:spcBef>
+                <a:spcPts val="200"/>
+              </a:spcBef>
+              <a:buNone/>
+            </a:pPr>
+            <a:r>
+              <a:rPr lang="en-US" sz="1400" b="1" dirty="0">
+                <a:solidFill>
+                  <a:srgbClr val="8AA79F"/>
+                </a:solidFill>
+                <a:latin typeface="Trebuchet MS"/>
+              </a:rPr>
+              <a:t>Question Answering</a:t>
+            </a:r>
+          </a:p>
+          <a:p>
+            <a:pPr marL="342900" indent="-342900">
+              <a:lnSpc>
+                <a:spcPts val="3600"/>
+              </a:lnSpc>
+              <a:spcBef>
+                <a:spcPts val="200"/>
+              </a:spcBef>
+              <a:buChar char="■"/>
+            </a:pPr>
+            <a:r>
+              <a:rPr lang="en-US" sz="1200" b="0" dirty="0">
+                <a:solidFill>
+                  <a:srgbClr val="444444"/>
+                </a:solidFill>
+                <a:latin typeface="Calibri"/>
+              </a:rPr>
+              <a:t>Chatbots, search engines, virtual assistants</a:t>
+            </a:r>
+          </a:p>
+        </p:txBody>
+      </p:sp>
+      <p:sp>
+        <p:nvSpPr>
+          <p:cNvPr id="90" name="FooterBar"/>
+          <p:cNvSpPr>
+            <a:spLocks noGrp="1"/>
+          </p:cNvSpPr>
+          <p:nvPr/>
+        </p:nvSpPr>
+        <p:spPr>
+          <a:xfrm>
+            <a:off x="0" y="6400800"/>
+            <a:ext cx="12192000" cy="457200"/>
+          </a:xfrm>
+          <a:prstGeom prst="rect">
+            <a:avLst/>
+          </a:prstGeom>
+          <a:solidFill>
+            <a:srgbClr val="15616D"/>
+          </a:solidFill>
+          <a:ln>
+            <a:noFill/>
+          </a:ln>
         </p:spPr>
         <p:txBody>
           <a:bodyPr/>
           <a:lstStyle/>
           <a:p>
-            <a:r>
-              <a:rPr lang="en-US" dirty="0"/>
-              <a:t>NLP  and Automated ML</a:t>
-            </a:r>
-          </a:p>
-        </p:txBody>
-      </p:sp>
-      <p:sp>
-        <p:nvSpPr>
-          <p:cNvPr id="3" name="Content Placeholder 2">
-            <a:extLst>
-              <a:ext uri="{FF2B5EF4-FFF2-40B4-BE49-F238E27FC236}">
-                <a16:creationId xmlns:a16="http://schemas.microsoft.com/office/drawing/2014/main" id="{5CAE4582-5E63-289B-8C62-A22E99695C5B}"/>
-              </a:ext>
-            </a:extLst>
-          </p:cNvPr>
-          <p:cNvSpPr>
-            <a:spLocks noGrp="1"/>
-          </p:cNvSpPr>
-          <p:nvPr>
-            <p:ph idx="1"/>
-          </p:nvPr>
-        </p:nvSpPr>
-        <p:spPr/>
-        <p:txBody>
-          <a:bodyPr/>
-          <a:lstStyle/>
-          <a:p>
             <a:endParaRPr lang="en-US"/>
           </a:p>
         </p:txBody>
       </p:sp>
     </p:spTree>
-    <p:extLst>
-      <p:ext uri="{BB962C8B-B14F-4D97-AF65-F5344CB8AC3E}">
-        <p14:creationId xmlns:p14="http://schemas.microsoft.com/office/powerpoint/2010/main" val="439081378"/>
-      </p:ext>
-    </p:extLst>
   </p:cSld>
   <p:clrMapOvr>
     <a:masterClrMapping/>
@@ -5220,13 +6472,7 @@
   <p:cSld>
     <p:spTree>
       <p:nvGrpSpPr>
-        <p:cNvPr id="1" name="">
-          <a:extLst>
-            <a:ext uri="{FF2B5EF4-FFF2-40B4-BE49-F238E27FC236}">
-              <a16:creationId xmlns:a16="http://schemas.microsoft.com/office/drawing/2014/main" id="{6914A09C-E710-C55C-854E-D8D6A31530CC}"/>
-            </a:ext>
-          </a:extLst>
-        </p:cNvPr>
+        <p:cNvPr id="1" name=""/>
         <p:cNvGrpSpPr/>
         <p:nvPr/>
       </p:nvGrpSpPr>
@@ -5240,54 +6486,211 @@
       </p:grpSpPr>
       <p:sp>
         <p:nvSpPr>
-          <p:cNvPr id="2" name="Title 1">
-            <a:extLst>
-              <a:ext uri="{FF2B5EF4-FFF2-40B4-BE49-F238E27FC236}">
-                <a16:creationId xmlns:a16="http://schemas.microsoft.com/office/drawing/2014/main" id="{F6CA8CD7-F531-3061-BFB9-9E963973DB5A}"/>
-              </a:ext>
-            </a:extLst>
-          </p:cNvPr>
+          <p:cNvPr id="91" name="HeaderBar"/>
           <p:cNvSpPr>
             <a:spLocks noGrp="1"/>
           </p:cNvSpPr>
-          <p:nvPr>
-            <p:ph type="title"/>
-          </p:nvPr>
-        </p:nvSpPr>
-        <p:spPr>
-          <a:xfrm>
-            <a:off x="993763" y="243472"/>
-            <a:ext cx="10058400" cy="817578"/>
-          </a:xfrm>
+          <p:nvPr/>
+        </p:nvSpPr>
+        <p:spPr>
+          <a:xfrm>
+            <a:off x="0" y="0"/>
+            <a:ext cx="12192000" cy="800000"/>
+          </a:xfrm>
+          <a:prstGeom prst="rect">
+            <a:avLst/>
+          </a:prstGeom>
+          <a:solidFill>
+            <a:srgbClr val="15616D"/>
+          </a:solidFill>
+          <a:ln>
+            <a:noFill/>
+          </a:ln>
+        </p:spPr>
+        <p:txBody>
+          <a:bodyPr anchor="ctr">
+            <a:normAutofit/>
+          </a:bodyPr>
+          <a:lstStyle/>
+          <a:p>
+            <a:pPr algn="l"/>
+            <a:r>
+              <a:rPr lang="en-US" sz="2400" b="1" dirty="0">
+                <a:solidFill>
+                  <a:srgbClr val="FFFFFF"/>
+                </a:solidFill>
+                <a:latin typeface="Trebuchet MS"/>
+              </a:rPr>
+              <a:t>  NLP — Text to Numbers: The Pipeline</a:t>
+            </a:r>
+          </a:p>
+        </p:txBody>
+      </p:sp>
+      <p:sp>
+        <p:nvSpPr>
+          <p:cNvPr id="10" name="TB10"/>
+          <p:cNvSpPr txBox="1">
+            <a:spLocks noGrp="1"/>
+          </p:cNvSpPr>
+          <p:nvPr/>
+        </p:nvSpPr>
+        <p:spPr>
+          <a:xfrm>
+            <a:off x="457200" y="950000"/>
+            <a:ext cx="11200000" cy="400000"/>
+          </a:xfrm>
+          <a:prstGeom prst="rect">
+            <a:avLst/>
+          </a:prstGeom>
+          <a:noFill/>
+        </p:spPr>
+        <p:txBody>
+          <a:bodyPr>
+            <a:normAutofit/>
+          </a:bodyPr>
+          <a:lstStyle/>
+          <a:p>
+            <a:pPr algn="l"/>
+            <a:r>
+              <a:rPr lang="en-US" sz="1400" b="0" dirty="0">
+                <a:solidFill>
+                  <a:srgbClr val="555555"/>
+                </a:solidFill>
+                <a:latin typeface="Calibri"/>
+              </a:rPr>
+              <a:t>Computers can't read text — we convert it to numbers first</a:t>
+            </a:r>
+          </a:p>
+        </p:txBody>
+      </p:sp>
+      <p:sp>
+        <p:nvSpPr>
+          <p:cNvPr id="11" name="CB11"/>
+          <p:cNvSpPr>
+            <a:spLocks noGrp="1"/>
+          </p:cNvSpPr>
+          <p:nvPr/>
+        </p:nvSpPr>
+        <p:spPr>
+          <a:xfrm>
+            <a:off x="457200" y="1450000"/>
+            <a:ext cx="1600000" cy="650000"/>
+          </a:xfrm>
+          <a:prstGeom prst="rect">
+            <a:avLst/>
+          </a:prstGeom>
+          <a:solidFill>
+            <a:srgbClr val="15616D"/>
+          </a:solidFill>
+          <a:ln>
+            <a:noFill/>
+          </a:ln>
         </p:spPr>
         <p:txBody>
           <a:bodyPr/>
           <a:lstStyle/>
           <a:p>
-            <a:r>
-              <a:rPr lang="en-US" dirty="0"/>
-              <a:t>NLP</a:t>
-            </a:r>
-          </a:p>
-        </p:txBody>
-      </p:sp>
-      <p:sp>
-        <p:nvSpPr>
-          <p:cNvPr id="3" name="Content Placeholder 2">
-            <a:extLst>
-              <a:ext uri="{FF2B5EF4-FFF2-40B4-BE49-F238E27FC236}">
-                <a16:creationId xmlns:a16="http://schemas.microsoft.com/office/drawing/2014/main" id="{05421765-32AC-9BFE-2FC5-521DA119D51D}"/>
-              </a:ext>
-            </a:extLst>
-          </p:cNvPr>
+            <a:endParaRPr lang="en-US"/>
+          </a:p>
+        </p:txBody>
+      </p:sp>
+      <p:sp>
+        <p:nvSpPr>
+          <p:cNvPr id="12" name="TB12"/>
+          <p:cNvSpPr txBox="1">
+            <a:spLocks noGrp="1"/>
+          </p:cNvSpPr>
+          <p:nvPr/>
+        </p:nvSpPr>
+        <p:spPr>
+          <a:xfrm>
+            <a:off x="457200" y="1480000"/>
+            <a:ext cx="1600000" cy="580000"/>
+          </a:xfrm>
+          <a:prstGeom prst="rect">
+            <a:avLst/>
+          </a:prstGeom>
+          <a:noFill/>
+        </p:spPr>
+        <p:txBody>
+          <a:bodyPr>
+            <a:normAutofit/>
+          </a:bodyPr>
+          <a:lstStyle/>
+          <a:p>
+            <a:pPr algn="l"/>
+            <a:r>
+              <a:rPr lang="en-US" sz="1400" b="1" dirty="0">
+                <a:solidFill>
+                  <a:srgbClr val="FFFFFF"/>
+                </a:solidFill>
+                <a:latin typeface="Calibri"/>
+              </a:rPr>
+              <a:t>Raw Text</a:t>
+            </a:r>
+          </a:p>
+        </p:txBody>
+      </p:sp>
+      <p:sp>
+        <p:nvSpPr>
+          <p:cNvPr id="13" name="TB13"/>
+          <p:cNvSpPr txBox="1">
+            <a:spLocks noGrp="1"/>
+          </p:cNvSpPr>
+          <p:nvPr/>
+        </p:nvSpPr>
+        <p:spPr>
+          <a:xfrm>
+            <a:off x="2200000" y="1650000"/>
+            <a:ext cx="400000" cy="400000"/>
+          </a:xfrm>
+          <a:prstGeom prst="rect">
+            <a:avLst/>
+          </a:prstGeom>
+          <a:noFill/>
+        </p:spPr>
+        <p:txBody>
+          <a:bodyPr>
+            <a:normAutofit/>
+          </a:bodyPr>
+          <a:lstStyle/>
+          <a:p>
+            <a:pPr algn="l"/>
+            <a:r>
+              <a:rPr lang="en-US" sz="2400" b="1" dirty="0">
+                <a:solidFill>
+                  <a:srgbClr val="15616D"/>
+                </a:solidFill>
+                <a:latin typeface="Calibri"/>
+              </a:rPr>
+              <a:t>-&gt;</a:t>
+            </a:r>
+          </a:p>
+        </p:txBody>
+      </p:sp>
+      <p:sp>
+        <p:nvSpPr>
+          <p:cNvPr id="14" name="CB14"/>
           <p:cNvSpPr>
             <a:spLocks noGrp="1"/>
           </p:cNvSpPr>
-          <p:nvPr>
-            <p:ph idx="1"/>
-          </p:nvPr>
-        </p:nvSpPr>
-        <p:spPr/>
+          <p:nvPr/>
+        </p:nvSpPr>
+        <p:spPr>
+          <a:xfrm>
+            <a:off x="2700000" y="1450000"/>
+            <a:ext cx="1600000" cy="650000"/>
+          </a:xfrm>
+          <a:prstGeom prst="rect">
+            <a:avLst/>
+          </a:prstGeom>
+          <a:solidFill>
+            <a:srgbClr val="BC5308"/>
+          </a:solidFill>
+          <a:ln>
+            <a:noFill/>
+          </a:ln>
+        </p:spPr>
         <p:txBody>
           <a:bodyPr/>
           <a:lstStyle/>
@@ -5296,12 +6699,1006 @@
           </a:p>
         </p:txBody>
       </p:sp>
+      <p:sp>
+        <p:nvSpPr>
+          <p:cNvPr id="15" name="TB15"/>
+          <p:cNvSpPr txBox="1">
+            <a:spLocks noGrp="1"/>
+          </p:cNvSpPr>
+          <p:nvPr/>
+        </p:nvSpPr>
+        <p:spPr>
+          <a:xfrm>
+            <a:off x="2700000" y="1480000"/>
+            <a:ext cx="1600000" cy="580000"/>
+          </a:xfrm>
+          <a:prstGeom prst="rect">
+            <a:avLst/>
+          </a:prstGeom>
+          <a:noFill/>
+        </p:spPr>
+        <p:txBody>
+          <a:bodyPr>
+            <a:normAutofit/>
+          </a:bodyPr>
+          <a:lstStyle/>
+          <a:p>
+            <a:pPr algn="l"/>
+            <a:r>
+              <a:rPr lang="en-US" sz="1400" b="1" dirty="0">
+                <a:solidFill>
+                  <a:srgbClr val="FFFFFF"/>
+                </a:solidFill>
+                <a:latin typeface="Calibri"/>
+              </a:rPr>
+              <a:t>Tokenize</a:t>
+            </a:r>
+          </a:p>
+        </p:txBody>
+      </p:sp>
+      <p:sp>
+        <p:nvSpPr>
+          <p:cNvPr id="16" name="TB16"/>
+          <p:cNvSpPr txBox="1">
+            <a:spLocks noGrp="1"/>
+          </p:cNvSpPr>
+          <p:nvPr/>
+        </p:nvSpPr>
+        <p:spPr>
+          <a:xfrm>
+            <a:off x="4450000" y="1650000"/>
+            <a:ext cx="400000" cy="400000"/>
+          </a:xfrm>
+          <a:prstGeom prst="rect">
+            <a:avLst/>
+          </a:prstGeom>
+          <a:noFill/>
+        </p:spPr>
+        <p:txBody>
+          <a:bodyPr>
+            <a:normAutofit/>
+          </a:bodyPr>
+          <a:lstStyle/>
+          <a:p>
+            <a:pPr algn="l"/>
+            <a:r>
+              <a:rPr lang="en-US" sz="2400" b="1" dirty="0">
+                <a:solidFill>
+                  <a:srgbClr val="15616D"/>
+                </a:solidFill>
+                <a:latin typeface="Calibri"/>
+              </a:rPr>
+              <a:t>-&gt;</a:t>
+            </a:r>
+          </a:p>
+        </p:txBody>
+      </p:sp>
+      <p:sp>
+        <p:nvSpPr>
+          <p:cNvPr id="17" name="CB17"/>
+          <p:cNvSpPr>
+            <a:spLocks noGrp="1"/>
+          </p:cNvSpPr>
+          <p:nvPr/>
+        </p:nvSpPr>
+        <p:spPr>
+          <a:xfrm>
+            <a:off x="4950000" y="1450000"/>
+            <a:ext cx="1600000" cy="650000"/>
+          </a:xfrm>
+          <a:prstGeom prst="rect">
+            <a:avLst/>
+          </a:prstGeom>
+          <a:solidFill>
+            <a:srgbClr val="FF7D00"/>
+          </a:solidFill>
+          <a:ln>
+            <a:noFill/>
+          </a:ln>
+        </p:spPr>
+        <p:txBody>
+          <a:bodyPr/>
+          <a:lstStyle/>
+          <a:p>
+            <a:endParaRPr lang="en-US"/>
+          </a:p>
+        </p:txBody>
+      </p:sp>
+      <p:sp>
+        <p:nvSpPr>
+          <p:cNvPr id="18" name="TB18"/>
+          <p:cNvSpPr txBox="1">
+            <a:spLocks noGrp="1"/>
+          </p:cNvSpPr>
+          <p:nvPr/>
+        </p:nvSpPr>
+        <p:spPr>
+          <a:xfrm>
+            <a:off x="4950000" y="1480000"/>
+            <a:ext cx="1600000" cy="580000"/>
+          </a:xfrm>
+          <a:prstGeom prst="rect">
+            <a:avLst/>
+          </a:prstGeom>
+          <a:noFill/>
+        </p:spPr>
+        <p:txBody>
+          <a:bodyPr>
+            <a:normAutofit/>
+          </a:bodyPr>
+          <a:lstStyle/>
+          <a:p>
+            <a:pPr algn="l"/>
+            <a:r>
+              <a:rPr lang="en-US" sz="1400" b="1" dirty="0">
+                <a:solidFill>
+                  <a:srgbClr val="FFFFFF"/>
+                </a:solidFill>
+                <a:latin typeface="Calibri"/>
+              </a:rPr>
+              <a:t>Clean</a:t>
+            </a:r>
+          </a:p>
+        </p:txBody>
+      </p:sp>
+      <p:sp>
+        <p:nvSpPr>
+          <p:cNvPr id="19" name="TB19"/>
+          <p:cNvSpPr txBox="1">
+            <a:spLocks noGrp="1"/>
+          </p:cNvSpPr>
+          <p:nvPr/>
+        </p:nvSpPr>
+        <p:spPr>
+          <a:xfrm>
+            <a:off x="6700000" y="1650000"/>
+            <a:ext cx="400000" cy="400000"/>
+          </a:xfrm>
+          <a:prstGeom prst="rect">
+            <a:avLst/>
+          </a:prstGeom>
+          <a:noFill/>
+        </p:spPr>
+        <p:txBody>
+          <a:bodyPr>
+            <a:normAutofit/>
+          </a:bodyPr>
+          <a:lstStyle/>
+          <a:p>
+            <a:pPr algn="l"/>
+            <a:r>
+              <a:rPr lang="en-US" sz="2400" b="1" dirty="0">
+                <a:solidFill>
+                  <a:srgbClr val="15616D"/>
+                </a:solidFill>
+                <a:latin typeface="Calibri"/>
+              </a:rPr>
+              <a:t>-&gt;</a:t>
+            </a:r>
+          </a:p>
+        </p:txBody>
+      </p:sp>
+      <p:sp>
+        <p:nvSpPr>
+          <p:cNvPr id="20" name="CB20"/>
+          <p:cNvSpPr>
+            <a:spLocks noGrp="1"/>
+          </p:cNvSpPr>
+          <p:nvPr/>
+        </p:nvSpPr>
+        <p:spPr>
+          <a:xfrm>
+            <a:off x="7200000" y="1450000"/>
+            <a:ext cx="1600000" cy="650000"/>
+          </a:xfrm>
+          <a:prstGeom prst="rect">
+            <a:avLst/>
+          </a:prstGeom>
+          <a:solidFill>
+            <a:srgbClr val="8AA79F"/>
+          </a:solidFill>
+          <a:ln>
+            <a:noFill/>
+          </a:ln>
+        </p:spPr>
+        <p:txBody>
+          <a:bodyPr/>
+          <a:lstStyle/>
+          <a:p>
+            <a:endParaRPr lang="en-US"/>
+          </a:p>
+        </p:txBody>
+      </p:sp>
+      <p:sp>
+        <p:nvSpPr>
+          <p:cNvPr id="21" name="TB21"/>
+          <p:cNvSpPr txBox="1">
+            <a:spLocks noGrp="1"/>
+          </p:cNvSpPr>
+          <p:nvPr/>
+        </p:nvSpPr>
+        <p:spPr>
+          <a:xfrm>
+            <a:off x="7200000" y="1480000"/>
+            <a:ext cx="1600000" cy="580000"/>
+          </a:xfrm>
+          <a:prstGeom prst="rect">
+            <a:avLst/>
+          </a:prstGeom>
+          <a:noFill/>
+        </p:spPr>
+        <p:txBody>
+          <a:bodyPr>
+            <a:normAutofit/>
+          </a:bodyPr>
+          <a:lstStyle/>
+          <a:p>
+            <a:pPr algn="l"/>
+            <a:r>
+              <a:rPr lang="en-US" sz="1400" b="1" dirty="0">
+                <a:solidFill>
+                  <a:srgbClr val="FFFFFF"/>
+                </a:solidFill>
+                <a:latin typeface="Calibri"/>
+              </a:rPr>
+              <a:t>Vectorize</a:t>
+            </a:r>
+          </a:p>
+        </p:txBody>
+      </p:sp>
+      <p:sp>
+        <p:nvSpPr>
+          <p:cNvPr id="22" name="TB22"/>
+          <p:cNvSpPr txBox="1">
+            <a:spLocks noGrp="1"/>
+          </p:cNvSpPr>
+          <p:nvPr/>
+        </p:nvSpPr>
+        <p:spPr>
+          <a:xfrm>
+            <a:off x="8950000" y="1650000"/>
+            <a:ext cx="400000" cy="400000"/>
+          </a:xfrm>
+          <a:prstGeom prst="rect">
+            <a:avLst/>
+          </a:prstGeom>
+          <a:noFill/>
+        </p:spPr>
+        <p:txBody>
+          <a:bodyPr>
+            <a:normAutofit/>
+          </a:bodyPr>
+          <a:lstStyle/>
+          <a:p>
+            <a:pPr algn="l"/>
+            <a:r>
+              <a:rPr lang="en-US" sz="2400" b="1" dirty="0">
+                <a:solidFill>
+                  <a:srgbClr val="15616D"/>
+                </a:solidFill>
+                <a:latin typeface="Calibri"/>
+              </a:rPr>
+              <a:t>-&gt;</a:t>
+            </a:r>
+          </a:p>
+        </p:txBody>
+      </p:sp>
+      <p:sp>
+        <p:nvSpPr>
+          <p:cNvPr id="23" name="CB23"/>
+          <p:cNvSpPr>
+            <a:spLocks noGrp="1"/>
+          </p:cNvSpPr>
+          <p:nvPr/>
+        </p:nvSpPr>
+        <p:spPr>
+          <a:xfrm>
+            <a:off x="9450000" y="1450000"/>
+            <a:ext cx="2300000" cy="650000"/>
+          </a:xfrm>
+          <a:prstGeom prst="rect">
+            <a:avLst/>
+          </a:prstGeom>
+          <a:solidFill>
+            <a:srgbClr val="15616D"/>
+          </a:solidFill>
+          <a:ln>
+            <a:noFill/>
+          </a:ln>
+        </p:spPr>
+        <p:txBody>
+          <a:bodyPr/>
+          <a:lstStyle/>
+          <a:p>
+            <a:endParaRPr lang="en-US"/>
+          </a:p>
+        </p:txBody>
+      </p:sp>
+      <p:sp>
+        <p:nvSpPr>
+          <p:cNvPr id="24" name="TB24"/>
+          <p:cNvSpPr txBox="1">
+            <a:spLocks noGrp="1"/>
+          </p:cNvSpPr>
+          <p:nvPr/>
+        </p:nvSpPr>
+        <p:spPr>
+          <a:xfrm>
+            <a:off x="9450000" y="1480000"/>
+            <a:ext cx="2300000" cy="580000"/>
+          </a:xfrm>
+          <a:prstGeom prst="rect">
+            <a:avLst/>
+          </a:prstGeom>
+          <a:noFill/>
+        </p:spPr>
+        <p:txBody>
+          <a:bodyPr>
+            <a:normAutofit/>
+          </a:bodyPr>
+          <a:lstStyle/>
+          <a:p>
+            <a:pPr algn="l"/>
+            <a:r>
+              <a:rPr lang="en-US" sz="1400" b="1" dirty="0">
+                <a:solidFill>
+                  <a:srgbClr val="FFFFFF"/>
+                </a:solidFill>
+                <a:latin typeface="Calibri"/>
+              </a:rPr>
+              <a:t>ML Model</a:t>
+            </a:r>
+          </a:p>
+        </p:txBody>
+      </p:sp>
+      <p:sp>
+        <p:nvSpPr>
+          <p:cNvPr id="30" name="TB30"/>
+          <p:cNvSpPr txBox="1">
+            <a:spLocks noGrp="1"/>
+          </p:cNvSpPr>
+          <p:nvPr/>
+        </p:nvSpPr>
+        <p:spPr>
+          <a:xfrm>
+            <a:off x="457200" y="2350000"/>
+            <a:ext cx="11200000" cy="400000"/>
+          </a:xfrm>
+          <a:prstGeom prst="rect">
+            <a:avLst/>
+          </a:prstGeom>
+          <a:noFill/>
+        </p:spPr>
+        <p:txBody>
+          <a:bodyPr>
+            <a:normAutofit/>
+          </a:bodyPr>
+          <a:lstStyle/>
+          <a:p>
+            <a:pPr algn="l"/>
+            <a:r>
+              <a:rPr lang="en-US" sz="1800" b="1" dirty="0">
+                <a:solidFill>
+                  <a:srgbClr val="15616D"/>
+                </a:solidFill>
+                <a:latin typeface="Trebuchet MS"/>
+              </a:rPr>
+              <a:t>Three Ways to Turn Text into Numbers</a:t>
+            </a:r>
+          </a:p>
+        </p:txBody>
+      </p:sp>
+      <p:sp>
+        <p:nvSpPr>
+          <p:cNvPr id="31" name="CB31"/>
+          <p:cNvSpPr>
+            <a:spLocks noGrp="1"/>
+          </p:cNvSpPr>
+          <p:nvPr/>
+        </p:nvSpPr>
+        <p:spPr>
+          <a:xfrm>
+            <a:off x="457200" y="2850000"/>
+            <a:ext cx="3500000" cy="3200000"/>
+          </a:xfrm>
+          <a:prstGeom prst="rect">
+            <a:avLst/>
+          </a:prstGeom>
+          <a:solidFill>
+            <a:srgbClr val="F0F8F7"/>
+          </a:solidFill>
+          <a:ln>
+            <a:noFill/>
+          </a:ln>
+        </p:spPr>
+        <p:txBody>
+          <a:bodyPr/>
+          <a:lstStyle/>
+          <a:p>
+            <a:endParaRPr lang="en-US"/>
+          </a:p>
+        </p:txBody>
+      </p:sp>
+      <p:sp>
+        <p:nvSpPr>
+          <p:cNvPr id="32" name="TB32"/>
+          <p:cNvSpPr txBox="1">
+            <a:spLocks noGrp="1"/>
+          </p:cNvSpPr>
+          <p:nvPr/>
+        </p:nvSpPr>
+        <p:spPr>
+          <a:xfrm>
+            <a:off x="600000" y="2950000"/>
+            <a:ext cx="3200000" cy="450000"/>
+          </a:xfrm>
+          <a:prstGeom prst="rect">
+            <a:avLst/>
+          </a:prstGeom>
+          <a:noFill/>
+        </p:spPr>
+        <p:txBody>
+          <a:bodyPr>
+            <a:normAutofit/>
+          </a:bodyPr>
+          <a:lstStyle/>
+          <a:p>
+            <a:pPr algn="l"/>
+            <a:r>
+              <a:rPr lang="en-US" sz="1600" b="1" dirty="0">
+                <a:solidFill>
+                  <a:srgbClr val="15616D"/>
+                </a:solidFill>
+                <a:latin typeface="Calibri"/>
+              </a:rPr>
+              <a:t>Bag of Words (BoW)</a:t>
+            </a:r>
+          </a:p>
+        </p:txBody>
+      </p:sp>
+      <p:sp>
+        <p:nvSpPr>
+          <p:cNvPr id="33" name="BL33"/>
+          <p:cNvSpPr txBox="1">
+            <a:spLocks noGrp="1"/>
+          </p:cNvSpPr>
+          <p:nvPr/>
+        </p:nvSpPr>
+        <p:spPr>
+          <a:xfrm>
+            <a:off x="600000" y="3450000"/>
+            <a:ext cx="3200000" cy="2400000"/>
+          </a:xfrm>
+          <a:prstGeom prst="rect">
+            <a:avLst/>
+          </a:prstGeom>
+          <a:noFill/>
+        </p:spPr>
+        <p:txBody>
+          <a:bodyPr>
+            <a:normAutofit/>
+          </a:bodyPr>
+          <a:lstStyle/>
+          <a:p>
+            <a:pPr marL="342900" indent="-342900">
+              <a:lnSpc>
+                <a:spcPts val="3600"/>
+              </a:lnSpc>
+              <a:spcBef>
+                <a:spcPts val="200"/>
+              </a:spcBef>
+              <a:buChar char="■"/>
+            </a:pPr>
+            <a:r>
+              <a:rPr lang="en-US" sz="1200" b="0" dirty="0">
+                <a:solidFill>
+                  <a:srgbClr val="444444"/>
+                </a:solidFill>
+                <a:latin typeface="Calibri"/>
+              </a:rPr>
+              <a:t>Count how many times each word appears</a:t>
+            </a:r>
+          </a:p>
+          <a:p>
+            <a:pPr marL="342900" indent="-342900">
+              <a:lnSpc>
+                <a:spcPts val="3600"/>
+              </a:lnSpc>
+              <a:spcBef>
+                <a:spcPts val="200"/>
+              </a:spcBef>
+              <a:buChar char="■"/>
+            </a:pPr>
+            <a:r>
+              <a:rPr lang="en-US" sz="1200" b="0" dirty="0">
+                <a:solidFill>
+                  <a:srgbClr val="444444"/>
+                </a:solidFill>
+                <a:latin typeface="Calibri"/>
+              </a:rPr>
+              <a:t>Creates a word frequency vector per document</a:t>
+            </a:r>
+          </a:p>
+          <a:p>
+            <a:pPr marL="342900" indent="-342900">
+              <a:lnSpc>
+                <a:spcPts val="3600"/>
+              </a:lnSpc>
+              <a:spcBef>
+                <a:spcPts val="200"/>
+              </a:spcBef>
+              <a:buChar char="■"/>
+            </a:pPr>
+            <a:r>
+              <a:rPr lang="en-US" sz="1200" b="0" dirty="0">
+                <a:solidFill>
+                  <a:srgbClr val="BC5308"/>
+                </a:solidFill>
+                <a:latin typeface="Calibri"/>
+              </a:rPr>
+              <a:t>Simple but loses word order and context</a:t>
+            </a:r>
+          </a:p>
+          <a:p>
+            <a:pPr marL="342900" indent="-342900">
+              <a:lnSpc>
+                <a:spcPts val="3600"/>
+              </a:lnSpc>
+              <a:spcBef>
+                <a:spcPts val="200"/>
+              </a:spcBef>
+              <a:buChar char="■"/>
+            </a:pPr>
+            <a:r>
+              <a:rPr lang="en-US" sz="1200" b="0" dirty="0">
+                <a:solidFill>
+                  <a:srgbClr val="444444"/>
+                </a:solidFill>
+                <a:latin typeface="Calibri"/>
+              </a:rPr>
+              <a:t>Good for: spam filtering, topic classification</a:t>
+            </a:r>
+          </a:p>
+          <a:p>
+            <a:pPr marL="342900" indent="-342900">
+              <a:lnSpc>
+                <a:spcPts val="3600"/>
+              </a:lnSpc>
+              <a:spcBef>
+                <a:spcPts val="200"/>
+              </a:spcBef>
+              <a:buNone/>
+            </a:pPr>
+            <a:r>
+              <a:rPr lang="en-US" sz="1200" b="1" dirty="0">
+                <a:solidFill>
+                  <a:srgbClr val="15616D"/>
+                </a:solidFill>
+                <a:latin typeface="Calibri"/>
+              </a:rPr>
+              <a:t>Tool: CountVectorizer, TfidfVectorizer</a:t>
+            </a:r>
+          </a:p>
+        </p:txBody>
+      </p:sp>
+      <p:sp>
+        <p:nvSpPr>
+          <p:cNvPr id="34" name="CB34"/>
+          <p:cNvSpPr>
+            <a:spLocks noGrp="1"/>
+          </p:cNvSpPr>
+          <p:nvPr/>
+        </p:nvSpPr>
+        <p:spPr>
+          <a:xfrm>
+            <a:off x="4150000" y="2850000"/>
+            <a:ext cx="3500000" cy="3200000"/>
+          </a:xfrm>
+          <a:prstGeom prst="rect">
+            <a:avLst/>
+          </a:prstGeom>
+          <a:solidFill>
+            <a:srgbClr val="FFF5EC"/>
+          </a:solidFill>
+          <a:ln>
+            <a:noFill/>
+          </a:ln>
+        </p:spPr>
+        <p:txBody>
+          <a:bodyPr/>
+          <a:lstStyle/>
+          <a:p>
+            <a:endParaRPr lang="en-US"/>
+          </a:p>
+        </p:txBody>
+      </p:sp>
+      <p:sp>
+        <p:nvSpPr>
+          <p:cNvPr id="35" name="TB35"/>
+          <p:cNvSpPr txBox="1">
+            <a:spLocks noGrp="1"/>
+          </p:cNvSpPr>
+          <p:nvPr/>
+        </p:nvSpPr>
+        <p:spPr>
+          <a:xfrm>
+            <a:off x="4300000" y="2950000"/>
+            <a:ext cx="3200000" cy="450000"/>
+          </a:xfrm>
+          <a:prstGeom prst="rect">
+            <a:avLst/>
+          </a:prstGeom>
+          <a:noFill/>
+        </p:spPr>
+        <p:txBody>
+          <a:bodyPr>
+            <a:normAutofit/>
+          </a:bodyPr>
+          <a:lstStyle/>
+          <a:p>
+            <a:pPr algn="l"/>
+            <a:r>
+              <a:rPr lang="en-US" sz="1600" b="1" dirty="0">
+                <a:solidFill>
+                  <a:srgbClr val="BC5308"/>
+                </a:solidFill>
+                <a:latin typeface="Calibri"/>
+              </a:rPr>
+              <a:t>TF-IDF</a:t>
+            </a:r>
+          </a:p>
+        </p:txBody>
+      </p:sp>
+      <p:sp>
+        <p:nvSpPr>
+          <p:cNvPr id="36" name="BL36"/>
+          <p:cNvSpPr txBox="1">
+            <a:spLocks noGrp="1"/>
+          </p:cNvSpPr>
+          <p:nvPr/>
+        </p:nvSpPr>
+        <p:spPr>
+          <a:xfrm>
+            <a:off x="4300000" y="3450000"/>
+            <a:ext cx="3200000" cy="2400000"/>
+          </a:xfrm>
+          <a:prstGeom prst="rect">
+            <a:avLst/>
+          </a:prstGeom>
+          <a:noFill/>
+        </p:spPr>
+        <p:txBody>
+          <a:bodyPr>
+            <a:normAutofit/>
+          </a:bodyPr>
+          <a:lstStyle/>
+          <a:p>
+            <a:pPr marL="342900" indent="-342900">
+              <a:lnSpc>
+                <a:spcPts val="3600"/>
+              </a:lnSpc>
+              <a:spcBef>
+                <a:spcPts val="200"/>
+              </a:spcBef>
+              <a:buChar char="■"/>
+            </a:pPr>
+            <a:r>
+              <a:rPr lang="en-US" sz="1200" b="0" dirty="0">
+                <a:solidFill>
+                  <a:srgbClr val="444444"/>
+                </a:solidFill>
+                <a:latin typeface="Calibri"/>
+              </a:rPr>
+              <a:t>Term Frequency x Inverse Document Frequency</a:t>
+            </a:r>
+          </a:p>
+          <a:p>
+            <a:pPr marL="342900" indent="-342900">
+              <a:lnSpc>
+                <a:spcPts val="3600"/>
+              </a:lnSpc>
+              <a:spcBef>
+                <a:spcPts val="200"/>
+              </a:spcBef>
+              <a:buChar char="■"/>
+            </a:pPr>
+            <a:r>
+              <a:rPr lang="en-US" sz="1200" b="0" dirty="0">
+                <a:solidFill>
+                  <a:srgbClr val="444444"/>
+                </a:solidFill>
+                <a:latin typeface="Calibri"/>
+              </a:rPr>
+              <a:t>Rewards words rare in corpus, penalizes common words</a:t>
+            </a:r>
+          </a:p>
+          <a:p>
+            <a:pPr marL="342900" indent="-342900">
+              <a:lnSpc>
+                <a:spcPts val="3600"/>
+              </a:lnSpc>
+              <a:spcBef>
+                <a:spcPts val="200"/>
+              </a:spcBef>
+              <a:buChar char="■"/>
+            </a:pPr>
+            <a:r>
+              <a:rPr lang="en-US" sz="1200" b="0" dirty="0">
+                <a:solidFill>
+                  <a:srgbClr val="15616D"/>
+                </a:solidFill>
+                <a:latin typeface="Calibri"/>
+              </a:rPr>
+              <a:t>Better than raw BoW for most classification tasks</a:t>
+            </a:r>
+          </a:p>
+          <a:p>
+            <a:pPr marL="342900" indent="-342900">
+              <a:lnSpc>
+                <a:spcPts val="3600"/>
+              </a:lnSpc>
+              <a:spcBef>
+                <a:spcPts val="200"/>
+              </a:spcBef>
+              <a:buChar char="■"/>
+            </a:pPr>
+            <a:r>
+              <a:rPr lang="en-US" sz="1200" b="0" dirty="0">
+                <a:solidFill>
+                  <a:srgbClr val="444444"/>
+                </a:solidFill>
+                <a:latin typeface="Calibri"/>
+              </a:rPr>
+              <a:t>Good for: document search, article ranking</a:t>
+            </a:r>
+          </a:p>
+          <a:p>
+            <a:pPr marL="342900" indent="-342900">
+              <a:lnSpc>
+                <a:spcPts val="3600"/>
+              </a:lnSpc>
+              <a:spcBef>
+                <a:spcPts val="200"/>
+              </a:spcBef>
+              <a:buNone/>
+            </a:pPr>
+            <a:r>
+              <a:rPr lang="en-US" sz="1200" b="1" dirty="0">
+                <a:solidFill>
+                  <a:srgbClr val="BC5308"/>
+                </a:solidFill>
+                <a:latin typeface="Calibri"/>
+              </a:rPr>
+              <a:t>Tool: TfidfVectorizer in scikit-learn</a:t>
+            </a:r>
+          </a:p>
+        </p:txBody>
+      </p:sp>
+      <p:sp>
+        <p:nvSpPr>
+          <p:cNvPr id="37" name="CB37"/>
+          <p:cNvSpPr>
+            <a:spLocks noGrp="1"/>
+          </p:cNvSpPr>
+          <p:nvPr/>
+        </p:nvSpPr>
+        <p:spPr>
+          <a:xfrm>
+            <a:off x="7850000" y="2850000"/>
+            <a:ext cx="3900000" cy="3200000"/>
+          </a:xfrm>
+          <a:prstGeom prst="rect">
+            <a:avLst/>
+          </a:prstGeom>
+          <a:solidFill>
+            <a:srgbClr val="001524"/>
+          </a:solidFill>
+          <a:ln>
+            <a:noFill/>
+          </a:ln>
+        </p:spPr>
+        <p:txBody>
+          <a:bodyPr/>
+          <a:lstStyle/>
+          <a:p>
+            <a:endParaRPr lang="en-US"/>
+          </a:p>
+        </p:txBody>
+      </p:sp>
+      <p:sp>
+        <p:nvSpPr>
+          <p:cNvPr id="38" name="TB38"/>
+          <p:cNvSpPr txBox="1">
+            <a:spLocks noGrp="1"/>
+          </p:cNvSpPr>
+          <p:nvPr/>
+        </p:nvSpPr>
+        <p:spPr>
+          <a:xfrm>
+            <a:off x="8000000" y="2950000"/>
+            <a:ext cx="3600000" cy="450000"/>
+          </a:xfrm>
+          <a:prstGeom prst="rect">
+            <a:avLst/>
+          </a:prstGeom>
+          <a:noFill/>
+        </p:spPr>
+        <p:txBody>
+          <a:bodyPr>
+            <a:normAutofit/>
+          </a:bodyPr>
+          <a:lstStyle/>
+          <a:p>
+            <a:pPr algn="l"/>
+            <a:r>
+              <a:rPr lang="en-US" sz="1600" b="1" dirty="0">
+                <a:solidFill>
+                  <a:srgbClr val="FF7D00"/>
+                </a:solidFill>
+                <a:latin typeface="Calibri"/>
+              </a:rPr>
+              <a:t>Word Embeddings</a:t>
+            </a:r>
+          </a:p>
+        </p:txBody>
+      </p:sp>
+      <p:sp>
+        <p:nvSpPr>
+          <p:cNvPr id="39" name="BL39"/>
+          <p:cNvSpPr txBox="1">
+            <a:spLocks noGrp="1"/>
+          </p:cNvSpPr>
+          <p:nvPr/>
+        </p:nvSpPr>
+        <p:spPr>
+          <a:xfrm>
+            <a:off x="8000000" y="3450000"/>
+            <a:ext cx="3600000" cy="2400000"/>
+          </a:xfrm>
+          <a:prstGeom prst="rect">
+            <a:avLst/>
+          </a:prstGeom>
+          <a:noFill/>
+        </p:spPr>
+        <p:txBody>
+          <a:bodyPr>
+            <a:normAutofit/>
+          </a:bodyPr>
+          <a:lstStyle/>
+          <a:p>
+            <a:pPr marL="342900" indent="-342900">
+              <a:lnSpc>
+                <a:spcPts val="3600"/>
+              </a:lnSpc>
+              <a:spcBef>
+                <a:spcPts val="200"/>
+              </a:spcBef>
+              <a:buChar char="■"/>
+            </a:pPr>
+            <a:r>
+              <a:rPr lang="en-US" sz="1200" b="0" dirty="0">
+                <a:solidFill>
+                  <a:srgbClr val="C5CAB8"/>
+                </a:solidFill>
+                <a:latin typeface="Calibri"/>
+              </a:rPr>
+              <a:t>Dense vectors — similar words cluster in space</a:t>
+            </a:r>
+          </a:p>
+          <a:p>
+            <a:pPr marL="342900" indent="-342900">
+              <a:lnSpc>
+                <a:spcPts val="3600"/>
+              </a:lnSpc>
+              <a:spcBef>
+                <a:spcPts val="200"/>
+              </a:spcBef>
+              <a:buChar char="■"/>
+            </a:pPr>
+            <a:r>
+              <a:rPr lang="en-US" sz="1200" b="0" dirty="0">
+                <a:solidFill>
+                  <a:srgbClr val="C5CAB8"/>
+                </a:solidFill>
+                <a:latin typeface="Calibri"/>
+              </a:rPr>
+              <a:t>Word2Vec: 'king' - 'man' + 'woman' = 'queen'!</a:t>
+            </a:r>
+          </a:p>
+          <a:p>
+            <a:pPr marL="342900" indent="-342900">
+              <a:lnSpc>
+                <a:spcPts val="3600"/>
+              </a:lnSpc>
+              <a:spcBef>
+                <a:spcPts val="200"/>
+              </a:spcBef>
+              <a:buChar char="■"/>
+            </a:pPr>
+            <a:r>
+              <a:rPr lang="en-US" sz="1200" b="0" dirty="0">
+                <a:solidFill>
+                  <a:srgbClr val="8AA79F"/>
+                </a:solidFill>
+                <a:latin typeface="Calibri"/>
+              </a:rPr>
+              <a:t>Captures semantic meaning and word relationships</a:t>
+            </a:r>
+          </a:p>
+          <a:p>
+            <a:pPr marL="342900" indent="-342900">
+              <a:lnSpc>
+                <a:spcPts val="3600"/>
+              </a:lnSpc>
+              <a:spcBef>
+                <a:spcPts val="200"/>
+              </a:spcBef>
+              <a:buChar char="■"/>
+            </a:pPr>
+            <a:r>
+              <a:rPr lang="en-US" sz="1200" b="0" dirty="0">
+                <a:solidFill>
+                  <a:srgbClr val="C5CAB8"/>
+                </a:solidFill>
+                <a:latin typeface="Calibri"/>
+              </a:rPr>
+              <a:t>Modern: BERT, sentence-transformers for context</a:t>
+            </a:r>
+          </a:p>
+          <a:p>
+            <a:pPr marL="342900" indent="-342900">
+              <a:lnSpc>
+                <a:spcPts val="3600"/>
+              </a:lnSpc>
+              <a:spcBef>
+                <a:spcPts val="200"/>
+              </a:spcBef>
+              <a:buNone/>
+            </a:pPr>
+            <a:r>
+              <a:rPr lang="en-US" sz="1200" b="1" dirty="0">
+                <a:solidFill>
+                  <a:srgbClr val="FF7D00"/>
+                </a:solidFill>
+                <a:latin typeface="Calibri"/>
+              </a:rPr>
+              <a:t>Tool: gensim, HuggingFace transformers</a:t>
+            </a:r>
+          </a:p>
+        </p:txBody>
+      </p:sp>
+      <p:sp>
+        <p:nvSpPr>
+          <p:cNvPr id="90" name="FooterBar"/>
+          <p:cNvSpPr>
+            <a:spLocks noGrp="1"/>
+          </p:cNvSpPr>
+          <p:nvPr/>
+        </p:nvSpPr>
+        <p:spPr>
+          <a:xfrm>
+            <a:off x="0" y="6400800"/>
+            <a:ext cx="12192000" cy="457200"/>
+          </a:xfrm>
+          <a:prstGeom prst="rect">
+            <a:avLst/>
+          </a:prstGeom>
+          <a:solidFill>
+            <a:srgbClr val="15616D"/>
+          </a:solidFill>
+          <a:ln>
+            <a:noFill/>
+          </a:ln>
+        </p:spPr>
+        <p:txBody>
+          <a:bodyPr/>
+          <a:lstStyle/>
+          <a:p>
+            <a:endParaRPr lang="en-US"/>
+          </a:p>
+        </p:txBody>
+      </p:sp>
     </p:spTree>
-    <p:extLst>
-      <p:ext uri="{BB962C8B-B14F-4D97-AF65-F5344CB8AC3E}">
-        <p14:creationId xmlns:p14="http://schemas.microsoft.com/office/powerpoint/2010/main" val="3789483675"/>
-      </p:ext>
-    </p:extLst>
   </p:cSld>
   <p:clrMapOvr>
     <a:masterClrMapping/>
@@ -5314,13 +7711,7 @@
   <p:cSld>
     <p:spTree>
       <p:nvGrpSpPr>
-        <p:cNvPr id="1" name="">
-          <a:extLst>
-            <a:ext uri="{FF2B5EF4-FFF2-40B4-BE49-F238E27FC236}">
-              <a16:creationId xmlns:a16="http://schemas.microsoft.com/office/drawing/2014/main" id="{9D299277-8FC2-131A-C9B2-22FB887F8AFA}"/>
-            </a:ext>
-          </a:extLst>
-        </p:cNvPr>
+        <p:cNvPr id="1" name=""/>
         <p:cNvGrpSpPr/>
         <p:nvPr/>
       </p:nvGrpSpPr>
@@ -5334,54 +7725,396 @@
       </p:grpSpPr>
       <p:sp>
         <p:nvSpPr>
-          <p:cNvPr id="2" name="Title 1">
-            <a:extLst>
-              <a:ext uri="{FF2B5EF4-FFF2-40B4-BE49-F238E27FC236}">
-                <a16:creationId xmlns:a16="http://schemas.microsoft.com/office/drawing/2014/main" id="{DCAC020B-8EE1-7698-D26C-D8420B3F8C4D}"/>
-              </a:ext>
-            </a:extLst>
-          </p:cNvPr>
+          <p:cNvPr id="91" name="HeaderBar"/>
           <p:cNvSpPr>
             <a:spLocks noGrp="1"/>
           </p:cNvSpPr>
-          <p:nvPr>
-            <p:ph type="title"/>
-          </p:nvPr>
-        </p:nvSpPr>
-        <p:spPr>
-          <a:xfrm>
-            <a:off x="993763" y="243472"/>
-            <a:ext cx="10058400" cy="817578"/>
-          </a:xfrm>
+          <p:nvPr/>
+        </p:nvSpPr>
+        <p:spPr>
+          <a:xfrm>
+            <a:off x="0" y="0"/>
+            <a:ext cx="12192000" cy="800000"/>
+          </a:xfrm>
+          <a:prstGeom prst="rect">
+            <a:avLst/>
+          </a:prstGeom>
+          <a:solidFill>
+            <a:srgbClr val="15616D"/>
+          </a:solidFill>
+          <a:ln>
+            <a:noFill/>
+          </a:ln>
+        </p:spPr>
+        <p:txBody>
+          <a:bodyPr anchor="ctr">
+            <a:normAutofit/>
+          </a:bodyPr>
+          <a:lstStyle/>
+          <a:p>
+            <a:pPr algn="l"/>
+            <a:r>
+              <a:rPr lang="en-US" sz="2400" b="1" dirty="0">
+                <a:solidFill>
+                  <a:srgbClr val="FFFFFF"/>
+                </a:solidFill>
+                <a:latin typeface="Trebuchet MS"/>
+              </a:rPr>
+              <a:t>  Bag of Words — Demo &amp; Hands-On</a:t>
+            </a:r>
+          </a:p>
+        </p:txBody>
+      </p:sp>
+      <p:sp>
+        <p:nvSpPr>
+          <p:cNvPr id="10" name="CB10"/>
+          <p:cNvSpPr>
+            <a:spLocks noGrp="1"/>
+          </p:cNvSpPr>
+          <p:nvPr/>
+        </p:nvSpPr>
+        <p:spPr>
+          <a:xfrm>
+            <a:off x="457200" y="950000"/>
+            <a:ext cx="5600000" cy="4200000"/>
+          </a:xfrm>
+          <a:prstGeom prst="rect">
+            <a:avLst/>
+          </a:prstGeom>
+          <a:solidFill>
+            <a:srgbClr val="001524"/>
+          </a:solidFill>
+          <a:ln>
+            <a:noFill/>
+          </a:ln>
         </p:spPr>
         <p:txBody>
           <a:bodyPr/>
           <a:lstStyle/>
           <a:p>
-            <a:r>
-              <a:rPr lang="en-US" dirty="0"/>
-              <a:t>Bag of Words models</a:t>
-            </a:r>
-          </a:p>
-        </p:txBody>
-      </p:sp>
-      <p:sp>
-        <p:nvSpPr>
-          <p:cNvPr id="3" name="Content Placeholder 2">
-            <a:extLst>
-              <a:ext uri="{FF2B5EF4-FFF2-40B4-BE49-F238E27FC236}">
-                <a16:creationId xmlns:a16="http://schemas.microsoft.com/office/drawing/2014/main" id="{890C88EA-A707-C61E-1105-DC201BAACCEC}"/>
-              </a:ext>
-            </a:extLst>
-          </p:cNvPr>
+            <a:endParaRPr lang="en-US"/>
+          </a:p>
+        </p:txBody>
+      </p:sp>
+      <p:sp>
+        <p:nvSpPr>
+          <p:cNvPr id="11" name="TB11"/>
+          <p:cNvSpPr txBox="1">
+            <a:spLocks noGrp="1"/>
+          </p:cNvSpPr>
+          <p:nvPr/>
+        </p:nvSpPr>
+        <p:spPr>
+          <a:xfrm>
+            <a:off x="600000" y="1000000"/>
+            <a:ext cx="5300000" cy="500000"/>
+          </a:xfrm>
+          <a:prstGeom prst="rect">
+            <a:avLst/>
+          </a:prstGeom>
+          <a:noFill/>
+        </p:spPr>
+        <p:txBody>
+          <a:bodyPr>
+            <a:normAutofit/>
+          </a:bodyPr>
+          <a:lstStyle/>
+          <a:p>
+            <a:pPr algn="l"/>
+            <a:r>
+              <a:rPr lang="en-US" sz="1800" b="1" dirty="0">
+                <a:solidFill>
+                  <a:srgbClr val="FF7D00"/>
+                </a:solidFill>
+                <a:latin typeface="Trebuchet MS"/>
+              </a:rPr>
+              <a:t>Session 2 Demo: Kenyan News Classifier</a:t>
+            </a:r>
+          </a:p>
+        </p:txBody>
+      </p:sp>
+      <p:sp>
+        <p:nvSpPr>
+          <p:cNvPr id="12" name="BL12"/>
+          <p:cNvSpPr txBox="1">
+            <a:spLocks noGrp="1"/>
+          </p:cNvSpPr>
+          <p:nvPr/>
+        </p:nvSpPr>
+        <p:spPr>
+          <a:xfrm>
+            <a:off x="600000" y="1600000"/>
+            <a:ext cx="5200000" cy="3400000"/>
+          </a:xfrm>
+          <a:prstGeom prst="rect">
+            <a:avLst/>
+          </a:prstGeom>
+          <a:noFill/>
+        </p:spPr>
+        <p:txBody>
+          <a:bodyPr>
+            <a:normAutofit/>
+          </a:bodyPr>
+          <a:lstStyle/>
+          <a:p>
+            <a:pPr marL="342900" indent="-342900">
+              <a:lnSpc>
+                <a:spcPts val="3600"/>
+              </a:lnSpc>
+              <a:spcBef>
+                <a:spcPts val="200"/>
+              </a:spcBef>
+              <a:buChar char="■"/>
+            </a:pPr>
+            <a:r>
+              <a:rPr lang="en-US" sz="1300" b="0" dirty="0">
+                <a:solidFill>
+                  <a:srgbClr val="C5CAB8"/>
+                </a:solidFill>
+                <a:latin typeface="Calibri"/>
+              </a:rPr>
+              <a:t>Dataset: 500+ Kenyan news article headlines</a:t>
+            </a:r>
+          </a:p>
+          <a:p>
+            <a:pPr marL="342900" indent="-342900">
+              <a:lnSpc>
+                <a:spcPts val="3600"/>
+              </a:lnSpc>
+              <a:spcBef>
+                <a:spcPts val="200"/>
+              </a:spcBef>
+              <a:buChar char="■"/>
+            </a:pPr>
+            <a:r>
+              <a:rPr lang="en-US" sz="1300" b="0" dirty="0">
+                <a:solidFill>
+                  <a:srgbClr val="C5CAB8"/>
+                </a:solidFill>
+                <a:latin typeface="Calibri"/>
+              </a:rPr>
+              <a:t>Categories: Politics, Technology, Sports, Environment, Business</a:t>
+            </a:r>
+          </a:p>
+          <a:p>
+            <a:pPr marL="342900" indent="-342900">
+              <a:lnSpc>
+                <a:spcPts val="3600"/>
+              </a:lnSpc>
+              <a:spcBef>
+                <a:spcPts val="200"/>
+              </a:spcBef>
+              <a:buNone/>
+            </a:pPr>
+            <a:endParaRPr lang="en-US" sz="1300" b="0" dirty="0">
+              <a:solidFill>
+                <a:srgbClr val="C5CAB8"/>
+              </a:solidFill>
+              <a:latin typeface="Calibri"/>
+            </a:endParaRPr>
+          </a:p>
+          <a:p>
+            <a:pPr marL="342900" indent="-342900">
+              <a:lnSpc>
+                <a:spcPts val="3600"/>
+              </a:lnSpc>
+              <a:spcBef>
+                <a:spcPts val="200"/>
+              </a:spcBef>
+              <a:buNone/>
+            </a:pPr>
+            <a:r>
+              <a:rPr lang="en-US" sz="1300" b="1" dirty="0">
+                <a:solidFill>
+                  <a:srgbClr val="8AA79F"/>
+                </a:solidFill>
+                <a:latin typeface="Trebuchet MS"/>
+              </a:rPr>
+              <a:t>Step 1: Vectorize with CountVectorizer</a:t>
+            </a:r>
+          </a:p>
+          <a:p>
+            <a:pPr marL="342900" indent="-342900">
+              <a:lnSpc>
+                <a:spcPts val="3600"/>
+              </a:lnSpc>
+              <a:spcBef>
+                <a:spcPts val="200"/>
+              </a:spcBef>
+              <a:buNone/>
+            </a:pPr>
+            <a:r>
+              <a:rPr lang="en-US" sz="1200" b="0" dirty="0">
+                <a:solidFill>
+                  <a:srgbClr val="C5CAB8"/>
+                </a:solidFill>
+                <a:latin typeface="Calibri"/>
+              </a:rPr>
+              <a:t>from sklearn.feature_extraction.text import CountVectorizer</a:t>
+            </a:r>
+          </a:p>
+          <a:p>
+            <a:pPr marL="342900" indent="-342900">
+              <a:lnSpc>
+                <a:spcPts val="3600"/>
+              </a:lnSpc>
+              <a:spcBef>
+                <a:spcPts val="200"/>
+              </a:spcBef>
+              <a:buNone/>
+            </a:pPr>
+            <a:r>
+              <a:rPr lang="en-US" sz="1200" b="0" dirty="0">
+                <a:solidFill>
+                  <a:srgbClr val="C5CAB8"/>
+                </a:solidFill>
+                <a:latin typeface="Calibri"/>
+              </a:rPr>
+              <a:t>vectorizer = CountVectorizer(stop_words='english')</a:t>
+            </a:r>
+          </a:p>
+          <a:p>
+            <a:pPr marL="342900" indent="-342900">
+              <a:lnSpc>
+                <a:spcPts val="3600"/>
+              </a:lnSpc>
+              <a:spcBef>
+                <a:spcPts val="200"/>
+              </a:spcBef>
+              <a:buNone/>
+            </a:pPr>
+            <a:r>
+              <a:rPr lang="en-US" sz="1200" b="0" dirty="0">
+                <a:solidFill>
+                  <a:srgbClr val="C5CAB8"/>
+                </a:solidFill>
+                <a:latin typeface="Calibri"/>
+              </a:rPr>
+              <a:t>X = vectorizer.fit_transform(articles)</a:t>
+            </a:r>
+          </a:p>
+          <a:p>
+            <a:pPr marL="342900" indent="-342900">
+              <a:lnSpc>
+                <a:spcPts val="3600"/>
+              </a:lnSpc>
+              <a:spcBef>
+                <a:spcPts val="200"/>
+              </a:spcBef>
+              <a:buNone/>
+            </a:pPr>
+            <a:endParaRPr lang="en-US" sz="1200" b="0" dirty="0">
+              <a:solidFill>
+                <a:srgbClr val="C5CAB8"/>
+              </a:solidFill>
+              <a:latin typeface="Calibri"/>
+            </a:endParaRPr>
+          </a:p>
+          <a:p>
+            <a:pPr marL="342900" indent="-342900">
+              <a:lnSpc>
+                <a:spcPts val="3600"/>
+              </a:lnSpc>
+              <a:spcBef>
+                <a:spcPts val="200"/>
+              </a:spcBef>
+              <a:buNone/>
+            </a:pPr>
+            <a:r>
+              <a:rPr lang="en-US" sz="1300" b="1" dirty="0">
+                <a:solidFill>
+                  <a:srgbClr val="8AA79F"/>
+                </a:solidFill>
+                <a:latin typeface="Trebuchet MS"/>
+              </a:rPr>
+              <a:t>Step 2: Train Naive Bayes Classifier</a:t>
+            </a:r>
+          </a:p>
+          <a:p>
+            <a:pPr marL="342900" indent="-342900">
+              <a:lnSpc>
+                <a:spcPts val="3600"/>
+              </a:lnSpc>
+              <a:spcBef>
+                <a:spcPts val="200"/>
+              </a:spcBef>
+              <a:buNone/>
+            </a:pPr>
+            <a:r>
+              <a:rPr lang="en-US" sz="1200" b="0" dirty="0">
+                <a:solidFill>
+                  <a:srgbClr val="C5CAB8"/>
+                </a:solidFill>
+                <a:latin typeface="Calibri"/>
+              </a:rPr>
+              <a:t>from sklearn.naive_bayes import MultinomialNB</a:t>
+            </a:r>
+          </a:p>
+          <a:p>
+            <a:pPr marL="342900" indent="-342900">
+              <a:lnSpc>
+                <a:spcPts val="3600"/>
+              </a:lnSpc>
+              <a:spcBef>
+                <a:spcPts val="200"/>
+              </a:spcBef>
+              <a:buNone/>
+            </a:pPr>
+            <a:r>
+              <a:rPr lang="en-US" sz="1200" b="0" dirty="0">
+                <a:solidFill>
+                  <a:srgbClr val="C5CAB8"/>
+                </a:solidFill>
+                <a:latin typeface="Calibri"/>
+              </a:rPr>
+              <a:t>model = MultinomialNB()</a:t>
+            </a:r>
+          </a:p>
+          <a:p>
+            <a:pPr marL="342900" indent="-342900">
+              <a:lnSpc>
+                <a:spcPts val="3600"/>
+              </a:lnSpc>
+              <a:spcBef>
+                <a:spcPts val="200"/>
+              </a:spcBef>
+              <a:buNone/>
+            </a:pPr>
+            <a:r>
+              <a:rPr lang="en-US" sz="1200" b="0" dirty="0">
+                <a:solidFill>
+                  <a:srgbClr val="C5CAB8"/>
+                </a:solidFill>
+                <a:latin typeface="Calibri"/>
+              </a:rPr>
+              <a:t>model.fit(X_train, y_train)</a:t>
+            </a:r>
+          </a:p>
+        </p:txBody>
+      </p:sp>
+      <p:sp>
+        <p:nvSpPr>
+          <p:cNvPr id="20" name="CB20"/>
           <p:cNvSpPr>
             <a:spLocks noGrp="1"/>
           </p:cNvSpPr>
-          <p:nvPr>
-            <p:ph idx="1"/>
-          </p:nvPr>
-        </p:nvSpPr>
-        <p:spPr/>
+          <p:nvPr/>
+        </p:nvSpPr>
+        <p:spPr>
+          <a:xfrm>
+            <a:off x="6300000" y="950000"/>
+            <a:ext cx="5450000" cy="4200000"/>
+          </a:xfrm>
+          <a:prstGeom prst="rect">
+            <a:avLst/>
+          </a:prstGeom>
+          <a:solidFill>
+            <a:srgbClr val="F5F5F5"/>
+          </a:solidFill>
+          <a:ln>
+            <a:noFill/>
+          </a:ln>
+        </p:spPr>
         <p:txBody>
           <a:bodyPr/>
           <a:lstStyle/>
@@ -5390,12 +8123,262 @@
           </a:p>
         </p:txBody>
       </p:sp>
+      <p:sp>
+        <p:nvSpPr>
+          <p:cNvPr id="21" name="TB21"/>
+          <p:cNvSpPr txBox="1">
+            <a:spLocks noGrp="1"/>
+          </p:cNvSpPr>
+          <p:nvPr/>
+        </p:nvSpPr>
+        <p:spPr>
+          <a:xfrm>
+            <a:off x="6500000" y="1000000"/>
+            <a:ext cx="5100000" cy="500000"/>
+          </a:xfrm>
+          <a:prstGeom prst="rect">
+            <a:avLst/>
+          </a:prstGeom>
+          <a:noFill/>
+        </p:spPr>
+        <p:txBody>
+          <a:bodyPr>
+            <a:normAutofit/>
+          </a:bodyPr>
+          <a:lstStyle/>
+          <a:p>
+            <a:pPr algn="l"/>
+            <a:r>
+              <a:rPr lang="en-US" sz="1800" b="1" dirty="0">
+                <a:solidFill>
+                  <a:srgbClr val="15616D"/>
+                </a:solidFill>
+                <a:latin typeface="Trebuchet MS"/>
+              </a:rPr>
+              <a:t>Why Naive Bayes for Text?</a:t>
+            </a:r>
+          </a:p>
+        </p:txBody>
+      </p:sp>
+      <p:sp>
+        <p:nvSpPr>
+          <p:cNvPr id="22" name="BL22"/>
+          <p:cNvSpPr txBox="1">
+            <a:spLocks noGrp="1"/>
+          </p:cNvSpPr>
+          <p:nvPr/>
+        </p:nvSpPr>
+        <p:spPr>
+          <a:xfrm>
+            <a:off x="6500000" y="1600000"/>
+            <a:ext cx="5100000" cy="2200000"/>
+          </a:xfrm>
+          <a:prstGeom prst="rect">
+            <a:avLst/>
+          </a:prstGeom>
+          <a:noFill/>
+        </p:spPr>
+        <p:txBody>
+          <a:bodyPr>
+            <a:normAutofit/>
+          </a:bodyPr>
+          <a:lstStyle/>
+          <a:p>
+            <a:pPr marL="342900" indent="-342900">
+              <a:lnSpc>
+                <a:spcPts val="3600"/>
+              </a:lnSpc>
+              <a:spcBef>
+                <a:spcPts val="200"/>
+              </a:spcBef>
+              <a:buChar char="■"/>
+            </a:pPr>
+            <a:r>
+              <a:rPr lang="en-US" sz="1300" b="0" dirty="0">
+                <a:solidFill>
+                  <a:srgbClr val="444444"/>
+                </a:solidFill>
+                <a:latin typeface="Calibri"/>
+              </a:rPr>
+              <a:t>Fast to train — handles thousands of features efficiently</a:t>
+            </a:r>
+          </a:p>
+          <a:p>
+            <a:pPr marL="342900" indent="-342900">
+              <a:lnSpc>
+                <a:spcPts val="3600"/>
+              </a:lnSpc>
+              <a:spcBef>
+                <a:spcPts val="200"/>
+              </a:spcBef>
+              <a:buChar char="■"/>
+            </a:pPr>
+            <a:r>
+              <a:rPr lang="en-US" sz="1300" b="0" dirty="0">
+                <a:solidFill>
+                  <a:srgbClr val="444444"/>
+                </a:solidFill>
+                <a:latin typeface="Calibri"/>
+              </a:rPr>
+              <a:t>Works surprisingly well on short text (SMS, headlines)</a:t>
+            </a:r>
+          </a:p>
+          <a:p>
+            <a:pPr marL="342900" indent="-342900">
+              <a:lnSpc>
+                <a:spcPts val="3600"/>
+              </a:lnSpc>
+              <a:spcBef>
+                <a:spcPts val="200"/>
+              </a:spcBef>
+              <a:buChar char="■"/>
+            </a:pPr>
+            <a:r>
+              <a:rPr lang="en-US" sz="1300" b="0" dirty="0">
+                <a:solidFill>
+                  <a:srgbClr val="444444"/>
+                </a:solidFill>
+                <a:latin typeface="Calibri"/>
+              </a:rPr>
+              <a:t>Good baseline before trying SVM or deep learning</a:t>
+            </a:r>
+          </a:p>
+          <a:p>
+            <a:pPr marL="342900" indent="-342900">
+              <a:lnSpc>
+                <a:spcPts val="3600"/>
+              </a:lnSpc>
+              <a:spcBef>
+                <a:spcPts val="200"/>
+              </a:spcBef>
+              <a:buChar char="■"/>
+            </a:pPr>
+            <a:r>
+              <a:rPr lang="en-US" sz="1300" b="0" dirty="0">
+                <a:solidFill>
+                  <a:srgbClr val="444444"/>
+                </a:solidFill>
+                <a:latin typeface="Calibri"/>
+              </a:rPr>
+              <a:t>Probabilistic: gives probability for each class</a:t>
+            </a:r>
+          </a:p>
+        </p:txBody>
+      </p:sp>
+      <p:sp>
+        <p:nvSpPr>
+          <p:cNvPr id="30" name="TB30"/>
+          <p:cNvSpPr txBox="1">
+            <a:spLocks noGrp="1"/>
+          </p:cNvSpPr>
+          <p:nvPr/>
+        </p:nvSpPr>
+        <p:spPr>
+          <a:xfrm>
+            <a:off x="6500000" y="3900000"/>
+            <a:ext cx="5100000" cy="500000"/>
+          </a:xfrm>
+          <a:prstGeom prst="rect">
+            <a:avLst/>
+          </a:prstGeom>
+          <a:noFill/>
+        </p:spPr>
+        <p:txBody>
+          <a:bodyPr>
+            <a:normAutofit/>
+          </a:bodyPr>
+          <a:lstStyle/>
+          <a:p>
+            <a:pPr algn="l"/>
+            <a:r>
+              <a:rPr lang="en-US" sz="1600" b="1" dirty="0">
+                <a:solidFill>
+                  <a:srgbClr val="BC5308"/>
+                </a:solidFill>
+                <a:latin typeface="Calibri"/>
+              </a:rPr>
+              <a:t>Expected Results</a:t>
+            </a:r>
+          </a:p>
+        </p:txBody>
+      </p:sp>
+      <p:sp>
+        <p:nvSpPr>
+          <p:cNvPr id="31" name="BL31"/>
+          <p:cNvSpPr txBox="1">
+            <a:spLocks noGrp="1"/>
+          </p:cNvSpPr>
+          <p:nvPr/>
+        </p:nvSpPr>
+        <p:spPr>
+          <a:xfrm>
+            <a:off x="6500000" y="4450000"/>
+            <a:ext cx="5100000" cy="600000"/>
+          </a:xfrm>
+          <a:prstGeom prst="rect">
+            <a:avLst/>
+          </a:prstGeom>
+          <a:noFill/>
+        </p:spPr>
+        <p:txBody>
+          <a:bodyPr>
+            <a:normAutofit/>
+          </a:bodyPr>
+          <a:lstStyle/>
+          <a:p>
+            <a:pPr marL="342900" indent="-342900">
+              <a:lnSpc>
+                <a:spcPts val="3600"/>
+              </a:lnSpc>
+              <a:spcBef>
+                <a:spcPts val="200"/>
+              </a:spcBef>
+              <a:buChar char="■"/>
+            </a:pPr>
+            <a:r>
+              <a:rPr lang="en-US" sz="1300" b="0" dirty="0">
+                <a:solidFill>
+                  <a:srgbClr val="444444"/>
+                </a:solidFill>
+                <a:latin typeface="Calibri"/>
+              </a:rPr>
+              <a:t>Accuracy: ~75-85% on balanced Kenyan news dataset</a:t>
+            </a:r>
+          </a:p>
+        </p:txBody>
+      </p:sp>
+      <p:sp>
+        <p:nvSpPr>
+          <p:cNvPr id="90" name="FooterBar"/>
+          <p:cNvSpPr>
+            <a:spLocks noGrp="1"/>
+          </p:cNvSpPr>
+          <p:nvPr/>
+        </p:nvSpPr>
+        <p:spPr>
+          <a:xfrm>
+            <a:off x="0" y="6400800"/>
+            <a:ext cx="12192000" cy="457200"/>
+          </a:xfrm>
+          <a:prstGeom prst="rect">
+            <a:avLst/>
+          </a:prstGeom>
+          <a:solidFill>
+            <a:srgbClr val="15616D"/>
+          </a:solidFill>
+          <a:ln>
+            <a:noFill/>
+          </a:ln>
+        </p:spPr>
+        <p:txBody>
+          <a:bodyPr/>
+          <a:lstStyle/>
+          <a:p>
+            <a:endParaRPr lang="en-US"/>
+          </a:p>
+        </p:txBody>
+      </p:sp>
     </p:spTree>
-    <p:extLst>
-      <p:ext uri="{BB962C8B-B14F-4D97-AF65-F5344CB8AC3E}">
-        <p14:creationId xmlns:p14="http://schemas.microsoft.com/office/powerpoint/2010/main" val="811044912"/>
-      </p:ext>
-    </p:extLst>
   </p:cSld>
   <p:clrMapOvr>
     <a:masterClrMapping/>
@@ -5408,13 +8391,7 @@
   <p:cSld>
     <p:spTree>
       <p:nvGrpSpPr>
-        <p:cNvPr id="1" name="">
-          <a:extLst>
-            <a:ext uri="{FF2B5EF4-FFF2-40B4-BE49-F238E27FC236}">
-              <a16:creationId xmlns:a16="http://schemas.microsoft.com/office/drawing/2014/main" id="{2FE48CB2-EBFB-A463-6F7F-0429B4F61080}"/>
-            </a:ext>
-          </a:extLst>
-        </p:cNvPr>
+        <p:cNvPr id="1" name=""/>
         <p:cNvGrpSpPr/>
         <p:nvPr/>
       </p:nvGrpSpPr>
@@ -5428,68 +8405,685 @@
       </p:grpSpPr>
       <p:sp>
         <p:nvSpPr>
-          <p:cNvPr id="2" name="Title 1">
-            <a:extLst>
-              <a:ext uri="{FF2B5EF4-FFF2-40B4-BE49-F238E27FC236}">
-                <a16:creationId xmlns:a16="http://schemas.microsoft.com/office/drawing/2014/main" id="{864F4A18-6C08-ED03-B564-2E147973DD75}"/>
-              </a:ext>
-            </a:extLst>
-          </p:cNvPr>
+          <p:cNvPr id="91" name="HeaderBar"/>
           <p:cNvSpPr>
             <a:spLocks noGrp="1"/>
           </p:cNvSpPr>
-          <p:nvPr>
-            <p:ph type="title"/>
-          </p:nvPr>
-        </p:nvSpPr>
-        <p:spPr>
-          <a:xfrm>
-            <a:off x="993763" y="243472"/>
-            <a:ext cx="10058400" cy="817578"/>
-          </a:xfrm>
+          <p:nvPr/>
+        </p:nvSpPr>
+        <p:spPr>
+          <a:xfrm>
+            <a:off x="0" y="0"/>
+            <a:ext cx="12192000" cy="800000"/>
+          </a:xfrm>
+          <a:prstGeom prst="rect">
+            <a:avLst/>
+          </a:prstGeom>
+          <a:solidFill>
+            <a:srgbClr val="15616D"/>
+          </a:solidFill>
+          <a:ln>
+            <a:noFill/>
+          </a:ln>
+        </p:spPr>
+        <p:txBody>
+          <a:bodyPr anchor="ctr">
+            <a:normAutofit/>
+          </a:bodyPr>
+          <a:lstStyle/>
+          <a:p>
+            <a:pPr algn="l"/>
+            <a:r>
+              <a:rPr lang="en-US" sz="2400" b="1" dirty="0">
+                <a:solidFill>
+                  <a:srgbClr val="FFFFFF"/>
+                </a:solidFill>
+                <a:latin typeface="Trebuchet MS"/>
+              </a:rPr>
+              <a:t>  Word Embeddings — Meaning in Space</a:t>
+            </a:r>
+          </a:p>
+        </p:txBody>
+      </p:sp>
+      <p:sp>
+        <p:nvSpPr>
+          <p:cNvPr id="10" name="TB10"/>
+          <p:cNvSpPr txBox="1">
+            <a:spLocks noGrp="1"/>
+          </p:cNvSpPr>
+          <p:nvPr/>
+        </p:nvSpPr>
+        <p:spPr>
+          <a:xfrm>
+            <a:off x="457200" y="950000"/>
+            <a:ext cx="11200000" cy="400000"/>
+          </a:xfrm>
+          <a:prstGeom prst="rect">
+            <a:avLst/>
+          </a:prstGeom>
+          <a:noFill/>
+        </p:spPr>
+        <p:txBody>
+          <a:bodyPr>
+            <a:normAutofit/>
+          </a:bodyPr>
+          <a:lstStyle/>
+          <a:p>
+            <a:pPr algn="l"/>
+            <a:r>
+              <a:rPr lang="en-US" sz="1400" b="0" dirty="0">
+                <a:solidFill>
+                  <a:srgbClr val="555555"/>
+                </a:solidFill>
+                <a:latin typeface="Calibri"/>
+              </a:rPr>
+              <a:t>Embeddings capture meaning — similar words have similar vectors</a:t>
+            </a:r>
+          </a:p>
+        </p:txBody>
+      </p:sp>
+      <p:sp>
+        <p:nvSpPr>
+          <p:cNvPr id="11" name="RC11"/>
+          <p:cNvSpPr txBox="1">
+            <a:spLocks noGrp="1"/>
+          </p:cNvSpPr>
+          <p:nvPr/>
+        </p:nvSpPr>
+        <p:spPr>
+          <a:xfrm>
+            <a:off x="457200" y="1450000"/>
+            <a:ext cx="2700000" cy="1800000"/>
+          </a:xfrm>
+          <a:prstGeom prst="roundRect">
+            <a:avLst>
+              <a:gd name="adj" fmla="val 16667"/>
+            </a:avLst>
+          </a:prstGeom>
+          <a:solidFill>
+            <a:srgbClr val="15616D"/>
+          </a:solidFill>
+          <a:ln>
+            <a:noFill/>
+          </a:ln>
+        </p:spPr>
+        <p:txBody>
+          <a:bodyPr anchor="ctr">
+            <a:normAutofit/>
+          </a:bodyPr>
+          <a:lstStyle/>
+          <a:p>
+            <a:pPr algn="ctr"/>
+            <a:r>
+              <a:rPr lang="en-US" sz="4000" b="1" dirty="0">
+                <a:solidFill>
+                  <a:srgbClr val="FFFFFF"/>
+                </a:solidFill>
+                <a:latin typeface="Trebuchet MS"/>
+              </a:rPr>
+              <a:t>Word2Vec</a:t>
+            </a:r>
+          </a:p>
+          <a:p>
+            <a:pPr algn="ctr"/>
+            <a:r>
+              <a:rPr lang="en-US" sz="1100" b="0" dirty="0">
+                <a:solidFill>
+                  <a:srgbClr val="C5CAB8"/>
+                </a:solidFill>
+                <a:latin typeface="Calibri"/>
+              </a:rPr>
+              <a:t>Predicts words from context (2013, Google)</a:t>
+            </a:r>
+          </a:p>
+        </p:txBody>
+      </p:sp>
+      <p:sp>
+        <p:nvSpPr>
+          <p:cNvPr id="12" name="RC12"/>
+          <p:cNvSpPr txBox="1">
+            <a:spLocks noGrp="1"/>
+          </p:cNvSpPr>
+          <p:nvPr/>
+        </p:nvSpPr>
+        <p:spPr>
+          <a:xfrm>
+            <a:off x="3350000" y="1450000"/>
+            <a:ext cx="2700000" cy="1800000"/>
+          </a:xfrm>
+          <a:prstGeom prst="roundRect">
+            <a:avLst>
+              <a:gd name="adj" fmla="val 16667"/>
+            </a:avLst>
+          </a:prstGeom>
+          <a:solidFill>
+            <a:srgbClr val="BC5308"/>
+          </a:solidFill>
+          <a:ln>
+            <a:noFill/>
+          </a:ln>
+        </p:spPr>
+        <p:txBody>
+          <a:bodyPr anchor="ctr">
+            <a:normAutofit/>
+          </a:bodyPr>
+          <a:lstStyle/>
+          <a:p>
+            <a:pPr algn="ctr"/>
+            <a:r>
+              <a:rPr lang="en-US" sz="4000" b="1" dirty="0">
+                <a:solidFill>
+                  <a:srgbClr val="FFFFFF"/>
+                </a:solidFill>
+                <a:latin typeface="Trebuchet MS"/>
+              </a:rPr>
+              <a:t>GloVe</a:t>
+            </a:r>
+          </a:p>
+          <a:p>
+            <a:pPr algn="ctr"/>
+            <a:r>
+              <a:rPr lang="en-US" sz="1100" b="0" dirty="0">
+                <a:solidFill>
+                  <a:srgbClr val="C5CAB8"/>
+                </a:solidFill>
+                <a:latin typeface="Calibri"/>
+              </a:rPr>
+              <a:t>Global word co-occurrence statistics</a:t>
+            </a:r>
+          </a:p>
+        </p:txBody>
+      </p:sp>
+      <p:sp>
+        <p:nvSpPr>
+          <p:cNvPr id="13" name="RC13"/>
+          <p:cNvSpPr txBox="1">
+            <a:spLocks noGrp="1"/>
+          </p:cNvSpPr>
+          <p:nvPr/>
+        </p:nvSpPr>
+        <p:spPr>
+          <a:xfrm>
+            <a:off x="6250000" y="1450000"/>
+            <a:ext cx="2700000" cy="1800000"/>
+          </a:xfrm>
+          <a:prstGeom prst="roundRect">
+            <a:avLst>
+              <a:gd name="adj" fmla="val 16667"/>
+            </a:avLst>
+          </a:prstGeom>
+          <a:solidFill>
+            <a:srgbClr val="FF7D00"/>
+          </a:solidFill>
+          <a:ln>
+            <a:noFill/>
+          </a:ln>
+        </p:spPr>
+        <p:txBody>
+          <a:bodyPr anchor="ctr">
+            <a:normAutofit/>
+          </a:bodyPr>
+          <a:lstStyle/>
+          <a:p>
+            <a:pPr algn="ctr"/>
+            <a:r>
+              <a:rPr lang="en-US" sz="4000" b="1" dirty="0">
+                <a:solidFill>
+                  <a:srgbClr val="001524"/>
+                </a:solidFill>
+                <a:latin typeface="Trebuchet MS"/>
+              </a:rPr>
+              <a:t>BERT</a:t>
+            </a:r>
+          </a:p>
+          <a:p>
+            <a:pPr algn="ctr"/>
+            <a:r>
+              <a:rPr lang="en-US" sz="1100" b="0" dirty="0">
+                <a:solidFill>
+                  <a:srgbClr val="001524"/>
+                </a:solidFill>
+                <a:latin typeface="Calibri"/>
+              </a:rPr>
+              <a:t>Bidirectional context (2018, Google)</a:t>
+            </a:r>
+          </a:p>
+        </p:txBody>
+      </p:sp>
+      <p:sp>
+        <p:nvSpPr>
+          <p:cNvPr id="14" name="RC14"/>
+          <p:cNvSpPr txBox="1">
+            <a:spLocks noGrp="1"/>
+          </p:cNvSpPr>
+          <p:nvPr/>
+        </p:nvSpPr>
+        <p:spPr>
+          <a:xfrm>
+            <a:off x="9150000" y="1450000"/>
+            <a:ext cx="2600000" cy="1800000"/>
+          </a:xfrm>
+          <a:prstGeom prst="roundRect">
+            <a:avLst>
+              <a:gd name="adj" fmla="val 16667"/>
+            </a:avLst>
+          </a:prstGeom>
+          <a:solidFill>
+            <a:srgbClr val="8AA79F"/>
+          </a:solidFill>
+          <a:ln>
+            <a:noFill/>
+          </a:ln>
+        </p:spPr>
+        <p:txBody>
+          <a:bodyPr anchor="ctr">
+            <a:normAutofit/>
+          </a:bodyPr>
+          <a:lstStyle/>
+          <a:p>
+            <a:pPr algn="ctr"/>
+            <a:r>
+              <a:rPr lang="en-US" sz="4000" b="1" dirty="0">
+                <a:solidFill>
+                  <a:srgbClr val="001524"/>
+                </a:solidFill>
+                <a:latin typeface="Trebuchet MS"/>
+              </a:rPr>
+              <a:t>Sentence Transformers</a:t>
+            </a:r>
+          </a:p>
+          <a:p>
+            <a:pPr algn="ctr"/>
+            <a:r>
+              <a:rPr lang="en-US" sz="1100" b="0" dirty="0">
+                <a:solidFill>
+                  <a:srgbClr val="001524"/>
+                </a:solidFill>
+                <a:latin typeface="Calibri"/>
+              </a:rPr>
+              <a:t>Semantic similarity for full sentences</a:t>
+            </a:r>
+          </a:p>
+        </p:txBody>
+      </p:sp>
+      <p:sp>
+        <p:nvSpPr>
+          <p:cNvPr id="20" name="CB20"/>
+          <p:cNvSpPr>
+            <a:spLocks noGrp="1"/>
+          </p:cNvSpPr>
+          <p:nvPr/>
+        </p:nvSpPr>
+        <p:spPr>
+          <a:xfrm>
+            <a:off x="457200" y="3450000"/>
+            <a:ext cx="5500000" cy="2700000"/>
+          </a:xfrm>
+          <a:prstGeom prst="rect">
+            <a:avLst/>
+          </a:prstGeom>
+          <a:solidFill>
+            <a:srgbClr val="F0F8F7"/>
+          </a:solidFill>
+          <a:ln>
+            <a:noFill/>
+          </a:ln>
         </p:spPr>
         <p:txBody>
           <a:bodyPr/>
           <a:lstStyle/>
           <a:p>
-            <a:r>
-              <a:rPr lang="en-US" dirty="0"/>
-              <a:t>Embeddings</a:t>
-            </a:r>
-          </a:p>
-        </p:txBody>
-      </p:sp>
-      <p:sp>
-        <p:nvSpPr>
-          <p:cNvPr id="3" name="Content Placeholder 2">
-            <a:extLst>
-              <a:ext uri="{FF2B5EF4-FFF2-40B4-BE49-F238E27FC236}">
-                <a16:creationId xmlns:a16="http://schemas.microsoft.com/office/drawing/2014/main" id="{1056E82A-7811-38FD-612E-B7A6A18BF840}"/>
-              </a:ext>
-            </a:extLst>
-          </p:cNvPr>
+            <a:endParaRPr lang="en-US"/>
+          </a:p>
+        </p:txBody>
+      </p:sp>
+      <p:sp>
+        <p:nvSpPr>
+          <p:cNvPr id="21" name="TB21"/>
+          <p:cNvSpPr txBox="1">
+            <a:spLocks noGrp="1"/>
+          </p:cNvSpPr>
+          <p:nvPr/>
+        </p:nvSpPr>
+        <p:spPr>
+          <a:xfrm>
+            <a:off x="600000" y="3550000"/>
+            <a:ext cx="5200000" cy="500000"/>
+          </a:xfrm>
+          <a:prstGeom prst="rect">
+            <a:avLst/>
+          </a:prstGeom>
+          <a:noFill/>
+        </p:spPr>
+        <p:txBody>
+          <a:bodyPr>
+            <a:normAutofit/>
+          </a:bodyPr>
+          <a:lstStyle/>
+          <a:p>
+            <a:pPr algn="l"/>
+            <a:r>
+              <a:rPr lang="en-US" sz="1600" b="1" dirty="0">
+                <a:solidFill>
+                  <a:srgbClr val="15616D"/>
+                </a:solidFill>
+                <a:latin typeface="Calibri"/>
+              </a:rPr>
+              <a:t>The Famous Word2Vec Analogy</a:t>
+            </a:r>
+          </a:p>
+        </p:txBody>
+      </p:sp>
+      <p:sp>
+        <p:nvSpPr>
+          <p:cNvPr id="22" name="BL22"/>
+          <p:cNvSpPr txBox="1">
+            <a:spLocks noGrp="1"/>
+          </p:cNvSpPr>
+          <p:nvPr/>
+        </p:nvSpPr>
+        <p:spPr>
+          <a:xfrm>
+            <a:off x="600000" y="4100000"/>
+            <a:ext cx="5200000" cy="1900000"/>
+          </a:xfrm>
+          <a:prstGeom prst="rect">
+            <a:avLst/>
+          </a:prstGeom>
+          <a:noFill/>
+        </p:spPr>
+        <p:txBody>
+          <a:bodyPr>
+            <a:normAutofit/>
+          </a:bodyPr>
+          <a:lstStyle/>
+          <a:p>
+            <a:pPr marL="342900" indent="-342900">
+              <a:lnSpc>
+                <a:spcPts val="3600"/>
+              </a:lnSpc>
+              <a:spcBef>
+                <a:spcPts val="200"/>
+              </a:spcBef>
+              <a:buNone/>
+            </a:pPr>
+            <a:r>
+              <a:rPr lang="en-US" sz="1600" b="1" dirty="0">
+                <a:solidFill>
+                  <a:srgbClr val="BC5308"/>
+                </a:solidFill>
+                <a:latin typeface="Calibri"/>
+              </a:rPr>
+              <a:t>king - man + woman = queen</a:t>
+            </a:r>
+          </a:p>
+          <a:p>
+            <a:pPr marL="342900" indent="-342900">
+              <a:lnSpc>
+                <a:spcPts val="3600"/>
+              </a:lnSpc>
+              <a:spcBef>
+                <a:spcPts val="200"/>
+              </a:spcBef>
+              <a:buChar char="■"/>
+            </a:pPr>
+            <a:r>
+              <a:rPr lang="en-US" sz="1300" b="0" dirty="0">
+                <a:solidFill>
+                  <a:srgbClr val="444444"/>
+                </a:solidFill>
+                <a:latin typeface="Calibri"/>
+              </a:rPr>
+              <a:t>paris - france + italy = rome</a:t>
+            </a:r>
+          </a:p>
+          <a:p>
+            <a:pPr marL="342900" indent="-342900">
+              <a:lnSpc>
+                <a:spcPts val="3600"/>
+              </a:lnSpc>
+              <a:spcBef>
+                <a:spcPts val="200"/>
+              </a:spcBef>
+              <a:buChar char="■"/>
+            </a:pPr>
+            <a:r>
+              <a:rPr lang="en-US" sz="1300" b="0" dirty="0">
+                <a:solidFill>
+                  <a:srgbClr val="444444"/>
+                </a:solidFill>
+                <a:latin typeface="Calibri"/>
+              </a:rPr>
+              <a:t>Words are placed in 100-300 dimensional vector space</a:t>
+            </a:r>
+          </a:p>
+          <a:p>
+            <a:pPr marL="342900" indent="-342900">
+              <a:lnSpc>
+                <a:spcPts val="3600"/>
+              </a:lnSpc>
+              <a:spcBef>
+                <a:spcPts val="200"/>
+              </a:spcBef>
+              <a:buChar char="■"/>
+            </a:pPr>
+            <a:r>
+              <a:rPr lang="en-US" sz="1300" b="0" dirty="0">
+                <a:solidFill>
+                  <a:srgbClr val="444444"/>
+                </a:solidFill>
+                <a:latin typeface="Calibri"/>
+              </a:rPr>
+              <a:t>Cosine similarity measures how 'close' two words are in meaning</a:t>
+            </a:r>
+          </a:p>
+        </p:txBody>
+      </p:sp>
+      <p:sp>
+        <p:nvSpPr>
+          <p:cNvPr id="23" name="CB23"/>
           <p:cNvSpPr>
             <a:spLocks noGrp="1"/>
           </p:cNvSpPr>
-          <p:nvPr>
-            <p:ph idx="1"/>
-          </p:nvPr>
-        </p:nvSpPr>
-        <p:spPr/>
+          <p:nvPr/>
+        </p:nvSpPr>
+        <p:spPr>
+          <a:xfrm>
+            <a:off x="6200000" y="3450000"/>
+            <a:ext cx="5550000" cy="2700000"/>
+          </a:xfrm>
+          <a:prstGeom prst="rect">
+            <a:avLst/>
+          </a:prstGeom>
+          <a:solidFill>
+            <a:srgbClr val="001524"/>
+          </a:solidFill>
+          <a:ln>
+            <a:noFill/>
+          </a:ln>
+        </p:spPr>
         <p:txBody>
           <a:bodyPr/>
           <a:lstStyle/>
           <a:p>
-            <a:endParaRPr lang="en-US" dirty="0"/>
+            <a:endParaRPr lang="en-US"/>
+          </a:p>
+        </p:txBody>
+      </p:sp>
+      <p:sp>
+        <p:nvSpPr>
+          <p:cNvPr id="24" name="TB24"/>
+          <p:cNvSpPr txBox="1">
+            <a:spLocks noGrp="1"/>
+          </p:cNvSpPr>
+          <p:nvPr/>
+        </p:nvSpPr>
+        <p:spPr>
+          <a:xfrm>
+            <a:off x="6400000" y="3550000"/>
+            <a:ext cx="5100000" cy="500000"/>
+          </a:xfrm>
+          <a:prstGeom prst="rect">
+            <a:avLst/>
+          </a:prstGeom>
+          <a:noFill/>
+        </p:spPr>
+        <p:txBody>
+          <a:bodyPr>
+            <a:normAutofit/>
+          </a:bodyPr>
+          <a:lstStyle/>
+          <a:p>
+            <a:pPr algn="l"/>
+            <a:r>
+              <a:rPr lang="en-US" sz="1600" b="1" dirty="0">
+                <a:solidFill>
+                  <a:srgbClr val="FF7D00"/>
+                </a:solidFill>
+                <a:latin typeface="Calibri"/>
+              </a:rPr>
+              <a:t>Real Applications in Kenya</a:t>
+            </a:r>
+          </a:p>
+        </p:txBody>
+      </p:sp>
+      <p:sp>
+        <p:nvSpPr>
+          <p:cNvPr id="25" name="BL25"/>
+          <p:cNvSpPr txBox="1">
+            <a:spLocks noGrp="1"/>
+          </p:cNvSpPr>
+          <p:nvPr/>
+        </p:nvSpPr>
+        <p:spPr>
+          <a:xfrm>
+            <a:off x="6400000" y="4100000"/>
+            <a:ext cx="5100000" cy="1900000"/>
+          </a:xfrm>
+          <a:prstGeom prst="rect">
+            <a:avLst/>
+          </a:prstGeom>
+          <a:noFill/>
+        </p:spPr>
+        <p:txBody>
+          <a:bodyPr>
+            <a:normAutofit/>
+          </a:bodyPr>
+          <a:lstStyle/>
+          <a:p>
+            <a:pPr marL="342900" indent="-342900">
+              <a:lnSpc>
+                <a:spcPts val="3600"/>
+              </a:lnSpc>
+              <a:spcBef>
+                <a:spcPts val="200"/>
+              </a:spcBef>
+              <a:buChar char="■"/>
+            </a:pPr>
+            <a:r>
+              <a:rPr lang="en-US" sz="1300" b="0" dirty="0">
+                <a:solidFill>
+                  <a:srgbClr val="C5CAB8"/>
+                </a:solidFill>
+                <a:latin typeface="Calibri"/>
+              </a:rPr>
+              <a:t>Swahili NLP: Embeddings for local language processing</a:t>
+            </a:r>
+          </a:p>
+          <a:p>
+            <a:pPr marL="342900" indent="-342900">
+              <a:lnSpc>
+                <a:spcPts val="3600"/>
+              </a:lnSpc>
+              <a:spcBef>
+                <a:spcPts val="200"/>
+              </a:spcBef>
+              <a:buChar char="■"/>
+            </a:pPr>
+            <a:r>
+              <a:rPr lang="en-US" sz="1300" b="0" dirty="0">
+                <a:solidFill>
+                  <a:srgbClr val="C5CAB8"/>
+                </a:solidFill>
+                <a:latin typeface="Calibri"/>
+              </a:rPr>
+              <a:t>Safaricom Zuri chatbot: sentence embeddings for customer queries</a:t>
+            </a:r>
+          </a:p>
+          <a:p>
+            <a:pPr marL="342900" indent="-342900">
+              <a:lnSpc>
+                <a:spcPts val="3600"/>
+              </a:lnSpc>
+              <a:spcBef>
+                <a:spcPts val="200"/>
+              </a:spcBef>
+              <a:buChar char="■"/>
+            </a:pPr>
+            <a:r>
+              <a:rPr lang="en-US" sz="1300" b="0" dirty="0">
+                <a:solidFill>
+                  <a:srgbClr val="C5CAB8"/>
+                </a:solidFill>
+                <a:latin typeface="Calibri"/>
+              </a:rPr>
+              <a:t>Legal tech: finding similar court cases from case descriptions</a:t>
+            </a:r>
+          </a:p>
+          <a:p>
+            <a:pPr marL="342900" indent="-342900">
+              <a:lnSpc>
+                <a:spcPts val="3600"/>
+              </a:lnSpc>
+              <a:spcBef>
+                <a:spcPts val="200"/>
+              </a:spcBef>
+              <a:buChar char="■"/>
+            </a:pPr>
+            <a:r>
+              <a:rPr lang="en-US" sz="1300" b="0" dirty="0">
+                <a:solidFill>
+                  <a:srgbClr val="C5CAB8"/>
+                </a:solidFill>
+                <a:latin typeface="Calibri"/>
+              </a:rPr>
+              <a:t>Agriculture: matching farmer queries to expert advice database</a:t>
+            </a:r>
+          </a:p>
+        </p:txBody>
+      </p:sp>
+      <p:sp>
+        <p:nvSpPr>
+          <p:cNvPr id="90" name="FooterBar"/>
+          <p:cNvSpPr>
+            <a:spLocks noGrp="1"/>
+          </p:cNvSpPr>
+          <p:nvPr/>
+        </p:nvSpPr>
+        <p:spPr>
+          <a:xfrm>
+            <a:off x="0" y="6400800"/>
+            <a:ext cx="12192000" cy="457200"/>
+          </a:xfrm>
+          <a:prstGeom prst="rect">
+            <a:avLst/>
+          </a:prstGeom>
+          <a:solidFill>
+            <a:srgbClr val="15616D"/>
+          </a:solidFill>
+          <a:ln>
+            <a:noFill/>
+          </a:ln>
+        </p:spPr>
+        <p:txBody>
+          <a:bodyPr/>
+          <a:lstStyle/>
+          <a:p>
+            <a:endParaRPr lang="en-US"/>
           </a:p>
         </p:txBody>
       </p:sp>
     </p:spTree>
-    <p:extLst>
-      <p:ext uri="{BB962C8B-B14F-4D97-AF65-F5344CB8AC3E}">
-        <p14:creationId xmlns:p14="http://schemas.microsoft.com/office/powerpoint/2010/main" val="4163109704"/>
-      </p:ext>
-    </p:extLst>
   </p:cSld>
   <p:clrMapOvr>
     <a:masterClrMapping/>
@@ -5502,13 +9096,7 @@
   <p:cSld>
     <p:spTree>
       <p:nvGrpSpPr>
-        <p:cNvPr id="1" name="">
-          <a:extLst>
-            <a:ext uri="{FF2B5EF4-FFF2-40B4-BE49-F238E27FC236}">
-              <a16:creationId xmlns:a16="http://schemas.microsoft.com/office/drawing/2014/main" id="{30ED283C-3B6A-9B83-92FA-32BEF0700DC3}"/>
-            </a:ext>
-          </a:extLst>
-        </p:cNvPr>
+        <p:cNvPr id="1" name=""/>
         <p:cNvGrpSpPr/>
         <p:nvPr/>
       </p:nvGrpSpPr>
@@ -5522,68 +9110,695 @@
       </p:grpSpPr>
       <p:sp>
         <p:nvSpPr>
-          <p:cNvPr id="2" name="Title 1">
-            <a:extLst>
-              <a:ext uri="{FF2B5EF4-FFF2-40B4-BE49-F238E27FC236}">
-                <a16:creationId xmlns:a16="http://schemas.microsoft.com/office/drawing/2014/main" id="{53959B92-B96F-9F21-BBFB-C36D258182B7}"/>
-              </a:ext>
-            </a:extLst>
-          </p:cNvPr>
+          <p:cNvPr id="91" name="HeaderBar"/>
           <p:cNvSpPr>
             <a:spLocks noGrp="1"/>
           </p:cNvSpPr>
-          <p:nvPr>
-            <p:ph type="title"/>
-          </p:nvPr>
-        </p:nvSpPr>
-        <p:spPr>
-          <a:xfrm>
-            <a:off x="993763" y="243472"/>
-            <a:ext cx="10058400" cy="817578"/>
-          </a:xfrm>
+          <p:nvPr/>
+        </p:nvSpPr>
+        <p:spPr>
+          <a:xfrm>
+            <a:off x="0" y="0"/>
+            <a:ext cx="12192000" cy="800000"/>
+          </a:xfrm>
+          <a:prstGeom prst="rect">
+            <a:avLst/>
+          </a:prstGeom>
+          <a:solidFill>
+            <a:srgbClr val="15616D"/>
+          </a:solidFill>
+          <a:ln>
+            <a:noFill/>
+          </a:ln>
+        </p:spPr>
+        <p:txBody>
+          <a:bodyPr anchor="ctr">
+            <a:normAutofit/>
+          </a:bodyPr>
+          <a:lstStyle/>
+          <a:p>
+            <a:pPr algn="l"/>
+            <a:r>
+              <a:rPr lang="en-US" sz="2400" b="1" dirty="0">
+                <a:solidFill>
+                  <a:srgbClr val="FFFFFF"/>
+                </a:solidFill>
+                <a:latin typeface="Trebuchet MS"/>
+              </a:rPr>
+              <a:t>  spaCy — Named Entity Recognition (NER)</a:t>
+            </a:r>
+          </a:p>
+        </p:txBody>
+      </p:sp>
+      <p:sp>
+        <p:nvSpPr>
+          <p:cNvPr id="10" name="CB10"/>
+          <p:cNvSpPr>
+            <a:spLocks noGrp="1"/>
+          </p:cNvSpPr>
+          <p:nvPr/>
+        </p:nvSpPr>
+        <p:spPr>
+          <a:xfrm>
+            <a:off x="457200" y="950000"/>
+            <a:ext cx="5600000" cy="4500000"/>
+          </a:xfrm>
+          <a:prstGeom prst="rect">
+            <a:avLst/>
+          </a:prstGeom>
+          <a:solidFill>
+            <a:srgbClr val="001524"/>
+          </a:solidFill>
+          <a:ln>
+            <a:noFill/>
+          </a:ln>
         </p:spPr>
         <p:txBody>
           <a:bodyPr/>
           <a:lstStyle/>
           <a:p>
-            <a:r>
-              <a:rPr lang="en-US" dirty="0"/>
-              <a:t>Spacy</a:t>
-            </a:r>
-          </a:p>
-        </p:txBody>
-      </p:sp>
-      <p:sp>
-        <p:nvSpPr>
-          <p:cNvPr id="3" name="Content Placeholder 2">
-            <a:extLst>
-              <a:ext uri="{FF2B5EF4-FFF2-40B4-BE49-F238E27FC236}">
-                <a16:creationId xmlns:a16="http://schemas.microsoft.com/office/drawing/2014/main" id="{13C3C55D-E0AE-01D9-CD3A-D77C118E1A7E}"/>
-              </a:ext>
-            </a:extLst>
-          </p:cNvPr>
+            <a:endParaRPr lang="en-US"/>
+          </a:p>
+        </p:txBody>
+      </p:sp>
+      <p:sp>
+        <p:nvSpPr>
+          <p:cNvPr id="11" name="TB11"/>
+          <p:cNvSpPr txBox="1">
+            <a:spLocks noGrp="1"/>
+          </p:cNvSpPr>
+          <p:nvPr/>
+        </p:nvSpPr>
+        <p:spPr>
+          <a:xfrm>
+            <a:off x="600000" y="1000000"/>
+            <a:ext cx="5200000" cy="500000"/>
+          </a:xfrm>
+          <a:prstGeom prst="rect">
+            <a:avLst/>
+          </a:prstGeom>
+          <a:noFill/>
+        </p:spPr>
+        <p:txBody>
+          <a:bodyPr>
+            <a:normAutofit/>
+          </a:bodyPr>
+          <a:lstStyle/>
+          <a:p>
+            <a:pPr algn="l"/>
+            <a:r>
+              <a:rPr lang="en-US" sz="1800" b="1" dirty="0">
+                <a:solidFill>
+                  <a:srgbClr val="FF7D00"/>
+                </a:solidFill>
+                <a:latin typeface="Trebuchet MS"/>
+              </a:rPr>
+              <a:t>What spaCy Can Extract</a:t>
+            </a:r>
+          </a:p>
+        </p:txBody>
+      </p:sp>
+      <p:sp>
+        <p:nvSpPr>
+          <p:cNvPr id="12" name="BL12"/>
+          <p:cNvSpPr txBox="1">
+            <a:spLocks noGrp="1"/>
+          </p:cNvSpPr>
+          <p:nvPr/>
+        </p:nvSpPr>
+        <p:spPr>
+          <a:xfrm>
+            <a:off x="600000" y="1600000"/>
+            <a:ext cx="5200000" cy="3700000"/>
+          </a:xfrm>
+          <a:prstGeom prst="rect">
+            <a:avLst/>
+          </a:prstGeom>
+          <a:noFill/>
+        </p:spPr>
+        <p:txBody>
+          <a:bodyPr>
+            <a:normAutofit/>
+          </a:bodyPr>
+          <a:lstStyle/>
+          <a:p>
+            <a:pPr marL="342900" indent="-342900">
+              <a:lnSpc>
+                <a:spcPts val="3600"/>
+              </a:lnSpc>
+              <a:spcBef>
+                <a:spcPts val="200"/>
+              </a:spcBef>
+              <a:buChar char="■"/>
+            </a:pPr>
+            <a:r>
+              <a:rPr lang="en-US" sz="1300" b="0" dirty="0">
+                <a:solidFill>
+                  <a:srgbClr val="C5CAB8"/>
+                </a:solidFill>
+                <a:latin typeface="Calibri"/>
+              </a:rPr>
+              <a:t>PERSON — names of people (e.g. 'Peter Ndegwa', 'Uhuru Kenyatta')</a:t>
+            </a:r>
+          </a:p>
+          <a:p>
+            <a:pPr marL="342900" indent="-342900">
+              <a:lnSpc>
+                <a:spcPts val="3600"/>
+              </a:lnSpc>
+              <a:spcBef>
+                <a:spcPts val="200"/>
+              </a:spcBef>
+              <a:buChar char="■"/>
+            </a:pPr>
+            <a:r>
+              <a:rPr lang="en-US" sz="1300" b="0" dirty="0">
+                <a:solidFill>
+                  <a:srgbClr val="C5CAB8"/>
+                </a:solidFill>
+                <a:latin typeface="Calibri"/>
+              </a:rPr>
+              <a:t>ORG — organizations (e.g. 'Safaricom', 'Nairobi Securities Exchange')</a:t>
+            </a:r>
+          </a:p>
+          <a:p>
+            <a:pPr marL="342900" indent="-342900">
+              <a:lnSpc>
+                <a:spcPts val="3600"/>
+              </a:lnSpc>
+              <a:spcBef>
+                <a:spcPts val="200"/>
+              </a:spcBef>
+              <a:buChar char="■"/>
+            </a:pPr>
+            <a:r>
+              <a:rPr lang="en-US" sz="1300" b="0" dirty="0">
+                <a:solidFill>
+                  <a:srgbClr val="C5CAB8"/>
+                </a:solidFill>
+                <a:latin typeface="Calibri"/>
+              </a:rPr>
+              <a:t>GPE — geopolitical entities (e.g. 'Kenya', 'Nairobi', 'Mombasa')</a:t>
+            </a:r>
+          </a:p>
+          <a:p>
+            <a:pPr marL="342900" indent="-342900">
+              <a:lnSpc>
+                <a:spcPts val="3600"/>
+              </a:lnSpc>
+              <a:spcBef>
+                <a:spcPts val="200"/>
+              </a:spcBef>
+              <a:buChar char="■"/>
+            </a:pPr>
+            <a:r>
+              <a:rPr lang="en-US" sz="1300" b="0" dirty="0">
+                <a:solidFill>
+                  <a:srgbClr val="C5CAB8"/>
+                </a:solidFill>
+                <a:latin typeface="Calibri"/>
+              </a:rPr>
+              <a:t>DATE — dates and time expressions</a:t>
+            </a:r>
+          </a:p>
+          <a:p>
+            <a:pPr marL="342900" indent="-342900">
+              <a:lnSpc>
+                <a:spcPts val="3600"/>
+              </a:lnSpc>
+              <a:spcBef>
+                <a:spcPts val="200"/>
+              </a:spcBef>
+              <a:buChar char="■"/>
+            </a:pPr>
+            <a:r>
+              <a:rPr lang="en-US" sz="1300" b="0" dirty="0">
+                <a:solidFill>
+                  <a:srgbClr val="C5CAB8"/>
+                </a:solidFill>
+                <a:latin typeface="Calibri"/>
+              </a:rPr>
+              <a:t>MONEY — monetary values and currencies</a:t>
+            </a:r>
+          </a:p>
+          <a:p>
+            <a:pPr marL="342900" indent="-342900">
+              <a:lnSpc>
+                <a:spcPts val="3600"/>
+              </a:lnSpc>
+              <a:spcBef>
+                <a:spcPts val="200"/>
+              </a:spcBef>
+              <a:buNone/>
+            </a:pPr>
+            <a:endParaRPr lang="en-US" sz="1300" b="0" dirty="0">
+              <a:solidFill>
+                <a:srgbClr val="C5CAB8"/>
+              </a:solidFill>
+              <a:latin typeface="Calibri"/>
+            </a:endParaRPr>
+          </a:p>
+          <a:p>
+            <a:pPr marL="342900" indent="-342900">
+              <a:lnSpc>
+                <a:spcPts val="3600"/>
+              </a:lnSpc>
+              <a:spcBef>
+                <a:spcPts val="200"/>
+              </a:spcBef>
+              <a:buNone/>
+            </a:pPr>
+            <a:r>
+              <a:rPr lang="en-US" sz="1400" b="1" dirty="0">
+                <a:solidFill>
+                  <a:srgbClr val="8AA79F"/>
+                </a:solidFill>
+                <a:latin typeface="Trebuchet MS"/>
+              </a:rPr>
+              <a:t>Quick Start Code</a:t>
+            </a:r>
+          </a:p>
+          <a:p>
+            <a:pPr marL="342900" indent="-342900">
+              <a:lnSpc>
+                <a:spcPts val="3600"/>
+              </a:lnSpc>
+              <a:spcBef>
+                <a:spcPts val="200"/>
+              </a:spcBef>
+              <a:buNone/>
+            </a:pPr>
+            <a:r>
+              <a:rPr lang="en-US" sz="1200" b="0" dirty="0">
+                <a:solidFill>
+                  <a:srgbClr val="C5CAB8"/>
+                </a:solidFill>
+                <a:latin typeface="Calibri"/>
+              </a:rPr>
+              <a:t>import spacy</a:t>
+            </a:r>
+          </a:p>
+          <a:p>
+            <a:pPr marL="342900" indent="-342900">
+              <a:lnSpc>
+                <a:spcPts val="3600"/>
+              </a:lnSpc>
+              <a:spcBef>
+                <a:spcPts val="200"/>
+              </a:spcBef>
+              <a:buNone/>
+            </a:pPr>
+            <a:r>
+              <a:rPr lang="en-US" sz="1200" b="0" dirty="0">
+                <a:solidFill>
+                  <a:srgbClr val="C5CAB8"/>
+                </a:solidFill>
+                <a:latin typeface="Calibri"/>
+              </a:rPr>
+              <a:t>nlp = spacy.load('en_core_web_sm')</a:t>
+            </a:r>
+          </a:p>
+          <a:p>
+            <a:pPr marL="342900" indent="-342900">
+              <a:lnSpc>
+                <a:spcPts val="3600"/>
+              </a:lnSpc>
+              <a:spcBef>
+                <a:spcPts val="200"/>
+              </a:spcBef>
+              <a:buNone/>
+            </a:pPr>
+            <a:r>
+              <a:rPr lang="en-US" sz="1200" b="0" dirty="0">
+                <a:solidFill>
+                  <a:srgbClr val="C5CAB8"/>
+                </a:solidFill>
+                <a:latin typeface="Calibri"/>
+              </a:rPr>
+              <a:t>doc = nlp('Safaricom partnered with AWS in Nairobi, Kenya')</a:t>
+            </a:r>
+          </a:p>
+          <a:p>
+            <a:pPr marL="342900" indent="-342900">
+              <a:lnSpc>
+                <a:spcPts val="3600"/>
+              </a:lnSpc>
+              <a:spcBef>
+                <a:spcPts val="200"/>
+              </a:spcBef>
+              <a:buNone/>
+            </a:pPr>
+            <a:r>
+              <a:rPr lang="en-US" sz="1200" b="0" dirty="0">
+                <a:solidFill>
+                  <a:srgbClr val="C5CAB8"/>
+                </a:solidFill>
+                <a:latin typeface="Calibri"/>
+              </a:rPr>
+              <a:t>for ent in doc.ents: print(ent.text, ent.label_)</a:t>
+            </a:r>
+          </a:p>
+        </p:txBody>
+      </p:sp>
+      <p:sp>
+        <p:nvSpPr>
+          <p:cNvPr id="20" name="CB20"/>
           <p:cNvSpPr>
             <a:spLocks noGrp="1"/>
           </p:cNvSpPr>
-          <p:nvPr>
-            <p:ph idx="1"/>
-          </p:nvPr>
-        </p:nvSpPr>
-        <p:spPr/>
+          <p:nvPr/>
+        </p:nvSpPr>
+        <p:spPr>
+          <a:xfrm>
+            <a:off x="6300000" y="950000"/>
+            <a:ext cx="5450000" cy="4500000"/>
+          </a:xfrm>
+          <a:prstGeom prst="rect">
+            <a:avLst/>
+          </a:prstGeom>
+          <a:solidFill>
+            <a:srgbClr val="F5F5F5"/>
+          </a:solidFill>
+          <a:ln>
+            <a:noFill/>
+          </a:ln>
+        </p:spPr>
         <p:txBody>
           <a:bodyPr/>
           <a:lstStyle/>
           <a:p>
-            <a:endParaRPr lang="en-US" dirty="0"/>
+            <a:endParaRPr lang="en-US"/>
+          </a:p>
+        </p:txBody>
+      </p:sp>
+      <p:sp>
+        <p:nvSpPr>
+          <p:cNvPr id="21" name="TB21"/>
+          <p:cNvSpPr txBox="1">
+            <a:spLocks noGrp="1"/>
+          </p:cNvSpPr>
+          <p:nvPr/>
+        </p:nvSpPr>
+        <p:spPr>
+          <a:xfrm>
+            <a:off x="6500000" y="1000000"/>
+            <a:ext cx="5100000" cy="500000"/>
+          </a:xfrm>
+          <a:prstGeom prst="rect">
+            <a:avLst/>
+          </a:prstGeom>
+          <a:noFill/>
+        </p:spPr>
+        <p:txBody>
+          <a:bodyPr>
+            <a:normAutofit/>
+          </a:bodyPr>
+          <a:lstStyle/>
+          <a:p>
+            <a:pPr algn="l"/>
+            <a:r>
+              <a:rPr lang="en-US" sz="1800" b="1" dirty="0">
+                <a:solidFill>
+                  <a:srgbClr val="15616D"/>
+                </a:solidFill>
+                <a:latin typeface="Trebuchet MS"/>
+              </a:rPr>
+              <a:t>NER Use Cases in East Africa</a:t>
+            </a:r>
+          </a:p>
+        </p:txBody>
+      </p:sp>
+      <p:sp>
+        <p:nvSpPr>
+          <p:cNvPr id="22" name="BL22"/>
+          <p:cNvSpPr txBox="1">
+            <a:spLocks noGrp="1"/>
+          </p:cNvSpPr>
+          <p:nvPr/>
+        </p:nvSpPr>
+        <p:spPr>
+          <a:xfrm>
+            <a:off x="6500000" y="1600000"/>
+            <a:ext cx="5100000" cy="3700000"/>
+          </a:xfrm>
+          <a:prstGeom prst="rect">
+            <a:avLst/>
+          </a:prstGeom>
+          <a:noFill/>
+        </p:spPr>
+        <p:txBody>
+          <a:bodyPr>
+            <a:normAutofit/>
+          </a:bodyPr>
+          <a:lstStyle/>
+          <a:p>
+            <a:pPr marL="342900" indent="-342900">
+              <a:lnSpc>
+                <a:spcPts val="3600"/>
+              </a:lnSpc>
+              <a:spcBef>
+                <a:spcPts val="200"/>
+              </a:spcBef>
+              <a:buNone/>
+            </a:pPr>
+            <a:r>
+              <a:rPr lang="en-US" sz="1400" b="1" dirty="0">
+                <a:solidFill>
+                  <a:srgbClr val="BC5308"/>
+                </a:solidFill>
+                <a:latin typeface="Trebuchet MS"/>
+              </a:rPr>
+              <a:t>News Monitoring</a:t>
+            </a:r>
+          </a:p>
+          <a:p>
+            <a:pPr marL="342900" indent="-342900">
+              <a:lnSpc>
+                <a:spcPts val="3600"/>
+              </a:lnSpc>
+              <a:spcBef>
+                <a:spcPts val="200"/>
+              </a:spcBef>
+              <a:buChar char="■"/>
+            </a:pPr>
+            <a:r>
+              <a:rPr lang="en-US" sz="1200" b="0" dirty="0">
+                <a:solidFill>
+                  <a:srgbClr val="444444"/>
+                </a:solidFill>
+                <a:latin typeface="Calibri"/>
+              </a:rPr>
+              <a:t>Track mentions of companies, politicians, locations in Kenyan news</a:t>
+            </a:r>
+          </a:p>
+          <a:p>
+            <a:pPr marL="342900" indent="-342900">
+              <a:lnSpc>
+                <a:spcPts val="3600"/>
+              </a:lnSpc>
+              <a:spcBef>
+                <a:spcPts val="200"/>
+              </a:spcBef>
+              <a:buChar char="■"/>
+            </a:pPr>
+            <a:r>
+              <a:rPr lang="en-US" sz="1200" b="0" dirty="0">
+                <a:solidFill>
+                  <a:srgbClr val="444444"/>
+                </a:solidFill>
+                <a:latin typeface="Calibri"/>
+              </a:rPr>
+              <a:t>Alert investors when their portfolio companies are mentioned</a:t>
+            </a:r>
+          </a:p>
+          <a:p>
+            <a:pPr marL="342900" indent="-342900">
+              <a:lnSpc>
+                <a:spcPts val="3600"/>
+              </a:lnSpc>
+              <a:spcBef>
+                <a:spcPts val="200"/>
+              </a:spcBef>
+              <a:buNone/>
+            </a:pPr>
+            <a:endParaRPr lang="en-US" sz="1200" b="0" dirty="0">
+              <a:solidFill>
+                <a:srgbClr val="444444"/>
+              </a:solidFill>
+              <a:latin typeface="Calibri"/>
+            </a:endParaRPr>
+          </a:p>
+          <a:p>
+            <a:pPr marL="342900" indent="-342900">
+              <a:lnSpc>
+                <a:spcPts val="3600"/>
+              </a:lnSpc>
+              <a:spcBef>
+                <a:spcPts val="200"/>
+              </a:spcBef>
+              <a:buNone/>
+            </a:pPr>
+            <a:r>
+              <a:rPr lang="en-US" sz="1400" b="1" dirty="0">
+                <a:solidFill>
+                  <a:srgbClr val="15616D"/>
+                </a:solidFill>
+                <a:latin typeface="Trebuchet MS"/>
+              </a:rPr>
+              <a:t>Financial Compliance</a:t>
+            </a:r>
+          </a:p>
+          <a:p>
+            <a:pPr marL="342900" indent="-342900">
+              <a:lnSpc>
+                <a:spcPts val="3600"/>
+              </a:lnSpc>
+              <a:spcBef>
+                <a:spcPts val="200"/>
+              </a:spcBef>
+              <a:buChar char="■"/>
+            </a:pPr>
+            <a:r>
+              <a:rPr lang="en-US" sz="1200" b="0" dirty="0">
+                <a:solidFill>
+                  <a:srgbClr val="444444"/>
+                </a:solidFill>
+                <a:latin typeface="Calibri"/>
+              </a:rPr>
+              <a:t>Extract party names from contracts and financial documents</a:t>
+            </a:r>
+          </a:p>
+          <a:p>
+            <a:pPr marL="342900" indent="-342900">
+              <a:lnSpc>
+                <a:spcPts val="3600"/>
+              </a:lnSpc>
+              <a:spcBef>
+                <a:spcPts val="200"/>
+              </a:spcBef>
+              <a:buChar char="■"/>
+            </a:pPr>
+            <a:r>
+              <a:rPr lang="en-US" sz="1200" b="0" dirty="0">
+                <a:solidFill>
+                  <a:srgbClr val="444444"/>
+                </a:solidFill>
+                <a:latin typeface="Calibri"/>
+              </a:rPr>
+              <a:t>Automated KYC — identify names and organizations in forms</a:t>
+            </a:r>
+          </a:p>
+          <a:p>
+            <a:pPr marL="342900" indent="-342900">
+              <a:lnSpc>
+                <a:spcPts val="3600"/>
+              </a:lnSpc>
+              <a:spcBef>
+                <a:spcPts val="200"/>
+              </a:spcBef>
+              <a:buNone/>
+            </a:pPr>
+            <a:endParaRPr lang="en-US" sz="1200" b="0" dirty="0">
+              <a:solidFill>
+                <a:srgbClr val="444444"/>
+              </a:solidFill>
+              <a:latin typeface="Calibri"/>
+            </a:endParaRPr>
+          </a:p>
+          <a:p>
+            <a:pPr marL="342900" indent="-342900">
+              <a:lnSpc>
+                <a:spcPts val="3600"/>
+              </a:lnSpc>
+              <a:spcBef>
+                <a:spcPts val="200"/>
+              </a:spcBef>
+              <a:buNone/>
+            </a:pPr>
+            <a:r>
+              <a:rPr lang="en-US" sz="1400" b="1" dirty="0">
+                <a:solidFill>
+                  <a:srgbClr val="8AA79F"/>
+                </a:solidFill>
+                <a:latin typeface="Trebuchet MS"/>
+              </a:rPr>
+              <a:t>Healthcare</a:t>
+            </a:r>
+          </a:p>
+          <a:p>
+            <a:pPr marL="342900" indent="-342900">
+              <a:lnSpc>
+                <a:spcPts val="3600"/>
+              </a:lnSpc>
+              <a:spcBef>
+                <a:spcPts val="200"/>
+              </a:spcBef>
+              <a:buChar char="■"/>
+            </a:pPr>
+            <a:r>
+              <a:rPr lang="en-US" sz="1200" b="0" dirty="0">
+                <a:solidFill>
+                  <a:srgbClr val="444444"/>
+                </a:solidFill>
+                <a:latin typeface="Calibri"/>
+              </a:rPr>
+              <a:t>Extract drug names, symptoms, diagnoses from patient notes</a:t>
+            </a:r>
+          </a:p>
+          <a:p>
+            <a:pPr marL="342900" indent="-342900">
+              <a:lnSpc>
+                <a:spcPts val="3600"/>
+              </a:lnSpc>
+              <a:spcBef>
+                <a:spcPts val="200"/>
+              </a:spcBef>
+              <a:buChar char="■"/>
+            </a:pPr>
+            <a:r>
+              <a:rPr lang="en-US" sz="1200" b="0" dirty="0">
+                <a:solidFill>
+                  <a:srgbClr val="444444"/>
+                </a:solidFill>
+                <a:latin typeface="Calibri"/>
+              </a:rPr>
+              <a:t>Digitize handwritten medical records at scale</a:t>
+            </a:r>
+          </a:p>
+        </p:txBody>
+      </p:sp>
+      <p:sp>
+        <p:nvSpPr>
+          <p:cNvPr id="90" name="FooterBar"/>
+          <p:cNvSpPr>
+            <a:spLocks noGrp="1"/>
+          </p:cNvSpPr>
+          <p:nvPr/>
+        </p:nvSpPr>
+        <p:spPr>
+          <a:xfrm>
+            <a:off x="0" y="6400800"/>
+            <a:ext cx="12192000" cy="457200"/>
+          </a:xfrm>
+          <a:prstGeom prst="rect">
+            <a:avLst/>
+          </a:prstGeom>
+          <a:solidFill>
+            <a:srgbClr val="15616D"/>
+          </a:solidFill>
+          <a:ln>
+            <a:noFill/>
+          </a:ln>
+        </p:spPr>
+        <p:txBody>
+          <a:bodyPr/>
+          <a:lstStyle/>
+          <a:p>
+            <a:endParaRPr lang="en-US"/>
           </a:p>
         </p:txBody>
       </p:sp>
     </p:spTree>
-    <p:extLst>
-      <p:ext uri="{BB962C8B-B14F-4D97-AF65-F5344CB8AC3E}">
-        <p14:creationId xmlns:p14="http://schemas.microsoft.com/office/powerpoint/2010/main" val="1087375305"/>
-      </p:ext>
-    </p:extLst>
   </p:cSld>
   <p:clrMapOvr>
     <a:masterClrMapping/>
@@ -5610,66 +9825,682 @@
       </p:grpSpPr>
       <p:sp>
         <p:nvSpPr>
-          <p:cNvPr id="2" name="Title 1">
-            <a:extLst>
-              <a:ext uri="{FF2B5EF4-FFF2-40B4-BE49-F238E27FC236}">
-                <a16:creationId xmlns:a16="http://schemas.microsoft.com/office/drawing/2014/main" id="{9303901D-6EC8-F249-ACF3-CCB1A934FB72}"/>
-              </a:ext>
-            </a:extLst>
-          </p:cNvPr>
+          <p:cNvPr id="91" name="HeaderBar"/>
           <p:cNvSpPr>
             <a:spLocks noGrp="1"/>
           </p:cNvSpPr>
-          <p:nvPr>
-            <p:ph type="title"/>
-          </p:nvPr>
-        </p:nvSpPr>
-        <p:spPr/>
+          <p:nvPr/>
+        </p:nvSpPr>
+        <p:spPr>
+          <a:xfrm>
+            <a:off x="0" y="0"/>
+            <a:ext cx="12192000" cy="800000"/>
+          </a:xfrm>
+          <a:prstGeom prst="rect">
+            <a:avLst/>
+          </a:prstGeom>
+          <a:solidFill>
+            <a:srgbClr val="15616D"/>
+          </a:solidFill>
+          <a:ln>
+            <a:noFill/>
+          </a:ln>
+        </p:spPr>
+        <p:txBody>
+          <a:bodyPr anchor="ctr">
+            <a:normAutofit/>
+          </a:bodyPr>
+          <a:lstStyle/>
+          <a:p>
+            <a:pPr algn="l"/>
+            <a:r>
+              <a:rPr lang="en-US" sz="2400" b="1" dirty="0">
+                <a:solidFill>
+                  <a:srgbClr val="FFFFFF"/>
+                </a:solidFill>
+                <a:latin typeface="Trebuchet MS"/>
+              </a:rPr>
+              <a:t>  AutoML — Machine Learning on Autopilot</a:t>
+            </a:r>
+          </a:p>
+        </p:txBody>
+      </p:sp>
+      <p:sp>
+        <p:nvSpPr>
+          <p:cNvPr id="10" name="TB10"/>
+          <p:cNvSpPr txBox="1">
+            <a:spLocks noGrp="1"/>
+          </p:cNvSpPr>
+          <p:nvPr/>
+        </p:nvSpPr>
+        <p:spPr>
+          <a:xfrm>
+            <a:off x="457200" y="950000"/>
+            <a:ext cx="11200000" cy="400000"/>
+          </a:xfrm>
+          <a:prstGeom prst="rect">
+            <a:avLst/>
+          </a:prstGeom>
+          <a:noFill/>
+        </p:spPr>
+        <p:txBody>
+          <a:bodyPr>
+            <a:normAutofit/>
+          </a:bodyPr>
+          <a:lstStyle/>
+          <a:p>
+            <a:pPr algn="l"/>
+            <a:r>
+              <a:rPr lang="en-US" sz="1400" b="0" dirty="0">
+                <a:solidFill>
+                  <a:srgbClr val="555555"/>
+                </a:solidFill>
+                <a:latin typeface="Calibri"/>
+              </a:rPr>
+              <a:t>AutoML automates model selection, hyperparameter tuning, and pipeline building</a:t>
+            </a:r>
+          </a:p>
+        </p:txBody>
+      </p:sp>
+      <p:sp>
+        <p:nvSpPr>
+          <p:cNvPr id="11" name="RC11"/>
+          <p:cNvSpPr txBox="1">
+            <a:spLocks noGrp="1"/>
+          </p:cNvSpPr>
+          <p:nvPr/>
+        </p:nvSpPr>
+        <p:spPr>
+          <a:xfrm>
+            <a:off x="457200" y="1450000"/>
+            <a:ext cx="2700000" cy="1800000"/>
+          </a:xfrm>
+          <a:prstGeom prst="roundRect">
+            <a:avLst>
+              <a:gd name="adj" fmla="val 16667"/>
+            </a:avLst>
+          </a:prstGeom>
+          <a:solidFill>
+            <a:srgbClr val="15616D"/>
+          </a:solidFill>
+          <a:ln>
+            <a:noFill/>
+          </a:ln>
+        </p:spPr>
+        <p:txBody>
+          <a:bodyPr anchor="ctr">
+            <a:normAutofit/>
+          </a:bodyPr>
+          <a:lstStyle/>
+          <a:p>
+            <a:pPr algn="ctr"/>
+            <a:r>
+              <a:rPr lang="en-US" sz="4000" b="1" dirty="0">
+                <a:solidFill>
+                  <a:srgbClr val="FFFFFF"/>
+                </a:solidFill>
+                <a:latin typeface="Trebuchet MS"/>
+              </a:rPr>
+              <a:t>H2O AutoML</a:t>
+            </a:r>
+          </a:p>
+          <a:p>
+            <a:pPr algn="ctr"/>
+            <a:r>
+              <a:rPr lang="en-US" sz="1100" b="0" dirty="0">
+                <a:solidFill>
+                  <a:srgbClr val="C5CAB8"/>
+                </a:solidFill>
+                <a:latin typeface="Calibri"/>
+              </a:rPr>
+              <a:t>Open-source, production-grade, runs locally</a:t>
+            </a:r>
+          </a:p>
+        </p:txBody>
+      </p:sp>
+      <p:sp>
+        <p:nvSpPr>
+          <p:cNvPr id="12" name="RC12"/>
+          <p:cNvSpPr txBox="1">
+            <a:spLocks noGrp="1"/>
+          </p:cNvSpPr>
+          <p:nvPr/>
+        </p:nvSpPr>
+        <p:spPr>
+          <a:xfrm>
+            <a:off x="3350000" y="1450000"/>
+            <a:ext cx="2700000" cy="1800000"/>
+          </a:xfrm>
+          <a:prstGeom prst="roundRect">
+            <a:avLst>
+              <a:gd name="adj" fmla="val 16667"/>
+            </a:avLst>
+          </a:prstGeom>
+          <a:solidFill>
+            <a:srgbClr val="BC5308"/>
+          </a:solidFill>
+          <a:ln>
+            <a:noFill/>
+          </a:ln>
+        </p:spPr>
+        <p:txBody>
+          <a:bodyPr anchor="ctr">
+            <a:normAutofit/>
+          </a:bodyPr>
+          <a:lstStyle/>
+          <a:p>
+            <a:pPr algn="ctr"/>
+            <a:r>
+              <a:rPr lang="en-US" sz="4000" b="1" dirty="0">
+                <a:solidFill>
+                  <a:srgbClr val="FFFFFF"/>
+                </a:solidFill>
+                <a:latin typeface="Trebuchet MS"/>
+              </a:rPr>
+              <a:t>Google AutoML</a:t>
+            </a:r>
+          </a:p>
+          <a:p>
+            <a:pPr algn="ctr"/>
+            <a:r>
+              <a:rPr lang="en-US" sz="1100" b="0" dirty="0">
+                <a:solidFill>
+                  <a:srgbClr val="C5CAB8"/>
+                </a:solidFill>
+                <a:latin typeface="Calibri"/>
+              </a:rPr>
+              <a:t>Cloud-based, GUI interface, enterprise</a:t>
+            </a:r>
+          </a:p>
+        </p:txBody>
+      </p:sp>
+      <p:sp>
+        <p:nvSpPr>
+          <p:cNvPr id="13" name="RC13"/>
+          <p:cNvSpPr txBox="1">
+            <a:spLocks noGrp="1"/>
+          </p:cNvSpPr>
+          <p:nvPr/>
+        </p:nvSpPr>
+        <p:spPr>
+          <a:xfrm>
+            <a:off x="6250000" y="1450000"/>
+            <a:ext cx="2700000" cy="1800000"/>
+          </a:xfrm>
+          <a:prstGeom prst="roundRect">
+            <a:avLst>
+              <a:gd name="adj" fmla="val 16667"/>
+            </a:avLst>
+          </a:prstGeom>
+          <a:solidFill>
+            <a:srgbClr val="FF7D00"/>
+          </a:solidFill>
+          <a:ln>
+            <a:noFill/>
+          </a:ln>
+        </p:spPr>
+        <p:txBody>
+          <a:bodyPr anchor="ctr">
+            <a:normAutofit/>
+          </a:bodyPr>
+          <a:lstStyle/>
+          <a:p>
+            <a:pPr algn="ctr"/>
+            <a:r>
+              <a:rPr lang="en-US" sz="4000" b="1" dirty="0">
+                <a:solidFill>
+                  <a:srgbClr val="001524"/>
+                </a:solidFill>
+                <a:latin typeface="Trebuchet MS"/>
+              </a:rPr>
+              <a:t>AutoSklearn</a:t>
+            </a:r>
+          </a:p>
+          <a:p>
+            <a:pPr algn="ctr"/>
+            <a:r>
+              <a:rPr lang="en-US" sz="1100" b="0" dirty="0">
+                <a:solidFill>
+                  <a:srgbClr val="001524"/>
+                </a:solidFill>
+                <a:latin typeface="Calibri"/>
+              </a:rPr>
+              <a:t>scikit-learn wrapper with Bayesian optimization</a:t>
+            </a:r>
+          </a:p>
+        </p:txBody>
+      </p:sp>
+      <p:sp>
+        <p:nvSpPr>
+          <p:cNvPr id="14" name="RC14"/>
+          <p:cNvSpPr txBox="1">
+            <a:spLocks noGrp="1"/>
+          </p:cNvSpPr>
+          <p:nvPr/>
+        </p:nvSpPr>
+        <p:spPr>
+          <a:xfrm>
+            <a:off x="9150000" y="1450000"/>
+            <a:ext cx="2600000" cy="1800000"/>
+          </a:xfrm>
+          <a:prstGeom prst="roundRect">
+            <a:avLst>
+              <a:gd name="adj" fmla="val 16667"/>
+            </a:avLst>
+          </a:prstGeom>
+          <a:solidFill>
+            <a:srgbClr val="8AA79F"/>
+          </a:solidFill>
+          <a:ln>
+            <a:noFill/>
+          </a:ln>
+        </p:spPr>
+        <p:txBody>
+          <a:bodyPr anchor="ctr">
+            <a:normAutofit/>
+          </a:bodyPr>
+          <a:lstStyle/>
+          <a:p>
+            <a:pPr algn="ctr"/>
+            <a:r>
+              <a:rPr lang="en-US" sz="4000" b="1" dirty="0">
+                <a:solidFill>
+                  <a:srgbClr val="001524"/>
+                </a:solidFill>
+                <a:latin typeface="Trebuchet MS"/>
+              </a:rPr>
+              <a:t>TPOT</a:t>
+            </a:r>
+          </a:p>
+          <a:p>
+            <a:pPr algn="ctr"/>
+            <a:r>
+              <a:rPr lang="en-US" sz="1100" b="0" dirty="0">
+                <a:solidFill>
+                  <a:srgbClr val="001524"/>
+                </a:solidFill>
+                <a:latin typeface="Calibri"/>
+              </a:rPr>
+              <a:t>Genetic programming for pipeline optimization</a:t>
+            </a:r>
+          </a:p>
+        </p:txBody>
+      </p:sp>
+      <p:sp>
+        <p:nvSpPr>
+          <p:cNvPr id="20" name="TB20"/>
+          <p:cNvSpPr txBox="1">
+            <a:spLocks noGrp="1"/>
+          </p:cNvSpPr>
+          <p:nvPr/>
+        </p:nvSpPr>
+        <p:spPr>
+          <a:xfrm>
+            <a:off x="457200" y="3450000"/>
+            <a:ext cx="11200000" cy="400000"/>
+          </a:xfrm>
+          <a:prstGeom prst="rect">
+            <a:avLst/>
+          </a:prstGeom>
+          <a:noFill/>
+        </p:spPr>
+        <p:txBody>
+          <a:bodyPr>
+            <a:normAutofit/>
+          </a:bodyPr>
+          <a:lstStyle/>
+          <a:p>
+            <a:pPr algn="l"/>
+            <a:r>
+              <a:rPr lang="en-US" sz="1800" b="1" dirty="0">
+                <a:solidFill>
+                  <a:srgbClr val="15616D"/>
+                </a:solidFill>
+                <a:latin typeface="Trebuchet MS"/>
+              </a:rPr>
+              <a:t>Why AutoML Matters (and its Limits)</a:t>
+            </a:r>
+          </a:p>
+        </p:txBody>
+      </p:sp>
+      <p:sp>
+        <p:nvSpPr>
+          <p:cNvPr id="21" name="CB21"/>
+          <p:cNvSpPr>
+            <a:spLocks noGrp="1"/>
+          </p:cNvSpPr>
+          <p:nvPr/>
+        </p:nvSpPr>
+        <p:spPr>
+          <a:xfrm>
+            <a:off x="457200" y="3950000"/>
+            <a:ext cx="5500000" cy="2100000"/>
+          </a:xfrm>
+          <a:prstGeom prst="rect">
+            <a:avLst/>
+          </a:prstGeom>
+          <a:solidFill>
+            <a:srgbClr val="F0F8F7"/>
+          </a:solidFill>
+          <a:ln>
+            <a:noFill/>
+          </a:ln>
+        </p:spPr>
         <p:txBody>
           <a:bodyPr/>
           <a:lstStyle/>
           <a:p>
-            <a:r>
-              <a:rPr lang="en-US" dirty="0"/>
-              <a:t>Auto ML</a:t>
-            </a:r>
-          </a:p>
-        </p:txBody>
-      </p:sp>
-      <p:sp>
-        <p:nvSpPr>
-          <p:cNvPr id="3" name="Text Placeholder 2">
-            <a:extLst>
-              <a:ext uri="{FF2B5EF4-FFF2-40B4-BE49-F238E27FC236}">
-                <a16:creationId xmlns:a16="http://schemas.microsoft.com/office/drawing/2014/main" id="{20A3ED6A-4846-A4D0-B838-ABD5235ACBA6}"/>
-              </a:ext>
-            </a:extLst>
-          </p:cNvPr>
+            <a:endParaRPr lang="en-US"/>
+          </a:p>
+        </p:txBody>
+      </p:sp>
+      <p:sp>
+        <p:nvSpPr>
+          <p:cNvPr id="22" name="TB22"/>
+          <p:cNvSpPr txBox="1">
+            <a:spLocks noGrp="1"/>
+          </p:cNvSpPr>
+          <p:nvPr/>
+        </p:nvSpPr>
+        <p:spPr>
+          <a:xfrm>
+            <a:off x="600000" y="4050000"/>
+            <a:ext cx="5200000" cy="400000"/>
+          </a:xfrm>
+          <a:prstGeom prst="rect">
+            <a:avLst/>
+          </a:prstGeom>
+          <a:noFill/>
+        </p:spPr>
+        <p:txBody>
+          <a:bodyPr>
+            <a:normAutofit/>
+          </a:bodyPr>
+          <a:lstStyle/>
+          <a:p>
+            <a:pPr algn="l"/>
+            <a:r>
+              <a:rPr lang="en-US" sz="1500" b="1" dirty="0">
+                <a:solidFill>
+                  <a:srgbClr val="15616D"/>
+                </a:solidFill>
+                <a:latin typeface="Calibri"/>
+              </a:rPr>
+              <a:t>What AutoML Does Well</a:t>
+            </a:r>
+          </a:p>
+        </p:txBody>
+      </p:sp>
+      <p:sp>
+        <p:nvSpPr>
+          <p:cNvPr id="23" name="BL23"/>
+          <p:cNvSpPr txBox="1">
+            <a:spLocks noGrp="1"/>
+          </p:cNvSpPr>
+          <p:nvPr/>
+        </p:nvSpPr>
+        <p:spPr>
+          <a:xfrm>
+            <a:off x="600000" y="4500000"/>
+            <a:ext cx="5200000" cy="1400000"/>
+          </a:xfrm>
+          <a:prstGeom prst="rect">
+            <a:avLst/>
+          </a:prstGeom>
+          <a:noFill/>
+        </p:spPr>
+        <p:txBody>
+          <a:bodyPr>
+            <a:normAutofit/>
+          </a:bodyPr>
+          <a:lstStyle/>
+          <a:p>
+            <a:pPr marL="342900" indent="-342900">
+              <a:lnSpc>
+                <a:spcPts val="3600"/>
+              </a:lnSpc>
+              <a:spcBef>
+                <a:spcPts val="200"/>
+              </a:spcBef>
+              <a:buChar char="■"/>
+            </a:pPr>
+            <a:r>
+              <a:rPr lang="en-US" sz="1200" b="0" dirty="0">
+                <a:solidFill>
+                  <a:srgbClr val="444444"/>
+                </a:solidFill>
+                <a:latin typeface="Calibri"/>
+              </a:rPr>
+              <a:t>Searches hundreds of model + hyperparameter combinations automatically</a:t>
+            </a:r>
+          </a:p>
+          <a:p>
+            <a:pPr marL="342900" indent="-342900">
+              <a:lnSpc>
+                <a:spcPts val="3600"/>
+              </a:lnSpc>
+              <a:spcBef>
+                <a:spcPts val="200"/>
+              </a:spcBef>
+              <a:buChar char="■"/>
+            </a:pPr>
+            <a:r>
+              <a:rPr lang="en-US" sz="1200" b="0" dirty="0">
+                <a:solidFill>
+                  <a:srgbClr val="444444"/>
+                </a:solidFill>
+                <a:latin typeface="Calibri"/>
+              </a:rPr>
+              <a:t>Often beats manually tuned models on tabular data</a:t>
+            </a:r>
+          </a:p>
+          <a:p>
+            <a:pPr marL="342900" indent="-342900">
+              <a:lnSpc>
+                <a:spcPts val="3600"/>
+              </a:lnSpc>
+              <a:spcBef>
+                <a:spcPts val="200"/>
+              </a:spcBef>
+              <a:buChar char="■"/>
+            </a:pPr>
+            <a:r>
+              <a:rPr lang="en-US" sz="1200" b="0" dirty="0">
+                <a:solidFill>
+                  <a:srgbClr val="444444"/>
+                </a:solidFill>
+                <a:latin typeface="Calibri"/>
+              </a:rPr>
+              <a:t>Saves hours of manual experimentation for common tasks</a:t>
+            </a:r>
+          </a:p>
+        </p:txBody>
+      </p:sp>
+      <p:sp>
+        <p:nvSpPr>
+          <p:cNvPr id="24" name="CB24"/>
           <p:cNvSpPr>
             <a:spLocks noGrp="1"/>
           </p:cNvSpPr>
-          <p:nvPr>
-            <p:ph type="body" idx="1"/>
-          </p:nvPr>
-        </p:nvSpPr>
-        <p:spPr/>
+          <p:nvPr/>
+        </p:nvSpPr>
+        <p:spPr>
+          <a:xfrm>
+            <a:off x="6200000" y="3950000"/>
+            <a:ext cx="5550000" cy="2100000"/>
+          </a:xfrm>
+          <a:prstGeom prst="rect">
+            <a:avLst/>
+          </a:prstGeom>
+          <a:solidFill>
+            <a:srgbClr val="FFF5EC"/>
+          </a:solidFill>
+          <a:ln>
+            <a:noFill/>
+          </a:ln>
+        </p:spPr>
         <p:txBody>
           <a:bodyPr/>
           <a:lstStyle/>
           <a:p>
-            <a:r>
-              <a:rPr lang="en-US" dirty="0"/>
-              <a:t>Automatic Machine learning</a:t>
-            </a:r>
+            <a:endParaRPr lang="en-US"/>
+          </a:p>
+        </p:txBody>
+      </p:sp>
+      <p:sp>
+        <p:nvSpPr>
+          <p:cNvPr id="25" name="TB25"/>
+          <p:cNvSpPr txBox="1">
+            <a:spLocks noGrp="1"/>
+          </p:cNvSpPr>
+          <p:nvPr/>
+        </p:nvSpPr>
+        <p:spPr>
+          <a:xfrm>
+            <a:off x="6400000" y="4050000"/>
+            <a:ext cx="5100000" cy="400000"/>
+          </a:xfrm>
+          <a:prstGeom prst="rect">
+            <a:avLst/>
+          </a:prstGeom>
+          <a:noFill/>
+        </p:spPr>
+        <p:txBody>
+          <a:bodyPr>
+            <a:normAutofit/>
+          </a:bodyPr>
+          <a:lstStyle/>
+          <a:p>
+            <a:pPr algn="l"/>
+            <a:r>
+              <a:rPr lang="en-US" sz="1500" b="1" dirty="0">
+                <a:solidFill>
+                  <a:srgbClr val="BC5308"/>
+                </a:solidFill>
+                <a:latin typeface="Calibri"/>
+              </a:rPr>
+              <a:t>What AutoML Cannot Replace</a:t>
+            </a:r>
+          </a:p>
+        </p:txBody>
+      </p:sp>
+      <p:sp>
+        <p:nvSpPr>
+          <p:cNvPr id="26" name="BL26"/>
+          <p:cNvSpPr txBox="1">
+            <a:spLocks noGrp="1"/>
+          </p:cNvSpPr>
+          <p:nvPr/>
+        </p:nvSpPr>
+        <p:spPr>
+          <a:xfrm>
+            <a:off x="6400000" y="4500000"/>
+            <a:ext cx="5100000" cy="1400000"/>
+          </a:xfrm>
+          <a:prstGeom prst="rect">
+            <a:avLst/>
+          </a:prstGeom>
+          <a:noFill/>
+        </p:spPr>
+        <p:txBody>
+          <a:bodyPr>
+            <a:normAutofit/>
+          </a:bodyPr>
+          <a:lstStyle/>
+          <a:p>
+            <a:pPr marL="342900" indent="-342900">
+              <a:lnSpc>
+                <a:spcPts val="3600"/>
+              </a:lnSpc>
+              <a:spcBef>
+                <a:spcPts val="200"/>
+              </a:spcBef>
+              <a:buChar char="■"/>
+            </a:pPr>
+            <a:r>
+              <a:rPr lang="en-US" sz="1200" b="0" dirty="0">
+                <a:solidFill>
+                  <a:srgbClr val="444444"/>
+                </a:solidFill>
+                <a:latin typeface="Calibri"/>
+              </a:rPr>
+              <a:t>Problem definition — knowing what to predict and why</a:t>
+            </a:r>
+          </a:p>
+          <a:p>
+            <a:pPr marL="342900" indent="-342900">
+              <a:lnSpc>
+                <a:spcPts val="3600"/>
+              </a:lnSpc>
+              <a:spcBef>
+                <a:spcPts val="200"/>
+              </a:spcBef>
+              <a:buChar char="■"/>
+            </a:pPr>
+            <a:r>
+              <a:rPr lang="en-US" sz="1200" b="0" dirty="0">
+                <a:solidFill>
+                  <a:srgbClr val="444444"/>
+                </a:solidFill>
+                <a:latin typeface="Calibri"/>
+              </a:rPr>
+              <a:t>Data collection and cleaning — garbage in, garbage out</a:t>
+            </a:r>
+          </a:p>
+          <a:p>
+            <a:pPr marL="342900" indent="-342900">
+              <a:lnSpc>
+                <a:spcPts val="3600"/>
+              </a:lnSpc>
+              <a:spcBef>
+                <a:spcPts val="200"/>
+              </a:spcBef>
+              <a:buChar char="■"/>
+            </a:pPr>
+            <a:r>
+              <a:rPr lang="en-US" sz="1200" b="0" dirty="0">
+                <a:solidFill>
+                  <a:srgbClr val="444444"/>
+                </a:solidFill>
+                <a:latin typeface="Calibri"/>
+              </a:rPr>
+              <a:t>Domain expertise — understanding results and avoiding bias</a:t>
+            </a:r>
+          </a:p>
+        </p:txBody>
+      </p:sp>
+      <p:sp>
+        <p:nvSpPr>
+          <p:cNvPr id="90" name="FooterBar"/>
+          <p:cNvSpPr>
+            <a:spLocks noGrp="1"/>
+          </p:cNvSpPr>
+          <p:nvPr/>
+        </p:nvSpPr>
+        <p:spPr>
+          <a:xfrm>
+            <a:off x="0" y="6400800"/>
+            <a:ext cx="12192000" cy="457200"/>
+          </a:xfrm>
+          <a:prstGeom prst="rect">
+            <a:avLst/>
+          </a:prstGeom>
+          <a:solidFill>
+            <a:srgbClr val="15616D"/>
+          </a:solidFill>
+          <a:ln>
+            <a:noFill/>
+          </a:ln>
+        </p:spPr>
+        <p:txBody>
+          <a:bodyPr/>
+          <a:lstStyle/>
+          <a:p>
+            <a:endParaRPr lang="en-US"/>
           </a:p>
         </p:txBody>
       </p:sp>
     </p:spTree>
-    <p:extLst>
-      <p:ext uri="{BB962C8B-B14F-4D97-AF65-F5344CB8AC3E}">
-        <p14:creationId xmlns:p14="http://schemas.microsoft.com/office/powerpoint/2010/main" val="516195764"/>
-      </p:ext>
-    </p:extLst>
   </p:cSld>
   <p:clrMapOvr>
     <a:masterClrMapping/>
@@ -5682,13 +10513,7 @@
   <p:cSld>
     <p:spTree>
       <p:nvGrpSpPr>
-        <p:cNvPr id="1" name="">
-          <a:extLst>
-            <a:ext uri="{FF2B5EF4-FFF2-40B4-BE49-F238E27FC236}">
-              <a16:creationId xmlns:a16="http://schemas.microsoft.com/office/drawing/2014/main" id="{67879C43-663F-08E5-10BF-78446FFC6FFC}"/>
-            </a:ext>
-          </a:extLst>
-        </p:cNvPr>
+        <p:cNvPr id="1" name=""/>
         <p:cNvGrpSpPr/>
         <p:nvPr/>
       </p:nvGrpSpPr>
@@ -5702,43 +10527,752 @@
       </p:grpSpPr>
       <p:sp>
         <p:nvSpPr>
-          <p:cNvPr id="2" name="Title 1">
-            <a:extLst>
-              <a:ext uri="{FF2B5EF4-FFF2-40B4-BE49-F238E27FC236}">
-                <a16:creationId xmlns:a16="http://schemas.microsoft.com/office/drawing/2014/main" id="{ECD5C15B-3905-ACC0-5E18-DA7AFE7638DF}"/>
-              </a:ext>
-            </a:extLst>
-          </p:cNvPr>
+          <p:cNvPr id="91" name="HeaderBar"/>
           <p:cNvSpPr>
             <a:spLocks noGrp="1"/>
           </p:cNvSpPr>
-          <p:nvPr>
-            <p:ph type="title"/>
-          </p:nvPr>
-        </p:nvSpPr>
-        <p:spPr>
-          <a:xfrm>
-            <a:off x="993763" y="243472"/>
-            <a:ext cx="10058400" cy="817578"/>
-          </a:xfrm>
+          <p:nvPr/>
+        </p:nvSpPr>
+        <p:spPr>
+          <a:xfrm>
+            <a:off x="0" y="0"/>
+            <a:ext cx="12192000" cy="800000"/>
+          </a:xfrm>
+          <a:prstGeom prst="rect">
+            <a:avLst/>
+          </a:prstGeom>
+          <a:solidFill>
+            <a:srgbClr val="15616D"/>
+          </a:solidFill>
+          <a:ln>
+            <a:noFill/>
+          </a:ln>
+        </p:spPr>
+        <p:txBody>
+          <a:bodyPr anchor="ctr">
+            <a:normAutofit/>
+          </a:bodyPr>
+          <a:lstStyle/>
+          <a:p>
+            <a:pPr algn="l"/>
+            <a:r>
+              <a:rPr lang="en-US" sz="2400" b="1" dirty="0">
+                <a:solidFill>
+                  <a:srgbClr val="FFFFFF"/>
+                </a:solidFill>
+                <a:latin typeface="Trebuchet MS"/>
+              </a:rPr>
+              <a:t>  H2O AutoML — Hands-On</a:t>
+            </a:r>
+          </a:p>
+        </p:txBody>
+      </p:sp>
+      <p:sp>
+        <p:nvSpPr>
+          <p:cNvPr id="10" name="CB10"/>
+          <p:cNvSpPr>
+            <a:spLocks noGrp="1"/>
+          </p:cNvSpPr>
+          <p:nvPr/>
+        </p:nvSpPr>
+        <p:spPr>
+          <a:xfrm>
+            <a:off x="457200" y="950000"/>
+            <a:ext cx="5600000" cy="4500000"/>
+          </a:xfrm>
+          <a:prstGeom prst="rect">
+            <a:avLst/>
+          </a:prstGeom>
+          <a:solidFill>
+            <a:srgbClr val="001524"/>
+          </a:solidFill>
+          <a:ln>
+            <a:noFill/>
+          </a:ln>
         </p:spPr>
         <p:txBody>
           <a:bodyPr/>
           <a:lstStyle/>
           <a:p>
-            <a:r>
-              <a:rPr lang="en-US" dirty="0"/>
-              <a:t>Auto ML </a:t>
-            </a:r>
+            <a:endParaRPr lang="en-US"/>
+          </a:p>
+        </p:txBody>
+      </p:sp>
+      <p:sp>
+        <p:nvSpPr>
+          <p:cNvPr id="11" name="TB11"/>
+          <p:cNvSpPr txBox="1">
+            <a:spLocks noGrp="1"/>
+          </p:cNvSpPr>
+          <p:nvPr/>
+        </p:nvSpPr>
+        <p:spPr>
+          <a:xfrm>
+            <a:off x="600000" y="1000000"/>
+            <a:ext cx="5200000" cy="500000"/>
+          </a:xfrm>
+          <a:prstGeom prst="rect">
+            <a:avLst/>
+          </a:prstGeom>
+          <a:noFill/>
+        </p:spPr>
+        <p:txBody>
+          <a:bodyPr>
+            <a:normAutofit/>
+          </a:bodyPr>
+          <a:lstStyle/>
+          <a:p>
+            <a:pPr algn="l"/>
+            <a:r>
+              <a:rPr lang="en-US" sz="1800" b="1" dirty="0">
+                <a:solidFill>
+                  <a:srgbClr val="FF7D00"/>
+                </a:solidFill>
+                <a:latin typeface="Trebuchet MS"/>
+              </a:rPr>
+              <a:t>H2O AutoML Code Walkthrough</a:t>
+            </a:r>
+          </a:p>
+        </p:txBody>
+      </p:sp>
+      <p:sp>
+        <p:nvSpPr>
+          <p:cNvPr id="12" name="BL12"/>
+          <p:cNvSpPr txBox="1">
+            <a:spLocks noGrp="1"/>
+          </p:cNvSpPr>
+          <p:nvPr/>
+        </p:nvSpPr>
+        <p:spPr>
+          <a:xfrm>
+            <a:off x="600000" y="1600000"/>
+            <a:ext cx="5200000" cy="3700000"/>
+          </a:xfrm>
+          <a:prstGeom prst="rect">
+            <a:avLst/>
+          </a:prstGeom>
+          <a:noFill/>
+        </p:spPr>
+        <p:txBody>
+          <a:bodyPr>
+            <a:normAutofit/>
+          </a:bodyPr>
+          <a:lstStyle/>
+          <a:p>
+            <a:pPr marL="342900" indent="-342900">
+              <a:lnSpc>
+                <a:spcPts val="3600"/>
+              </a:lnSpc>
+              <a:spcBef>
+                <a:spcPts val="200"/>
+              </a:spcBef>
+              <a:buNone/>
+            </a:pPr>
+            <a:r>
+              <a:rPr lang="en-US" sz="1300" b="1" dirty="0">
+                <a:solidFill>
+                  <a:srgbClr val="8AA79F"/>
+                </a:solidFill>
+                <a:latin typeface="Trebuchet MS"/>
+              </a:rPr>
+              <a:t>Step 1: Start H2O and load data</a:t>
+            </a:r>
+          </a:p>
+          <a:p>
+            <a:pPr marL="342900" indent="-342900">
+              <a:lnSpc>
+                <a:spcPts val="3600"/>
+              </a:lnSpc>
+              <a:spcBef>
+                <a:spcPts val="200"/>
+              </a:spcBef>
+              <a:buNone/>
+            </a:pPr>
+            <a:r>
+              <a:rPr lang="en-US" sz="1200" b="0" dirty="0">
+                <a:solidFill>
+                  <a:srgbClr val="C5CAB8"/>
+                </a:solidFill>
+                <a:latin typeface="Calibri"/>
+              </a:rPr>
+              <a:t>import h2o; from h2o.automl import H2OAutoML</a:t>
+            </a:r>
+          </a:p>
+          <a:p>
+            <a:pPr marL="342900" indent="-342900">
+              <a:lnSpc>
+                <a:spcPts val="3600"/>
+              </a:lnSpc>
+              <a:spcBef>
+                <a:spcPts val="200"/>
+              </a:spcBef>
+              <a:buNone/>
+            </a:pPr>
+            <a:r>
+              <a:rPr lang="en-US" sz="1200" b="0" dirty="0">
+                <a:solidFill>
+                  <a:srgbClr val="C5CAB8"/>
+                </a:solidFill>
+                <a:latin typeface="Calibri"/>
+              </a:rPr>
+              <a:t>h2o.init()  # starts local cluster</a:t>
+            </a:r>
+          </a:p>
+          <a:p>
+            <a:pPr marL="342900" indent="-342900">
+              <a:lnSpc>
+                <a:spcPts val="3600"/>
+              </a:lnSpc>
+              <a:spcBef>
+                <a:spcPts val="200"/>
+              </a:spcBef>
+              <a:buNone/>
+            </a:pPr>
+            <a:r>
+              <a:rPr lang="en-US" sz="1200" b="0" dirty="0">
+                <a:solidFill>
+                  <a:srgbClr val="C5CAB8"/>
+                </a:solidFill>
+                <a:latin typeface="Calibri"/>
+              </a:rPr>
+              <a:t>df = h2o.import_file('kenya_yields.csv')</a:t>
+            </a:r>
+          </a:p>
+          <a:p>
+            <a:pPr marL="342900" indent="-342900">
+              <a:lnSpc>
+                <a:spcPts val="3600"/>
+              </a:lnSpc>
+              <a:spcBef>
+                <a:spcPts val="200"/>
+              </a:spcBef>
+              <a:buNone/>
+            </a:pPr>
+            <a:endParaRPr lang="en-US" sz="1200" b="0" dirty="0">
+              <a:solidFill>
+                <a:srgbClr val="C5CAB8"/>
+              </a:solidFill>
+              <a:latin typeface="Calibri"/>
+            </a:endParaRPr>
+          </a:p>
+          <a:p>
+            <a:pPr marL="342900" indent="-342900">
+              <a:lnSpc>
+                <a:spcPts val="3600"/>
+              </a:lnSpc>
+              <a:spcBef>
+                <a:spcPts val="200"/>
+              </a:spcBef>
+              <a:buNone/>
+            </a:pPr>
+            <a:r>
+              <a:rPr lang="en-US" sz="1300" b="1" dirty="0">
+                <a:solidFill>
+                  <a:srgbClr val="8AA79F"/>
+                </a:solidFill>
+                <a:latin typeface="Trebuchet MS"/>
+              </a:rPr>
+              <a:t>Step 2: Define target and train</a:t>
+            </a:r>
+          </a:p>
+          <a:p>
+            <a:pPr marL="342900" indent="-342900">
+              <a:lnSpc>
+                <a:spcPts val="3600"/>
+              </a:lnSpc>
+              <a:spcBef>
+                <a:spcPts val="200"/>
+              </a:spcBef>
+              <a:buNone/>
+            </a:pPr>
+            <a:r>
+              <a:rPr lang="en-US" sz="1200" b="0" dirty="0">
+                <a:solidFill>
+                  <a:srgbClr val="C5CAB8"/>
+                </a:solidFill>
+                <a:latin typeface="Calibri"/>
+              </a:rPr>
+              <a:t>aml = H2OAutoML(max_models=20, seed=42)</a:t>
+            </a:r>
+          </a:p>
+          <a:p>
+            <a:pPr marL="342900" indent="-342900">
+              <a:lnSpc>
+                <a:spcPts val="3600"/>
+              </a:lnSpc>
+              <a:spcBef>
+                <a:spcPts val="200"/>
+              </a:spcBef>
+              <a:buNone/>
+            </a:pPr>
+            <a:r>
+              <a:rPr lang="en-US" sz="1200" b="0" dirty="0">
+                <a:solidFill>
+                  <a:srgbClr val="C5CAB8"/>
+                </a:solidFill>
+                <a:latin typeface="Calibri"/>
+              </a:rPr>
+              <a:t>aml.train(x=features, y='Maize_Yield', training_frame=df)</a:t>
+            </a:r>
+          </a:p>
+          <a:p>
+            <a:pPr marL="342900" indent="-342900">
+              <a:lnSpc>
+                <a:spcPts val="3600"/>
+              </a:lnSpc>
+              <a:spcBef>
+                <a:spcPts val="200"/>
+              </a:spcBef>
+              <a:buNone/>
+            </a:pPr>
+            <a:endParaRPr lang="en-US" sz="1200" b="0" dirty="0">
+              <a:solidFill>
+                <a:srgbClr val="C5CAB8"/>
+              </a:solidFill>
+              <a:latin typeface="Calibri"/>
+            </a:endParaRPr>
+          </a:p>
+          <a:p>
+            <a:pPr marL="342900" indent="-342900">
+              <a:lnSpc>
+                <a:spcPts val="3600"/>
+              </a:lnSpc>
+              <a:spcBef>
+                <a:spcPts val="200"/>
+              </a:spcBef>
+              <a:buNone/>
+            </a:pPr>
+            <a:r>
+              <a:rPr lang="en-US" sz="1300" b="1" dirty="0">
+                <a:solidFill>
+                  <a:srgbClr val="8AA79F"/>
+                </a:solidFill>
+                <a:latin typeface="Trebuchet MS"/>
+              </a:rPr>
+              <a:t>Step 3: Explore results</a:t>
+            </a:r>
+          </a:p>
+          <a:p>
+            <a:pPr marL="342900" indent="-342900">
+              <a:lnSpc>
+                <a:spcPts val="3600"/>
+              </a:lnSpc>
+              <a:spcBef>
+                <a:spcPts val="200"/>
+              </a:spcBef>
+              <a:buNone/>
+            </a:pPr>
+            <a:r>
+              <a:rPr lang="en-US" sz="1200" b="0" dirty="0">
+                <a:solidFill>
+                  <a:srgbClr val="C5CAB8"/>
+                </a:solidFill>
+                <a:latin typeface="Calibri"/>
+              </a:rPr>
+              <a:t>aml.leaderboard  # ranked model comparison</a:t>
+            </a:r>
+          </a:p>
+          <a:p>
+            <a:pPr marL="342900" indent="-342900">
+              <a:lnSpc>
+                <a:spcPts val="3600"/>
+              </a:lnSpc>
+              <a:spcBef>
+                <a:spcPts val="200"/>
+              </a:spcBef>
+              <a:buNone/>
+            </a:pPr>
+            <a:r>
+              <a:rPr lang="en-US" sz="1200" b="0" dirty="0">
+                <a:solidFill>
+                  <a:srgbClr val="C5CAB8"/>
+                </a:solidFill>
+                <a:latin typeface="Calibri"/>
+              </a:rPr>
+              <a:t>aml.leader  # best model — get predictions</a:t>
+            </a:r>
+          </a:p>
+          <a:p>
+            <a:pPr marL="342900" indent="-342900">
+              <a:lnSpc>
+                <a:spcPts val="3600"/>
+              </a:lnSpc>
+              <a:spcBef>
+                <a:spcPts val="200"/>
+              </a:spcBef>
+              <a:buNone/>
+            </a:pPr>
+            <a:r>
+              <a:rPr lang="en-US" sz="1200" b="0" dirty="0">
+                <a:solidFill>
+                  <a:srgbClr val="C5CAB8"/>
+                </a:solidFill>
+                <a:latin typeface="Calibri"/>
+              </a:rPr>
+              <a:t>aml.leader.save('best_model/')  # save for production</a:t>
+            </a:r>
+          </a:p>
+        </p:txBody>
+      </p:sp>
+      <p:sp>
+        <p:nvSpPr>
+          <p:cNvPr id="20" name="CB20"/>
+          <p:cNvSpPr>
+            <a:spLocks noGrp="1"/>
+          </p:cNvSpPr>
+          <p:nvPr/>
+        </p:nvSpPr>
+        <p:spPr>
+          <a:xfrm>
+            <a:off x="6300000" y="950000"/>
+            <a:ext cx="5450000" cy="4500000"/>
+          </a:xfrm>
+          <a:prstGeom prst="rect">
+            <a:avLst/>
+          </a:prstGeom>
+          <a:solidFill>
+            <a:srgbClr val="F0F8F7"/>
+          </a:solidFill>
+          <a:ln>
+            <a:noFill/>
+          </a:ln>
+        </p:spPr>
+        <p:txBody>
+          <a:bodyPr/>
+          <a:lstStyle/>
+          <a:p>
+            <a:endParaRPr lang="en-US"/>
+          </a:p>
+        </p:txBody>
+      </p:sp>
+      <p:sp>
+        <p:nvSpPr>
+          <p:cNvPr id="21" name="TB21"/>
+          <p:cNvSpPr txBox="1">
+            <a:spLocks noGrp="1"/>
+          </p:cNvSpPr>
+          <p:nvPr/>
+        </p:nvSpPr>
+        <p:spPr>
+          <a:xfrm>
+            <a:off x="6500000" y="1000000"/>
+            <a:ext cx="5100000" cy="500000"/>
+          </a:xfrm>
+          <a:prstGeom prst="rect">
+            <a:avLst/>
+          </a:prstGeom>
+          <a:noFill/>
+        </p:spPr>
+        <p:txBody>
+          <a:bodyPr>
+            <a:normAutofit/>
+          </a:bodyPr>
+          <a:lstStyle/>
+          <a:p>
+            <a:pPr algn="l"/>
+            <a:r>
+              <a:rPr lang="en-US" sz="1800" b="1" dirty="0">
+                <a:solidFill>
+                  <a:srgbClr val="15616D"/>
+                </a:solidFill>
+                <a:latin typeface="Trebuchet MS"/>
+              </a:rPr>
+              <a:t>H2O AutoML Output</a:t>
+            </a:r>
+          </a:p>
+        </p:txBody>
+      </p:sp>
+      <p:sp>
+        <p:nvSpPr>
+          <p:cNvPr id="22" name="BL22"/>
+          <p:cNvSpPr txBox="1">
+            <a:spLocks noGrp="1"/>
+          </p:cNvSpPr>
+          <p:nvPr/>
+        </p:nvSpPr>
+        <p:spPr>
+          <a:xfrm>
+            <a:off x="6500000" y="1600000"/>
+            <a:ext cx="5100000" cy="3700000"/>
+          </a:xfrm>
+          <a:prstGeom prst="rect">
+            <a:avLst/>
+          </a:prstGeom>
+          <a:noFill/>
+        </p:spPr>
+        <p:txBody>
+          <a:bodyPr>
+            <a:normAutofit/>
+          </a:bodyPr>
+          <a:lstStyle/>
+          <a:p>
+            <a:pPr marL="342900" indent="-342900">
+              <a:lnSpc>
+                <a:spcPts val="3600"/>
+              </a:lnSpc>
+              <a:spcBef>
+                <a:spcPts val="200"/>
+              </a:spcBef>
+              <a:buChar char="■"/>
+            </a:pPr>
+            <a:r>
+              <a:rPr lang="en-US" sz="1300" b="0" dirty="0">
+                <a:solidFill>
+                  <a:srgbClr val="444444"/>
+                </a:solidFill>
+                <a:latin typeface="Calibri"/>
+              </a:rPr>
+              <a:t>Leaderboard shows all models ranked by RMSE or AUC</a:t>
+            </a:r>
+          </a:p>
+          <a:p>
+            <a:pPr marL="342900" indent="-342900">
+              <a:lnSpc>
+                <a:spcPts val="3600"/>
+              </a:lnSpc>
+              <a:spcBef>
+                <a:spcPts val="200"/>
+              </a:spcBef>
+              <a:buChar char="■"/>
+            </a:pPr>
+            <a:r>
+              <a:rPr lang="en-US" sz="1300" b="0" dirty="0">
+                <a:solidFill>
+                  <a:srgbClr val="444444"/>
+                </a:solidFill>
+                <a:latin typeface="Calibri"/>
+              </a:rPr>
+              <a:t>Typical winners: Stacked Ensemble (combines all models)</a:t>
+            </a:r>
+          </a:p>
+          <a:p>
+            <a:pPr marL="342900" indent="-342900">
+              <a:lnSpc>
+                <a:spcPts val="3600"/>
+              </a:lnSpc>
+              <a:spcBef>
+                <a:spcPts val="200"/>
+              </a:spcBef>
+              <a:buChar char="■"/>
+            </a:pPr>
+            <a:r>
+              <a:rPr lang="en-US" sz="1300" b="0" dirty="0">
+                <a:solidFill>
+                  <a:srgbClr val="444444"/>
+                </a:solidFill>
+                <a:latin typeface="Calibri"/>
+              </a:rPr>
+              <a:t>XGBoost and GBM usually in top 3 for tabular data</a:t>
+            </a:r>
+          </a:p>
+          <a:p>
+            <a:pPr marL="342900" indent="-342900">
+              <a:lnSpc>
+                <a:spcPts val="3600"/>
+              </a:lnSpc>
+              <a:spcBef>
+                <a:spcPts val="200"/>
+              </a:spcBef>
+              <a:buNone/>
+            </a:pPr>
+            <a:endParaRPr lang="en-US" sz="1300" b="0" dirty="0">
+              <a:solidFill>
+                <a:srgbClr val="444444"/>
+              </a:solidFill>
+              <a:latin typeface="Calibri"/>
+            </a:endParaRPr>
+          </a:p>
+          <a:p>
+            <a:pPr marL="342900" indent="-342900">
+              <a:lnSpc>
+                <a:spcPts val="3600"/>
+              </a:lnSpc>
+              <a:spcBef>
+                <a:spcPts val="200"/>
+              </a:spcBef>
+              <a:buNone/>
+            </a:pPr>
+            <a:r>
+              <a:rPr lang="en-US" sz="1400" b="1" dirty="0">
+                <a:solidFill>
+                  <a:srgbClr val="BC5308"/>
+                </a:solidFill>
+                <a:latin typeface="Trebuchet MS"/>
+              </a:rPr>
+              <a:t>H2O Flow — Visual Dashboard</a:t>
+            </a:r>
+          </a:p>
+          <a:p>
+            <a:pPr marL="342900" indent="-342900">
+              <a:lnSpc>
+                <a:spcPts val="3600"/>
+              </a:lnSpc>
+              <a:spcBef>
+                <a:spcPts val="200"/>
+              </a:spcBef>
+              <a:buChar char="■"/>
+            </a:pPr>
+            <a:r>
+              <a:rPr lang="en-US" sz="1300" b="0" dirty="0">
+                <a:solidFill>
+                  <a:srgbClr val="444444"/>
+                </a:solidFill>
+                <a:latin typeface="Calibri"/>
+              </a:rPr>
+              <a:t>Web UI at localhost:54321 — no coding needed</a:t>
+            </a:r>
+          </a:p>
+          <a:p>
+            <a:pPr marL="342900" indent="-342900">
+              <a:lnSpc>
+                <a:spcPts val="3600"/>
+              </a:lnSpc>
+              <a:spcBef>
+                <a:spcPts val="200"/>
+              </a:spcBef>
+              <a:buChar char="■"/>
+            </a:pPr>
+            <a:r>
+              <a:rPr lang="en-US" sz="1300" b="0" dirty="0">
+                <a:solidFill>
+                  <a:srgbClr val="444444"/>
+                </a:solidFill>
+                <a:latin typeface="Calibri"/>
+              </a:rPr>
+              <a:t>View model performance, variable importance plots</a:t>
+            </a:r>
+          </a:p>
+          <a:p>
+            <a:pPr marL="342900" indent="-342900">
+              <a:lnSpc>
+                <a:spcPts val="3600"/>
+              </a:lnSpc>
+              <a:spcBef>
+                <a:spcPts val="200"/>
+              </a:spcBef>
+              <a:buChar char="■"/>
+            </a:pPr>
+            <a:r>
+              <a:rPr lang="en-US" sz="1300" b="0" dirty="0">
+                <a:solidFill>
+                  <a:srgbClr val="444444"/>
+                </a:solidFill>
+                <a:latin typeface="Calibri"/>
+              </a:rPr>
+              <a:t>Export models to MOJO format for Java deployment</a:t>
+            </a:r>
+          </a:p>
+          <a:p>
+            <a:pPr marL="342900" indent="-342900">
+              <a:lnSpc>
+                <a:spcPts val="3600"/>
+              </a:lnSpc>
+              <a:spcBef>
+                <a:spcPts val="200"/>
+              </a:spcBef>
+              <a:buNone/>
+            </a:pPr>
+            <a:endParaRPr lang="en-US" sz="1300" b="0" dirty="0">
+              <a:solidFill>
+                <a:srgbClr val="444444"/>
+              </a:solidFill>
+              <a:latin typeface="Calibri"/>
+            </a:endParaRPr>
+          </a:p>
+          <a:p>
+            <a:pPr marL="342900" indent="-342900">
+              <a:lnSpc>
+                <a:spcPts val="3600"/>
+              </a:lnSpc>
+              <a:spcBef>
+                <a:spcPts val="200"/>
+              </a:spcBef>
+              <a:buNone/>
+            </a:pPr>
+            <a:r>
+              <a:rPr lang="en-US" sz="1400" b="1" dirty="0">
+                <a:solidFill>
+                  <a:srgbClr val="15616D"/>
+                </a:solidFill>
+                <a:latin typeface="Trebuchet MS"/>
+              </a:rPr>
+              <a:t>Variable Importance</a:t>
+            </a:r>
+          </a:p>
+          <a:p>
+            <a:pPr marL="342900" indent="-342900">
+              <a:lnSpc>
+                <a:spcPts val="3600"/>
+              </a:lnSpc>
+              <a:spcBef>
+                <a:spcPts val="200"/>
+              </a:spcBef>
+              <a:buChar char="■"/>
+            </a:pPr>
+            <a:r>
+              <a:rPr lang="en-US" sz="1300" b="0" dirty="0">
+                <a:solidFill>
+                  <a:srgbClr val="444444"/>
+                </a:solidFill>
+                <a:latin typeface="Calibri"/>
+              </a:rPr>
+              <a:t>Shows which features matter most for predictions</a:t>
+            </a:r>
+          </a:p>
+          <a:p>
+            <a:pPr marL="342900" indent="-342900">
+              <a:lnSpc>
+                <a:spcPts val="3600"/>
+              </a:lnSpc>
+              <a:spcBef>
+                <a:spcPts val="200"/>
+              </a:spcBef>
+              <a:buChar char="■"/>
+            </a:pPr>
+            <a:r>
+              <a:rPr lang="en-US" sz="1300" b="0" dirty="0">
+                <a:solidFill>
+                  <a:srgbClr val="444444"/>
+                </a:solidFill>
+                <a:latin typeface="Calibri"/>
+              </a:rPr>
+              <a:t>Critical for explaining models to non-technical stakeholders</a:t>
+            </a:r>
+          </a:p>
+        </p:txBody>
+      </p:sp>
+      <p:sp>
+        <p:nvSpPr>
+          <p:cNvPr id="90" name="FooterBar"/>
+          <p:cNvSpPr>
+            <a:spLocks noGrp="1"/>
+          </p:cNvSpPr>
+          <p:nvPr/>
+        </p:nvSpPr>
+        <p:spPr>
+          <a:xfrm>
+            <a:off x="0" y="6400800"/>
+            <a:ext cx="12192000" cy="457200"/>
+          </a:xfrm>
+          <a:prstGeom prst="rect">
+            <a:avLst/>
+          </a:prstGeom>
+          <a:solidFill>
+            <a:srgbClr val="15616D"/>
+          </a:solidFill>
+          <a:ln>
+            <a:noFill/>
+          </a:ln>
+        </p:spPr>
+        <p:txBody>
+          <a:bodyPr/>
+          <a:lstStyle/>
+          <a:p>
+            <a:endParaRPr lang="en-US"/>
           </a:p>
         </p:txBody>
       </p:sp>
     </p:spTree>
-    <p:extLst>
-      <p:ext uri="{BB962C8B-B14F-4D97-AF65-F5344CB8AC3E}">
-        <p14:creationId xmlns:p14="http://schemas.microsoft.com/office/powerpoint/2010/main" val="1197218640"/>
-      </p:ext>
-    </p:extLst>
   </p:cSld>
   <p:clrMapOvr>
     <a:masterClrMapping/>
@@ -5751,13 +11285,7 @@
   <p:cSld>
     <p:spTree>
       <p:nvGrpSpPr>
-        <p:cNvPr id="1" name="">
-          <a:extLst>
-            <a:ext uri="{FF2B5EF4-FFF2-40B4-BE49-F238E27FC236}">
-              <a16:creationId xmlns:a16="http://schemas.microsoft.com/office/drawing/2014/main" id="{5094E8B2-C712-7014-19AA-45C0835797D2}"/>
-            </a:ext>
-          </a:extLst>
-        </p:cNvPr>
+        <p:cNvPr id="1" name=""/>
         <p:cNvGrpSpPr/>
         <p:nvPr/>
       </p:nvGrpSpPr>
@@ -5771,68 +11299,752 @@
       </p:grpSpPr>
       <p:sp>
         <p:nvSpPr>
-          <p:cNvPr id="2" name="Title 1">
-            <a:extLst>
-              <a:ext uri="{FF2B5EF4-FFF2-40B4-BE49-F238E27FC236}">
-                <a16:creationId xmlns:a16="http://schemas.microsoft.com/office/drawing/2014/main" id="{58D00E97-7F53-E300-F3D8-AB0C5443A932}"/>
-              </a:ext>
-            </a:extLst>
-          </p:cNvPr>
+          <p:cNvPr id="91" name="HeaderBar"/>
           <p:cNvSpPr>
             <a:spLocks noGrp="1"/>
           </p:cNvSpPr>
-          <p:nvPr>
-            <p:ph type="title"/>
-          </p:nvPr>
-        </p:nvSpPr>
-        <p:spPr>
-          <a:xfrm>
-            <a:off x="993763" y="243472"/>
-            <a:ext cx="10058400" cy="817578"/>
-          </a:xfrm>
+          <p:nvPr/>
+        </p:nvSpPr>
+        <p:spPr>
+          <a:xfrm>
+            <a:off x="0" y="0"/>
+            <a:ext cx="12192000" cy="800000"/>
+          </a:xfrm>
+          <a:prstGeom prst="rect">
+            <a:avLst/>
+          </a:prstGeom>
+          <a:solidFill>
+            <a:srgbClr val="15616D"/>
+          </a:solidFill>
+          <a:ln>
+            <a:noFill/>
+          </a:ln>
+        </p:spPr>
+        <p:txBody>
+          <a:bodyPr anchor="ctr">
+            <a:normAutofit/>
+          </a:bodyPr>
+          <a:lstStyle/>
+          <a:p>
+            <a:pPr algn="l"/>
+            <a:r>
+              <a:rPr lang="en-US" sz="2400" b="1" dirty="0">
+                <a:solidFill>
+                  <a:srgbClr val="FFFFFF"/>
+                </a:solidFill>
+                <a:latin typeface="Trebuchet MS"/>
+              </a:rPr>
+              <a:t>  H2O AutoML — Hands-On</a:t>
+            </a:r>
+          </a:p>
+        </p:txBody>
+      </p:sp>
+      <p:sp>
+        <p:nvSpPr>
+          <p:cNvPr id="10" name="CB10"/>
+          <p:cNvSpPr>
+            <a:spLocks noGrp="1"/>
+          </p:cNvSpPr>
+          <p:nvPr/>
+        </p:nvSpPr>
+        <p:spPr>
+          <a:xfrm>
+            <a:off x="457200" y="950000"/>
+            <a:ext cx="5600000" cy="4500000"/>
+          </a:xfrm>
+          <a:prstGeom prst="rect">
+            <a:avLst/>
+          </a:prstGeom>
+          <a:solidFill>
+            <a:srgbClr val="001524"/>
+          </a:solidFill>
+          <a:ln>
+            <a:noFill/>
+          </a:ln>
         </p:spPr>
         <p:txBody>
           <a:bodyPr/>
           <a:lstStyle/>
           <a:p>
-            <a:r>
-              <a:rPr lang="en-US" dirty="0"/>
-              <a:t>H20</a:t>
-            </a:r>
-          </a:p>
-        </p:txBody>
-      </p:sp>
-      <p:sp>
-        <p:nvSpPr>
-          <p:cNvPr id="3" name="Content Placeholder 2">
-            <a:extLst>
-              <a:ext uri="{FF2B5EF4-FFF2-40B4-BE49-F238E27FC236}">
-                <a16:creationId xmlns:a16="http://schemas.microsoft.com/office/drawing/2014/main" id="{7691B2A7-277F-9D00-6982-D8305F75CFFA}"/>
-              </a:ext>
-            </a:extLst>
-          </p:cNvPr>
+            <a:endParaRPr lang="en-US"/>
+          </a:p>
+        </p:txBody>
+      </p:sp>
+      <p:sp>
+        <p:nvSpPr>
+          <p:cNvPr id="11" name="TB11"/>
+          <p:cNvSpPr txBox="1">
+            <a:spLocks noGrp="1"/>
+          </p:cNvSpPr>
+          <p:nvPr/>
+        </p:nvSpPr>
+        <p:spPr>
+          <a:xfrm>
+            <a:off x="600000" y="1000000"/>
+            <a:ext cx="5200000" cy="500000"/>
+          </a:xfrm>
+          <a:prstGeom prst="rect">
+            <a:avLst/>
+          </a:prstGeom>
+          <a:noFill/>
+        </p:spPr>
+        <p:txBody>
+          <a:bodyPr>
+            <a:normAutofit/>
+          </a:bodyPr>
+          <a:lstStyle/>
+          <a:p>
+            <a:pPr algn="l"/>
+            <a:r>
+              <a:rPr lang="en-US" sz="1800" b="1" dirty="0">
+                <a:solidFill>
+                  <a:srgbClr val="FF7D00"/>
+                </a:solidFill>
+                <a:latin typeface="Trebuchet MS"/>
+              </a:rPr>
+              <a:t>H2O AutoML Code Walkthrough</a:t>
+            </a:r>
+          </a:p>
+        </p:txBody>
+      </p:sp>
+      <p:sp>
+        <p:nvSpPr>
+          <p:cNvPr id="12" name="BL12"/>
+          <p:cNvSpPr txBox="1">
+            <a:spLocks noGrp="1"/>
+          </p:cNvSpPr>
+          <p:nvPr/>
+        </p:nvSpPr>
+        <p:spPr>
+          <a:xfrm>
+            <a:off x="600000" y="1600000"/>
+            <a:ext cx="5200000" cy="3700000"/>
+          </a:xfrm>
+          <a:prstGeom prst="rect">
+            <a:avLst/>
+          </a:prstGeom>
+          <a:noFill/>
+        </p:spPr>
+        <p:txBody>
+          <a:bodyPr>
+            <a:normAutofit/>
+          </a:bodyPr>
+          <a:lstStyle/>
+          <a:p>
+            <a:pPr marL="342900" indent="-342900">
+              <a:lnSpc>
+                <a:spcPts val="3600"/>
+              </a:lnSpc>
+              <a:spcBef>
+                <a:spcPts val="200"/>
+              </a:spcBef>
+              <a:buNone/>
+            </a:pPr>
+            <a:r>
+              <a:rPr lang="en-US" sz="1300" b="1" dirty="0">
+                <a:solidFill>
+                  <a:srgbClr val="8AA79F"/>
+                </a:solidFill>
+                <a:latin typeface="Trebuchet MS"/>
+              </a:rPr>
+              <a:t>Step 1: Start H2O and load data</a:t>
+            </a:r>
+          </a:p>
+          <a:p>
+            <a:pPr marL="342900" indent="-342900">
+              <a:lnSpc>
+                <a:spcPts val="3600"/>
+              </a:lnSpc>
+              <a:spcBef>
+                <a:spcPts val="200"/>
+              </a:spcBef>
+              <a:buNone/>
+            </a:pPr>
+            <a:r>
+              <a:rPr lang="en-US" sz="1200" b="0" dirty="0">
+                <a:solidFill>
+                  <a:srgbClr val="C5CAB8"/>
+                </a:solidFill>
+                <a:latin typeface="Calibri"/>
+              </a:rPr>
+              <a:t>import h2o; from h2o.automl import H2OAutoML</a:t>
+            </a:r>
+          </a:p>
+          <a:p>
+            <a:pPr marL="342900" indent="-342900">
+              <a:lnSpc>
+                <a:spcPts val="3600"/>
+              </a:lnSpc>
+              <a:spcBef>
+                <a:spcPts val="200"/>
+              </a:spcBef>
+              <a:buNone/>
+            </a:pPr>
+            <a:r>
+              <a:rPr lang="en-US" sz="1200" b="0" dirty="0">
+                <a:solidFill>
+                  <a:srgbClr val="C5CAB8"/>
+                </a:solidFill>
+                <a:latin typeface="Calibri"/>
+              </a:rPr>
+              <a:t>h2o.init()  # starts local cluster</a:t>
+            </a:r>
+          </a:p>
+          <a:p>
+            <a:pPr marL="342900" indent="-342900">
+              <a:lnSpc>
+                <a:spcPts val="3600"/>
+              </a:lnSpc>
+              <a:spcBef>
+                <a:spcPts val="200"/>
+              </a:spcBef>
+              <a:buNone/>
+            </a:pPr>
+            <a:r>
+              <a:rPr lang="en-US" sz="1200" b="0" dirty="0">
+                <a:solidFill>
+                  <a:srgbClr val="C5CAB8"/>
+                </a:solidFill>
+                <a:latin typeface="Calibri"/>
+              </a:rPr>
+              <a:t>df = h2o.import_file('kenya_yields.csv')</a:t>
+            </a:r>
+          </a:p>
+          <a:p>
+            <a:pPr marL="342900" indent="-342900">
+              <a:lnSpc>
+                <a:spcPts val="3600"/>
+              </a:lnSpc>
+              <a:spcBef>
+                <a:spcPts val="200"/>
+              </a:spcBef>
+              <a:buNone/>
+            </a:pPr>
+            <a:endParaRPr lang="en-US" sz="1200" b="0" dirty="0">
+              <a:solidFill>
+                <a:srgbClr val="C5CAB8"/>
+              </a:solidFill>
+              <a:latin typeface="Calibri"/>
+            </a:endParaRPr>
+          </a:p>
+          <a:p>
+            <a:pPr marL="342900" indent="-342900">
+              <a:lnSpc>
+                <a:spcPts val="3600"/>
+              </a:lnSpc>
+              <a:spcBef>
+                <a:spcPts val="200"/>
+              </a:spcBef>
+              <a:buNone/>
+            </a:pPr>
+            <a:r>
+              <a:rPr lang="en-US" sz="1300" b="1" dirty="0">
+                <a:solidFill>
+                  <a:srgbClr val="8AA79F"/>
+                </a:solidFill>
+                <a:latin typeface="Trebuchet MS"/>
+              </a:rPr>
+              <a:t>Step 2: Define target and train</a:t>
+            </a:r>
+          </a:p>
+          <a:p>
+            <a:pPr marL="342900" indent="-342900">
+              <a:lnSpc>
+                <a:spcPts val="3600"/>
+              </a:lnSpc>
+              <a:spcBef>
+                <a:spcPts val="200"/>
+              </a:spcBef>
+              <a:buNone/>
+            </a:pPr>
+            <a:r>
+              <a:rPr lang="en-US" sz="1200" b="0" dirty="0">
+                <a:solidFill>
+                  <a:srgbClr val="C5CAB8"/>
+                </a:solidFill>
+                <a:latin typeface="Calibri"/>
+              </a:rPr>
+              <a:t>aml = H2OAutoML(max_models=20, seed=42)</a:t>
+            </a:r>
+          </a:p>
+          <a:p>
+            <a:pPr marL="342900" indent="-342900">
+              <a:lnSpc>
+                <a:spcPts val="3600"/>
+              </a:lnSpc>
+              <a:spcBef>
+                <a:spcPts val="200"/>
+              </a:spcBef>
+              <a:buNone/>
+            </a:pPr>
+            <a:r>
+              <a:rPr lang="en-US" sz="1200" b="0" dirty="0">
+                <a:solidFill>
+                  <a:srgbClr val="C5CAB8"/>
+                </a:solidFill>
+                <a:latin typeface="Calibri"/>
+              </a:rPr>
+              <a:t>aml.train(x=features, y='Maize_Yield', training_frame=df)</a:t>
+            </a:r>
+          </a:p>
+          <a:p>
+            <a:pPr marL="342900" indent="-342900">
+              <a:lnSpc>
+                <a:spcPts val="3600"/>
+              </a:lnSpc>
+              <a:spcBef>
+                <a:spcPts val="200"/>
+              </a:spcBef>
+              <a:buNone/>
+            </a:pPr>
+            <a:endParaRPr lang="en-US" sz="1200" b="0" dirty="0">
+              <a:solidFill>
+                <a:srgbClr val="C5CAB8"/>
+              </a:solidFill>
+              <a:latin typeface="Calibri"/>
+            </a:endParaRPr>
+          </a:p>
+          <a:p>
+            <a:pPr marL="342900" indent="-342900">
+              <a:lnSpc>
+                <a:spcPts val="3600"/>
+              </a:lnSpc>
+              <a:spcBef>
+                <a:spcPts val="200"/>
+              </a:spcBef>
+              <a:buNone/>
+            </a:pPr>
+            <a:r>
+              <a:rPr lang="en-US" sz="1300" b="1" dirty="0">
+                <a:solidFill>
+                  <a:srgbClr val="8AA79F"/>
+                </a:solidFill>
+                <a:latin typeface="Trebuchet MS"/>
+              </a:rPr>
+              <a:t>Step 3: Explore results</a:t>
+            </a:r>
+          </a:p>
+          <a:p>
+            <a:pPr marL="342900" indent="-342900">
+              <a:lnSpc>
+                <a:spcPts val="3600"/>
+              </a:lnSpc>
+              <a:spcBef>
+                <a:spcPts val="200"/>
+              </a:spcBef>
+              <a:buNone/>
+            </a:pPr>
+            <a:r>
+              <a:rPr lang="en-US" sz="1200" b="0" dirty="0">
+                <a:solidFill>
+                  <a:srgbClr val="C5CAB8"/>
+                </a:solidFill>
+                <a:latin typeface="Calibri"/>
+              </a:rPr>
+              <a:t>aml.leaderboard  # ranked model comparison</a:t>
+            </a:r>
+          </a:p>
+          <a:p>
+            <a:pPr marL="342900" indent="-342900">
+              <a:lnSpc>
+                <a:spcPts val="3600"/>
+              </a:lnSpc>
+              <a:spcBef>
+                <a:spcPts val="200"/>
+              </a:spcBef>
+              <a:buNone/>
+            </a:pPr>
+            <a:r>
+              <a:rPr lang="en-US" sz="1200" b="0" dirty="0">
+                <a:solidFill>
+                  <a:srgbClr val="C5CAB8"/>
+                </a:solidFill>
+                <a:latin typeface="Calibri"/>
+              </a:rPr>
+              <a:t>aml.leader  # best model — get predictions</a:t>
+            </a:r>
+          </a:p>
+          <a:p>
+            <a:pPr marL="342900" indent="-342900">
+              <a:lnSpc>
+                <a:spcPts val="3600"/>
+              </a:lnSpc>
+              <a:spcBef>
+                <a:spcPts val="200"/>
+              </a:spcBef>
+              <a:buNone/>
+            </a:pPr>
+            <a:r>
+              <a:rPr lang="en-US" sz="1200" b="0" dirty="0">
+                <a:solidFill>
+                  <a:srgbClr val="C5CAB8"/>
+                </a:solidFill>
+                <a:latin typeface="Calibri"/>
+              </a:rPr>
+              <a:t>aml.leader.save('best_model/')  # save for production</a:t>
+            </a:r>
+          </a:p>
+        </p:txBody>
+      </p:sp>
+      <p:sp>
+        <p:nvSpPr>
+          <p:cNvPr id="20" name="CB20"/>
           <p:cNvSpPr>
             <a:spLocks noGrp="1"/>
           </p:cNvSpPr>
-          <p:nvPr>
-            <p:ph idx="1"/>
-          </p:nvPr>
-        </p:nvSpPr>
-        <p:spPr/>
+          <p:nvPr/>
+        </p:nvSpPr>
+        <p:spPr>
+          <a:xfrm>
+            <a:off x="6300000" y="950000"/>
+            <a:ext cx="5450000" cy="4500000"/>
+          </a:xfrm>
+          <a:prstGeom prst="rect">
+            <a:avLst/>
+          </a:prstGeom>
+          <a:solidFill>
+            <a:srgbClr val="F0F8F7"/>
+          </a:solidFill>
+          <a:ln>
+            <a:noFill/>
+          </a:ln>
+        </p:spPr>
         <p:txBody>
           <a:bodyPr/>
           <a:lstStyle/>
           <a:p>
-            <a:endParaRPr lang="en-US" dirty="0"/>
+            <a:endParaRPr lang="en-US"/>
+          </a:p>
+        </p:txBody>
+      </p:sp>
+      <p:sp>
+        <p:nvSpPr>
+          <p:cNvPr id="21" name="TB21"/>
+          <p:cNvSpPr txBox="1">
+            <a:spLocks noGrp="1"/>
+          </p:cNvSpPr>
+          <p:nvPr/>
+        </p:nvSpPr>
+        <p:spPr>
+          <a:xfrm>
+            <a:off x="6500000" y="1000000"/>
+            <a:ext cx="5100000" cy="500000"/>
+          </a:xfrm>
+          <a:prstGeom prst="rect">
+            <a:avLst/>
+          </a:prstGeom>
+          <a:noFill/>
+        </p:spPr>
+        <p:txBody>
+          <a:bodyPr>
+            <a:normAutofit/>
+          </a:bodyPr>
+          <a:lstStyle/>
+          <a:p>
+            <a:pPr algn="l"/>
+            <a:r>
+              <a:rPr lang="en-US" sz="1800" b="1" dirty="0">
+                <a:solidFill>
+                  <a:srgbClr val="15616D"/>
+                </a:solidFill>
+                <a:latin typeface="Trebuchet MS"/>
+              </a:rPr>
+              <a:t>H2O AutoML Output</a:t>
+            </a:r>
+          </a:p>
+        </p:txBody>
+      </p:sp>
+      <p:sp>
+        <p:nvSpPr>
+          <p:cNvPr id="22" name="BL22"/>
+          <p:cNvSpPr txBox="1">
+            <a:spLocks noGrp="1"/>
+          </p:cNvSpPr>
+          <p:nvPr/>
+        </p:nvSpPr>
+        <p:spPr>
+          <a:xfrm>
+            <a:off x="6500000" y="1600000"/>
+            <a:ext cx="5100000" cy="3700000"/>
+          </a:xfrm>
+          <a:prstGeom prst="rect">
+            <a:avLst/>
+          </a:prstGeom>
+          <a:noFill/>
+        </p:spPr>
+        <p:txBody>
+          <a:bodyPr>
+            <a:normAutofit/>
+          </a:bodyPr>
+          <a:lstStyle/>
+          <a:p>
+            <a:pPr marL="342900" indent="-342900">
+              <a:lnSpc>
+                <a:spcPts val="3600"/>
+              </a:lnSpc>
+              <a:spcBef>
+                <a:spcPts val="200"/>
+              </a:spcBef>
+              <a:buChar char="■"/>
+            </a:pPr>
+            <a:r>
+              <a:rPr lang="en-US" sz="1300" b="0" dirty="0">
+                <a:solidFill>
+                  <a:srgbClr val="444444"/>
+                </a:solidFill>
+                <a:latin typeface="Calibri"/>
+              </a:rPr>
+              <a:t>Leaderboard shows all models ranked by RMSE or AUC</a:t>
+            </a:r>
+          </a:p>
+          <a:p>
+            <a:pPr marL="342900" indent="-342900">
+              <a:lnSpc>
+                <a:spcPts val="3600"/>
+              </a:lnSpc>
+              <a:spcBef>
+                <a:spcPts val="200"/>
+              </a:spcBef>
+              <a:buChar char="■"/>
+            </a:pPr>
+            <a:r>
+              <a:rPr lang="en-US" sz="1300" b="0" dirty="0">
+                <a:solidFill>
+                  <a:srgbClr val="444444"/>
+                </a:solidFill>
+                <a:latin typeface="Calibri"/>
+              </a:rPr>
+              <a:t>Typical winners: Stacked Ensemble (combines all models)</a:t>
+            </a:r>
+          </a:p>
+          <a:p>
+            <a:pPr marL="342900" indent="-342900">
+              <a:lnSpc>
+                <a:spcPts val="3600"/>
+              </a:lnSpc>
+              <a:spcBef>
+                <a:spcPts val="200"/>
+              </a:spcBef>
+              <a:buChar char="■"/>
+            </a:pPr>
+            <a:r>
+              <a:rPr lang="en-US" sz="1300" b="0" dirty="0">
+                <a:solidFill>
+                  <a:srgbClr val="444444"/>
+                </a:solidFill>
+                <a:latin typeface="Calibri"/>
+              </a:rPr>
+              <a:t>XGBoost and GBM usually in top 3 for tabular data</a:t>
+            </a:r>
+          </a:p>
+          <a:p>
+            <a:pPr marL="342900" indent="-342900">
+              <a:lnSpc>
+                <a:spcPts val="3600"/>
+              </a:lnSpc>
+              <a:spcBef>
+                <a:spcPts val="200"/>
+              </a:spcBef>
+              <a:buNone/>
+            </a:pPr>
+            <a:endParaRPr lang="en-US" sz="1300" b="0" dirty="0">
+              <a:solidFill>
+                <a:srgbClr val="444444"/>
+              </a:solidFill>
+              <a:latin typeface="Calibri"/>
+            </a:endParaRPr>
+          </a:p>
+          <a:p>
+            <a:pPr marL="342900" indent="-342900">
+              <a:lnSpc>
+                <a:spcPts val="3600"/>
+              </a:lnSpc>
+              <a:spcBef>
+                <a:spcPts val="200"/>
+              </a:spcBef>
+              <a:buNone/>
+            </a:pPr>
+            <a:r>
+              <a:rPr lang="en-US" sz="1400" b="1" dirty="0">
+                <a:solidFill>
+                  <a:srgbClr val="BC5308"/>
+                </a:solidFill>
+                <a:latin typeface="Trebuchet MS"/>
+              </a:rPr>
+              <a:t>H2O Flow — Visual Dashboard</a:t>
+            </a:r>
+          </a:p>
+          <a:p>
+            <a:pPr marL="342900" indent="-342900">
+              <a:lnSpc>
+                <a:spcPts val="3600"/>
+              </a:lnSpc>
+              <a:spcBef>
+                <a:spcPts val="200"/>
+              </a:spcBef>
+              <a:buChar char="■"/>
+            </a:pPr>
+            <a:r>
+              <a:rPr lang="en-US" sz="1300" b="0" dirty="0">
+                <a:solidFill>
+                  <a:srgbClr val="444444"/>
+                </a:solidFill>
+                <a:latin typeface="Calibri"/>
+              </a:rPr>
+              <a:t>Web UI at localhost:54321 — no coding needed</a:t>
+            </a:r>
+          </a:p>
+          <a:p>
+            <a:pPr marL="342900" indent="-342900">
+              <a:lnSpc>
+                <a:spcPts val="3600"/>
+              </a:lnSpc>
+              <a:spcBef>
+                <a:spcPts val="200"/>
+              </a:spcBef>
+              <a:buChar char="■"/>
+            </a:pPr>
+            <a:r>
+              <a:rPr lang="en-US" sz="1300" b="0" dirty="0">
+                <a:solidFill>
+                  <a:srgbClr val="444444"/>
+                </a:solidFill>
+                <a:latin typeface="Calibri"/>
+              </a:rPr>
+              <a:t>View model performance, variable importance plots</a:t>
+            </a:r>
+          </a:p>
+          <a:p>
+            <a:pPr marL="342900" indent="-342900">
+              <a:lnSpc>
+                <a:spcPts val="3600"/>
+              </a:lnSpc>
+              <a:spcBef>
+                <a:spcPts val="200"/>
+              </a:spcBef>
+              <a:buChar char="■"/>
+            </a:pPr>
+            <a:r>
+              <a:rPr lang="en-US" sz="1300" b="0" dirty="0">
+                <a:solidFill>
+                  <a:srgbClr val="444444"/>
+                </a:solidFill>
+                <a:latin typeface="Calibri"/>
+              </a:rPr>
+              <a:t>Export models to MOJO format for Java deployment</a:t>
+            </a:r>
+          </a:p>
+          <a:p>
+            <a:pPr marL="342900" indent="-342900">
+              <a:lnSpc>
+                <a:spcPts val="3600"/>
+              </a:lnSpc>
+              <a:spcBef>
+                <a:spcPts val="200"/>
+              </a:spcBef>
+              <a:buNone/>
+            </a:pPr>
+            <a:endParaRPr lang="en-US" sz="1300" b="0" dirty="0">
+              <a:solidFill>
+                <a:srgbClr val="444444"/>
+              </a:solidFill>
+              <a:latin typeface="Calibri"/>
+            </a:endParaRPr>
+          </a:p>
+          <a:p>
+            <a:pPr marL="342900" indent="-342900">
+              <a:lnSpc>
+                <a:spcPts val="3600"/>
+              </a:lnSpc>
+              <a:spcBef>
+                <a:spcPts val="200"/>
+              </a:spcBef>
+              <a:buNone/>
+            </a:pPr>
+            <a:r>
+              <a:rPr lang="en-US" sz="1400" b="1" dirty="0">
+                <a:solidFill>
+                  <a:srgbClr val="15616D"/>
+                </a:solidFill>
+                <a:latin typeface="Trebuchet MS"/>
+              </a:rPr>
+              <a:t>Variable Importance</a:t>
+            </a:r>
+          </a:p>
+          <a:p>
+            <a:pPr marL="342900" indent="-342900">
+              <a:lnSpc>
+                <a:spcPts val="3600"/>
+              </a:lnSpc>
+              <a:spcBef>
+                <a:spcPts val="200"/>
+              </a:spcBef>
+              <a:buChar char="■"/>
+            </a:pPr>
+            <a:r>
+              <a:rPr lang="en-US" sz="1300" b="0" dirty="0">
+                <a:solidFill>
+                  <a:srgbClr val="444444"/>
+                </a:solidFill>
+                <a:latin typeface="Calibri"/>
+              </a:rPr>
+              <a:t>Shows which features matter most for predictions</a:t>
+            </a:r>
+          </a:p>
+          <a:p>
+            <a:pPr marL="342900" indent="-342900">
+              <a:lnSpc>
+                <a:spcPts val="3600"/>
+              </a:lnSpc>
+              <a:spcBef>
+                <a:spcPts val="200"/>
+              </a:spcBef>
+              <a:buChar char="■"/>
+            </a:pPr>
+            <a:r>
+              <a:rPr lang="en-US" sz="1300" b="0" dirty="0">
+                <a:solidFill>
+                  <a:srgbClr val="444444"/>
+                </a:solidFill>
+                <a:latin typeface="Calibri"/>
+              </a:rPr>
+              <a:t>Critical for explaining models to non-technical stakeholders</a:t>
+            </a:r>
+          </a:p>
+        </p:txBody>
+      </p:sp>
+      <p:sp>
+        <p:nvSpPr>
+          <p:cNvPr id="90" name="FooterBar"/>
+          <p:cNvSpPr>
+            <a:spLocks noGrp="1"/>
+          </p:cNvSpPr>
+          <p:nvPr/>
+        </p:nvSpPr>
+        <p:spPr>
+          <a:xfrm>
+            <a:off x="0" y="6400800"/>
+            <a:ext cx="12192000" cy="457200"/>
+          </a:xfrm>
+          <a:prstGeom prst="rect">
+            <a:avLst/>
+          </a:prstGeom>
+          <a:solidFill>
+            <a:srgbClr val="15616D"/>
+          </a:solidFill>
+          <a:ln>
+            <a:noFill/>
+          </a:ln>
+        </p:spPr>
+        <p:txBody>
+          <a:bodyPr/>
+          <a:lstStyle/>
+          <a:p>
+            <a:endParaRPr lang="en-US"/>
           </a:p>
         </p:txBody>
       </p:sp>
     </p:spTree>
-    <p:extLst>
-      <p:ext uri="{BB962C8B-B14F-4D97-AF65-F5344CB8AC3E}">
-        <p14:creationId xmlns:p14="http://schemas.microsoft.com/office/powerpoint/2010/main" val="441940434"/>
-      </p:ext>
-    </p:extLst>
   </p:cSld>
   <p:clrMapOvr>
     <a:masterClrMapping/>
